--- a/Materjalid/Day9 Andmekorraldus Dim Fakt/9-paev-andmetarkus-esitlus.pptx
+++ b/Materjalid/Day9 Andmekorraldus Dim Fakt/9-paev-andmetarkus-esitlus.pptx
@@ -5,7 +5,7 @@
     <p:sldMasterId id="2147483648" r:id="rId1"/>
   </p:sldMasterIdLst>
   <p:notesMasterIdLst>
-    <p:notesMasterId r:id="rId15"/>
+    <p:notesMasterId r:id="rId9"/>
   </p:notesMasterIdLst>
   <p:sldIdLst>
     <p:sldId id="489" r:id="rId2"/>
@@ -15,12 +15,6 @@
     <p:sldId id="500" r:id="rId6"/>
     <p:sldId id="283" r:id="rId7"/>
     <p:sldId id="494" r:id="rId8"/>
-    <p:sldId id="508" r:id="rId9"/>
-    <p:sldId id="671" r:id="rId10"/>
-    <p:sldId id="522" r:id="rId11"/>
-    <p:sldId id="525" r:id="rId12"/>
-    <p:sldId id="526" r:id="rId13"/>
-    <p:sldId id="272" r:id="rId14"/>
   </p:sldIdLst>
   <p:sldSz cx="12192000" cy="6858000"/>
   <p:notesSz cx="6858000" cy="9144000"/>
@@ -1874,7 +1868,7 @@
           <a:p>
             <a:fld id="{333597B7-8DC3-44E7-8983-02268CA82C48}" type="datetimeFigureOut">
               <a:rPr lang="en-GB" smtClean="0"/>
-              <a:t>10/09/2026</a:t>
+              <a:t>02/10/2026</a:t>
             </a:fld>
             <a:endParaRPr lang="en-GB"/>
           </a:p>
@@ -2986,503 +2980,6 @@
 </p:notes>
 </file>
 
-<file path=ppt/notesSlides/notesSlide4.xml><?xml version="1.0" encoding="utf-8"?>
-<p:notes xmlns:a="http://schemas.openxmlformats.org/drawingml/2006/main" xmlns:r="http://schemas.openxmlformats.org/officeDocument/2006/relationships" xmlns:p="http://schemas.openxmlformats.org/presentationml/2006/main">
-  <p:cSld>
-    <p:spTree>
-      <p:nvGrpSpPr>
-        <p:cNvPr id="1" name=""/>
-        <p:cNvGrpSpPr/>
-        <p:nvPr/>
-      </p:nvGrpSpPr>
-      <p:grpSpPr>
-        <a:xfrm>
-          <a:off x="0" y="0"/>
-          <a:ext cx="0" cy="0"/>
-          <a:chOff x="0" y="0"/>
-          <a:chExt cx="0" cy="0"/>
-        </a:xfrm>
-      </p:grpSpPr>
-      <p:sp>
-        <p:nvSpPr>
-          <p:cNvPr id="2" name="Slide Image Placeholder 1"/>
-          <p:cNvSpPr>
-            <a:spLocks noGrp="1" noRot="1" noChangeAspect="1"/>
-          </p:cNvSpPr>
-          <p:nvPr>
-            <p:ph type="sldImg" idx="2"/>
-          </p:nvPr>
-        </p:nvSpPr>
-        <p:spPr/>
-        <p:txBody>
-          <a:bodyPr/>
-          <a:lstStyle/>
-          <a:p>
-            <a:endParaRPr lang="en-GB"/>
-          </a:p>
-        </p:txBody>
-      </p:sp>
-      <p:sp>
-        <p:nvSpPr>
-          <p:cNvPr id="3" name="Notes Placeholder 2"/>
-          <p:cNvSpPr>
-            <a:spLocks noGrp="1"/>
-          </p:cNvSpPr>
-          <p:nvPr>
-            <p:ph type="body" sz="quarter" idx="3"/>
-          </p:nvPr>
-        </p:nvSpPr>
-        <p:spPr/>
-        <p:txBody>
-          <a:bodyPr/>
-          <a:lstStyle/>
-          <a:p>
-            <a:endParaRPr dirty="0"/>
-          </a:p>
-        </p:txBody>
-      </p:sp>
-      <p:sp>
-        <p:nvSpPr>
-          <p:cNvPr id="4" name="Slide Number Placeholder 3"/>
-          <p:cNvSpPr>
-            <a:spLocks noGrp="1"/>
-          </p:cNvSpPr>
-          <p:nvPr>
-            <p:ph type="sldNum" sz="quarter" idx="5"/>
-          </p:nvPr>
-        </p:nvSpPr>
-        <p:spPr/>
-        <p:txBody>
-          <a:bodyPr/>
-          <a:lstStyle/>
-          <a:p>
-            <a:endParaRPr lang="en-GB"/>
-          </a:p>
-        </p:txBody>
-      </p:sp>
-    </p:spTree>
-  </p:cSld>
-  <p:clrMapOvr>
-    <a:masterClrMapping/>
-  </p:clrMapOvr>
-</p:notes>
-</file>
-
-<file path=ppt/notesSlides/notesSlide5.xml><?xml version="1.0" encoding="utf-8"?>
-<p:notes xmlns:a="http://schemas.openxmlformats.org/drawingml/2006/main" xmlns:r="http://schemas.openxmlformats.org/officeDocument/2006/relationships" xmlns:p="http://schemas.openxmlformats.org/presentationml/2006/main">
-  <p:cSld>
-    <p:spTree>
-      <p:nvGrpSpPr>
-        <p:cNvPr id="1" name="">
-          <a:extLst>
-            <a:ext uri="{FF2B5EF4-FFF2-40B4-BE49-F238E27FC236}">
-              <a16:creationId xmlns:a16="http://schemas.microsoft.com/office/drawing/2014/main" id="{5011BA1A-EF45-3029-ACB0-CF2B5A919C05}"/>
-            </a:ext>
-          </a:extLst>
-        </p:cNvPr>
-        <p:cNvGrpSpPr/>
-        <p:nvPr/>
-      </p:nvGrpSpPr>
-      <p:grpSpPr>
-        <a:xfrm>
-          <a:off x="0" y="0"/>
-          <a:ext cx="0" cy="0"/>
-          <a:chOff x="0" y="0"/>
-          <a:chExt cx="0" cy="0"/>
-        </a:xfrm>
-      </p:grpSpPr>
-      <p:sp>
-        <p:nvSpPr>
-          <p:cNvPr id="2" name="Slide Image Placeholder 1">
-            <a:extLst>
-              <a:ext uri="{FF2B5EF4-FFF2-40B4-BE49-F238E27FC236}">
-                <a16:creationId xmlns:a16="http://schemas.microsoft.com/office/drawing/2014/main" id="{6D854E4F-312F-EA29-33DA-E6B76FE49214}"/>
-              </a:ext>
-            </a:extLst>
-          </p:cNvPr>
-          <p:cNvSpPr>
-            <a:spLocks noGrp="1" noRot="1" noChangeAspect="1"/>
-          </p:cNvSpPr>
-          <p:nvPr>
-            <p:ph type="sldImg" idx="2"/>
-          </p:nvPr>
-        </p:nvSpPr>
-        <p:spPr/>
-        <p:txBody>
-          <a:bodyPr/>
-          <a:lstStyle/>
-          <a:p>
-            <a:endParaRPr lang="en-GB"/>
-          </a:p>
-        </p:txBody>
-      </p:sp>
-      <p:sp>
-        <p:nvSpPr>
-          <p:cNvPr id="3" name="Notes Placeholder 2">
-            <a:extLst>
-              <a:ext uri="{FF2B5EF4-FFF2-40B4-BE49-F238E27FC236}">
-                <a16:creationId xmlns:a16="http://schemas.microsoft.com/office/drawing/2014/main" id="{83001420-A1DD-11FB-DA9C-1BFE915CEF66}"/>
-              </a:ext>
-            </a:extLst>
-          </p:cNvPr>
-          <p:cNvSpPr>
-            <a:spLocks noGrp="1"/>
-          </p:cNvSpPr>
-          <p:nvPr>
-            <p:ph type="body" sz="quarter" idx="3"/>
-          </p:nvPr>
-        </p:nvSpPr>
-        <p:spPr/>
-        <p:txBody>
-          <a:bodyPr/>
-          <a:lstStyle/>
-          <a:p>
-            <a:endParaRPr dirty="0"/>
-          </a:p>
-        </p:txBody>
-      </p:sp>
-      <p:sp>
-        <p:nvSpPr>
-          <p:cNvPr id="4" name="Slide Number Placeholder 3">
-            <a:extLst>
-              <a:ext uri="{FF2B5EF4-FFF2-40B4-BE49-F238E27FC236}">
-                <a16:creationId xmlns:a16="http://schemas.microsoft.com/office/drawing/2014/main" id="{54975C40-CC50-FEE8-38DC-A83D7C26A635}"/>
-              </a:ext>
-            </a:extLst>
-          </p:cNvPr>
-          <p:cNvSpPr>
-            <a:spLocks noGrp="1"/>
-          </p:cNvSpPr>
-          <p:nvPr>
-            <p:ph type="sldNum" sz="quarter" idx="5"/>
-          </p:nvPr>
-        </p:nvSpPr>
-        <p:spPr/>
-        <p:txBody>
-          <a:bodyPr/>
-          <a:lstStyle/>
-          <a:p>
-            <a:endParaRPr lang="en-GB"/>
-          </a:p>
-        </p:txBody>
-      </p:sp>
-    </p:spTree>
-    <p:extLst>
-      <p:ext uri="{BB962C8B-B14F-4D97-AF65-F5344CB8AC3E}">
-        <p14:creationId xmlns:p14="http://schemas.microsoft.com/office/powerpoint/2010/main" val="3157476856"/>
-      </p:ext>
-    </p:extLst>
-  </p:cSld>
-  <p:clrMapOvr>
-    <a:masterClrMapping/>
-  </p:clrMapOvr>
-</p:notes>
-</file>
-
-<file path=ppt/notesSlides/notesSlide6.xml><?xml version="1.0" encoding="utf-8"?>
-<p:notes xmlns:a="http://schemas.openxmlformats.org/drawingml/2006/main" xmlns:r="http://schemas.openxmlformats.org/officeDocument/2006/relationships" xmlns:p="http://schemas.openxmlformats.org/presentationml/2006/main">
-  <p:cSld>
-    <p:spTree>
-      <p:nvGrpSpPr>
-        <p:cNvPr id="1" name="">
-          <a:extLst>
-            <a:ext uri="{FF2B5EF4-FFF2-40B4-BE49-F238E27FC236}">
-              <a16:creationId xmlns:a16="http://schemas.microsoft.com/office/drawing/2014/main" id="{611EC802-079C-B986-D366-9BCF9BE22731}"/>
-            </a:ext>
-          </a:extLst>
-        </p:cNvPr>
-        <p:cNvGrpSpPr/>
-        <p:nvPr/>
-      </p:nvGrpSpPr>
-      <p:grpSpPr>
-        <a:xfrm>
-          <a:off x="0" y="0"/>
-          <a:ext cx="0" cy="0"/>
-          <a:chOff x="0" y="0"/>
-          <a:chExt cx="0" cy="0"/>
-        </a:xfrm>
-      </p:grpSpPr>
-      <p:sp>
-        <p:nvSpPr>
-          <p:cNvPr id="2" name="Slide Image Placeholder 1">
-            <a:extLst>
-              <a:ext uri="{FF2B5EF4-FFF2-40B4-BE49-F238E27FC236}">
-                <a16:creationId xmlns:a16="http://schemas.microsoft.com/office/drawing/2014/main" id="{1CDDDE36-93FB-AEEC-AB9D-AD7080C5AC79}"/>
-              </a:ext>
-            </a:extLst>
-          </p:cNvPr>
-          <p:cNvSpPr>
-            <a:spLocks noGrp="1" noRot="1" noChangeAspect="1"/>
-          </p:cNvSpPr>
-          <p:nvPr>
-            <p:ph type="sldImg" idx="2"/>
-          </p:nvPr>
-        </p:nvSpPr>
-        <p:spPr/>
-        <p:txBody>
-          <a:bodyPr/>
-          <a:lstStyle/>
-          <a:p>
-            <a:endParaRPr lang="en-GB"/>
-          </a:p>
-        </p:txBody>
-      </p:sp>
-      <p:sp>
-        <p:nvSpPr>
-          <p:cNvPr id="3" name="Notes Placeholder 2">
-            <a:extLst>
-              <a:ext uri="{FF2B5EF4-FFF2-40B4-BE49-F238E27FC236}">
-                <a16:creationId xmlns:a16="http://schemas.microsoft.com/office/drawing/2014/main" id="{9B73DB12-AE90-B119-DDDC-5567E6C6397A}"/>
-              </a:ext>
-            </a:extLst>
-          </p:cNvPr>
-          <p:cNvSpPr>
-            <a:spLocks noGrp="1"/>
-          </p:cNvSpPr>
-          <p:nvPr>
-            <p:ph type="body" sz="quarter" idx="3"/>
-          </p:nvPr>
-        </p:nvSpPr>
-        <p:spPr/>
-        <p:txBody>
-          <a:bodyPr/>
-          <a:lstStyle/>
-          <a:p>
-            <a:endParaRPr dirty="0"/>
-          </a:p>
-        </p:txBody>
-      </p:sp>
-      <p:sp>
-        <p:nvSpPr>
-          <p:cNvPr id="4" name="Slide Number Placeholder 3">
-            <a:extLst>
-              <a:ext uri="{FF2B5EF4-FFF2-40B4-BE49-F238E27FC236}">
-                <a16:creationId xmlns:a16="http://schemas.microsoft.com/office/drawing/2014/main" id="{76D436FD-74A8-12D5-1DE5-E093A9DF7619}"/>
-              </a:ext>
-            </a:extLst>
-          </p:cNvPr>
-          <p:cNvSpPr>
-            <a:spLocks noGrp="1"/>
-          </p:cNvSpPr>
-          <p:nvPr>
-            <p:ph type="sldNum" sz="quarter" idx="5"/>
-          </p:nvPr>
-        </p:nvSpPr>
-        <p:spPr/>
-        <p:txBody>
-          <a:bodyPr/>
-          <a:lstStyle/>
-          <a:p>
-            <a:endParaRPr lang="en-GB"/>
-          </a:p>
-        </p:txBody>
-      </p:sp>
-    </p:spTree>
-    <p:extLst>
-      <p:ext uri="{BB962C8B-B14F-4D97-AF65-F5344CB8AC3E}">
-        <p14:creationId xmlns:p14="http://schemas.microsoft.com/office/powerpoint/2010/main" val="3396222797"/>
-      </p:ext>
-    </p:extLst>
-  </p:cSld>
-  <p:clrMapOvr>
-    <a:masterClrMapping/>
-  </p:clrMapOvr>
-</p:notes>
-</file>
-
-<file path=ppt/notesSlides/notesSlide7.xml><?xml version="1.0" encoding="utf-8"?>
-<p:notes xmlns:a="http://schemas.openxmlformats.org/drawingml/2006/main" xmlns:r="http://schemas.openxmlformats.org/officeDocument/2006/relationships" xmlns:p="http://schemas.openxmlformats.org/presentationml/2006/main">
-  <p:cSld>
-    <p:spTree>
-      <p:nvGrpSpPr>
-        <p:cNvPr id="1" name="">
-          <a:extLst>
-            <a:ext uri="{FF2B5EF4-FFF2-40B4-BE49-F238E27FC236}">
-              <a16:creationId xmlns:a16="http://schemas.microsoft.com/office/drawing/2014/main" id="{BE2825F4-5CE5-E1DF-EA66-61916E5CB07D}"/>
-            </a:ext>
-          </a:extLst>
-        </p:cNvPr>
-        <p:cNvGrpSpPr/>
-        <p:nvPr/>
-      </p:nvGrpSpPr>
-      <p:grpSpPr>
-        <a:xfrm>
-          <a:off x="0" y="0"/>
-          <a:ext cx="0" cy="0"/>
-          <a:chOff x="0" y="0"/>
-          <a:chExt cx="0" cy="0"/>
-        </a:xfrm>
-      </p:grpSpPr>
-      <p:sp>
-        <p:nvSpPr>
-          <p:cNvPr id="2" name="Slide Image Placeholder 1">
-            <a:extLst>
-              <a:ext uri="{FF2B5EF4-FFF2-40B4-BE49-F238E27FC236}">
-                <a16:creationId xmlns:a16="http://schemas.microsoft.com/office/drawing/2014/main" id="{F6DDE845-F836-A8E8-2991-D30E2539C09A}"/>
-              </a:ext>
-            </a:extLst>
-          </p:cNvPr>
-          <p:cNvSpPr>
-            <a:spLocks noGrp="1" noRot="1" noChangeAspect="1"/>
-          </p:cNvSpPr>
-          <p:nvPr>
-            <p:ph type="sldImg" idx="2"/>
-          </p:nvPr>
-        </p:nvSpPr>
-        <p:spPr/>
-        <p:txBody>
-          <a:bodyPr/>
-          <a:lstStyle/>
-          <a:p>
-            <a:endParaRPr lang="en-GB"/>
-          </a:p>
-        </p:txBody>
-      </p:sp>
-      <p:sp>
-        <p:nvSpPr>
-          <p:cNvPr id="3" name="Notes Placeholder 2">
-            <a:extLst>
-              <a:ext uri="{FF2B5EF4-FFF2-40B4-BE49-F238E27FC236}">
-                <a16:creationId xmlns:a16="http://schemas.microsoft.com/office/drawing/2014/main" id="{F053155C-B531-72AE-A399-C30EA144587E}"/>
-              </a:ext>
-            </a:extLst>
-          </p:cNvPr>
-          <p:cNvSpPr>
-            <a:spLocks noGrp="1"/>
-          </p:cNvSpPr>
-          <p:nvPr>
-            <p:ph type="body" sz="quarter" idx="3"/>
-          </p:nvPr>
-        </p:nvSpPr>
-        <p:spPr/>
-        <p:txBody>
-          <a:bodyPr/>
-          <a:lstStyle/>
-          <a:p>
-            <a:endParaRPr dirty="0"/>
-          </a:p>
-        </p:txBody>
-      </p:sp>
-      <p:sp>
-        <p:nvSpPr>
-          <p:cNvPr id="4" name="Slide Number Placeholder 3">
-            <a:extLst>
-              <a:ext uri="{FF2B5EF4-FFF2-40B4-BE49-F238E27FC236}">
-                <a16:creationId xmlns:a16="http://schemas.microsoft.com/office/drawing/2014/main" id="{B9697BEE-F010-C6BA-0640-778AC60DAB55}"/>
-              </a:ext>
-            </a:extLst>
-          </p:cNvPr>
-          <p:cNvSpPr>
-            <a:spLocks noGrp="1"/>
-          </p:cNvSpPr>
-          <p:nvPr>
-            <p:ph type="sldNum" sz="quarter" idx="5"/>
-          </p:nvPr>
-        </p:nvSpPr>
-        <p:spPr/>
-        <p:txBody>
-          <a:bodyPr/>
-          <a:lstStyle/>
-          <a:p>
-            <a:endParaRPr lang="en-GB"/>
-          </a:p>
-        </p:txBody>
-      </p:sp>
-    </p:spTree>
-    <p:extLst>
-      <p:ext uri="{BB962C8B-B14F-4D97-AF65-F5344CB8AC3E}">
-        <p14:creationId xmlns:p14="http://schemas.microsoft.com/office/powerpoint/2010/main" val="1989239222"/>
-      </p:ext>
-    </p:extLst>
-  </p:cSld>
-  <p:clrMapOvr>
-    <a:masterClrMapping/>
-  </p:clrMapOvr>
-</p:notes>
-</file>
-
-<file path=ppt/notesSlides/notesSlide8.xml><?xml version="1.0" encoding="utf-8"?>
-<p:notes xmlns:a="http://schemas.openxmlformats.org/drawingml/2006/main" xmlns:r="http://schemas.openxmlformats.org/officeDocument/2006/relationships" xmlns:p="http://schemas.openxmlformats.org/presentationml/2006/main">
-  <p:cSld>
-    <p:spTree>
-      <p:nvGrpSpPr>
-        <p:cNvPr id="1" name=""/>
-        <p:cNvGrpSpPr/>
-        <p:nvPr/>
-      </p:nvGrpSpPr>
-      <p:grpSpPr>
-        <a:xfrm>
-          <a:off x="0" y="0"/>
-          <a:ext cx="0" cy="0"/>
-          <a:chOff x="0" y="0"/>
-          <a:chExt cx="0" cy="0"/>
-        </a:xfrm>
-      </p:grpSpPr>
-      <p:sp>
-        <p:nvSpPr>
-          <p:cNvPr id="2" name="Slide Image Placeholder 1"/>
-          <p:cNvSpPr>
-            <a:spLocks noGrp="1" noRot="1" noChangeAspect="1"/>
-          </p:cNvSpPr>
-          <p:nvPr>
-            <p:ph type="sldImg" idx="2"/>
-          </p:nvPr>
-        </p:nvSpPr>
-        <p:spPr/>
-        <p:txBody>
-          <a:bodyPr/>
-          <a:lstStyle/>
-          <a:p>
-            <a:endParaRPr lang="en-GB"/>
-          </a:p>
-        </p:txBody>
-      </p:sp>
-      <p:sp>
-        <p:nvSpPr>
-          <p:cNvPr id="3" name="Notes Placeholder 2"/>
-          <p:cNvSpPr>
-            <a:spLocks noGrp="1"/>
-          </p:cNvSpPr>
-          <p:nvPr>
-            <p:ph type="body" sz="quarter" idx="3"/>
-          </p:nvPr>
-        </p:nvSpPr>
-        <p:spPr/>
-        <p:txBody>
-          <a:bodyPr/>
-          <a:lstStyle/>
-          <a:p>
-            <a:endParaRPr/>
-          </a:p>
-        </p:txBody>
-      </p:sp>
-      <p:sp>
-        <p:nvSpPr>
-          <p:cNvPr id="4" name="Slide Number Placeholder 3"/>
-          <p:cNvSpPr>
-            <a:spLocks noGrp="1"/>
-          </p:cNvSpPr>
-          <p:nvPr>
-            <p:ph type="sldNum" sz="quarter" idx="5"/>
-          </p:nvPr>
-        </p:nvSpPr>
-        <p:spPr/>
-        <p:txBody>
-          <a:bodyPr/>
-          <a:lstStyle/>
-          <a:p>
-            <a:endParaRPr lang="en-GB"/>
-          </a:p>
-        </p:txBody>
-      </p:sp>
-    </p:spTree>
-  </p:cSld>
-  <p:clrMapOvr>
-    <a:masterClrMapping/>
-  </p:clrMapOvr>
-</p:notes>
-</file>
-
 <file path=ppt/slideLayouts/slideLayout1.xml><?xml version="1.0" encoding="utf-8"?>
 <p:sldLayout xmlns:a="http://schemas.openxmlformats.org/drawingml/2006/main" xmlns:r="http://schemas.openxmlformats.org/officeDocument/2006/relationships" xmlns:p="http://schemas.openxmlformats.org/presentationml/2006/main" type="title" preserve="1">
   <p:cSld name="Title Slide">
@@ -3662,7 +3159,7 @@
           <a:p>
             <a:fld id="{5BCAD085-E8A6-8845-BD4E-CB4CCA059FC4}" type="datetimeFigureOut">
               <a:rPr lang="en-US" smtClean="0"/>
-              <a:t>9/10/2026</a:t>
+              <a:t>10/2/2026</a:t>
             </a:fld>
             <a:endParaRPr lang="en-US"/>
           </a:p>
@@ -3830,7 +3327,7 @@
           <a:p>
             <a:fld id="{5BCAD085-E8A6-8845-BD4E-CB4CCA059FC4}" type="datetimeFigureOut">
               <a:rPr lang="en-US" smtClean="0"/>
-              <a:t>9/10/2026</a:t>
+              <a:t>10/2/2026</a:t>
             </a:fld>
             <a:endParaRPr lang="en-US"/>
           </a:p>
@@ -4008,7 +3505,7 @@
           <a:p>
             <a:fld id="{5BCAD085-E8A6-8845-BD4E-CB4CCA059FC4}" type="datetimeFigureOut">
               <a:rPr lang="en-US" smtClean="0"/>
-              <a:t>9/10/2026</a:t>
+              <a:t>10/2/2026</a:t>
             </a:fld>
             <a:endParaRPr lang="en-US"/>
           </a:p>
@@ -4908,7 +4405,7 @@
           <a:p>
             <a:fld id="{5BCAD085-E8A6-8845-BD4E-CB4CCA059FC4}" type="datetimeFigureOut">
               <a:rPr lang="en-US" smtClean="0"/>
-              <a:t>9/10/2026</a:t>
+              <a:t>10/2/2026</a:t>
             </a:fld>
             <a:endParaRPr lang="en-US"/>
           </a:p>
@@ -5153,7 +4650,7 @@
           <a:p>
             <a:fld id="{5BCAD085-E8A6-8845-BD4E-CB4CCA059FC4}" type="datetimeFigureOut">
               <a:rPr lang="en-US" smtClean="0"/>
-              <a:t>9/10/2026</a:t>
+              <a:t>10/2/2026</a:t>
             </a:fld>
             <a:endParaRPr lang="en-US"/>
           </a:p>
@@ -5438,7 +4935,7 @@
           <a:p>
             <a:fld id="{5BCAD085-E8A6-8845-BD4E-CB4CCA059FC4}" type="datetimeFigureOut">
               <a:rPr lang="en-US" smtClean="0"/>
-              <a:t>9/10/2026</a:t>
+              <a:t>10/2/2026</a:t>
             </a:fld>
             <a:endParaRPr lang="en-US"/>
           </a:p>
@@ -5857,7 +5354,7 @@
           <a:p>
             <a:fld id="{5BCAD085-E8A6-8845-BD4E-CB4CCA059FC4}" type="datetimeFigureOut">
               <a:rPr lang="en-US" smtClean="0"/>
-              <a:t>9/10/2026</a:t>
+              <a:t>10/2/2026</a:t>
             </a:fld>
             <a:endParaRPr lang="en-US"/>
           </a:p>
@@ -5974,7 +5471,7 @@
           <a:p>
             <a:fld id="{5BCAD085-E8A6-8845-BD4E-CB4CCA059FC4}" type="datetimeFigureOut">
               <a:rPr lang="en-US" smtClean="0"/>
-              <a:t>9/10/2026</a:t>
+              <a:t>10/2/2026</a:t>
             </a:fld>
             <a:endParaRPr lang="en-US"/>
           </a:p>
@@ -6069,7 +5566,7 @@
           <a:p>
             <a:fld id="{5BCAD085-E8A6-8845-BD4E-CB4CCA059FC4}" type="datetimeFigureOut">
               <a:rPr lang="en-US" smtClean="0"/>
-              <a:t>9/10/2026</a:t>
+              <a:t>10/2/2026</a:t>
             </a:fld>
             <a:endParaRPr lang="en-US"/>
           </a:p>
@@ -6344,7 +5841,7 @@
           <a:p>
             <a:fld id="{5BCAD085-E8A6-8845-BD4E-CB4CCA059FC4}" type="datetimeFigureOut">
               <a:rPr lang="en-US" smtClean="0"/>
-              <a:t>9/10/2026</a:t>
+              <a:t>10/2/2026</a:t>
             </a:fld>
             <a:endParaRPr lang="en-US"/>
           </a:p>
@@ -6596,7 +6093,7 @@
           <a:p>
             <a:fld id="{5BCAD085-E8A6-8845-BD4E-CB4CCA059FC4}" type="datetimeFigureOut">
               <a:rPr lang="en-US" smtClean="0"/>
-              <a:t>9/10/2026</a:t>
+              <a:t>10/2/2026</a:t>
             </a:fld>
             <a:endParaRPr lang="en-US"/>
           </a:p>
@@ -6807,7 +6304,7 @@
           <a:p>
             <a:fld id="{5BCAD085-E8A6-8845-BD4E-CB4CCA059FC4}" type="datetimeFigureOut">
               <a:rPr lang="en-US" smtClean="0"/>
-              <a:t>9/10/2026</a:t>
+              <a:t>10/2/2026</a:t>
             </a:fld>
             <a:endParaRPr lang="en-US"/>
           </a:p>
@@ -6891,6 +6388,565 @@
           </a:p>
         </p:txBody>
       </p:sp>
+      <p:cxnSp>
+        <p:nvCxnSpPr>
+          <p:cNvPr id="7" name="Straight Connector 6">
+            <a:extLst>
+              <a:ext uri="{FF2B5EF4-FFF2-40B4-BE49-F238E27FC236}">
+                <a16:creationId xmlns:a16="http://schemas.microsoft.com/office/drawing/2014/main" id="{FBF5BA98-D840-EEA7-FF4D-BAE68BDD65B3}"/>
+              </a:ext>
+            </a:extLst>
+          </p:cNvPr>
+          <p:cNvCxnSpPr>
+            <a:cxnSpLocks/>
+          </p:cNvCxnSpPr>
+          <p:nvPr userDrawn="1"/>
+        </p:nvCxnSpPr>
+        <p:spPr>
+          <a:xfrm>
+            <a:off x="623888" y="6414621"/>
+            <a:ext cx="9529762" cy="0"/>
+          </a:xfrm>
+          <a:prstGeom prst="line">
+            <a:avLst/>
+          </a:prstGeom>
+          <a:ln w="38100">
+            <a:solidFill>
+              <a:schemeClr val="tx2"/>
+            </a:solidFill>
+          </a:ln>
+        </p:spPr>
+        <p:style>
+          <a:lnRef idx="1">
+            <a:schemeClr val="accent1"/>
+          </a:lnRef>
+          <a:fillRef idx="0">
+            <a:schemeClr val="accent1"/>
+          </a:fillRef>
+          <a:effectRef idx="0">
+            <a:schemeClr val="accent1"/>
+          </a:effectRef>
+          <a:fontRef idx="minor">
+            <a:schemeClr val="tx1"/>
+          </a:fontRef>
+        </p:style>
+      </p:cxnSp>
+      <p:grpSp>
+        <p:nvGrpSpPr>
+          <p:cNvPr id="8" name="Group 7">
+            <a:extLst>
+              <a:ext uri="{FF2B5EF4-FFF2-40B4-BE49-F238E27FC236}">
+                <a16:creationId xmlns:a16="http://schemas.microsoft.com/office/drawing/2014/main" id="{4F26E07A-064C-9CA7-6C93-D4D39A9C4688}"/>
+              </a:ext>
+            </a:extLst>
+          </p:cNvPr>
+          <p:cNvGrpSpPr/>
+          <p:nvPr userDrawn="1"/>
+        </p:nvGrpSpPr>
+        <p:grpSpPr>
+          <a:xfrm>
+            <a:off x="10757948" y="6254276"/>
+            <a:ext cx="809030" cy="319556"/>
+            <a:chOff x="10757948" y="6254276"/>
+            <a:chExt cx="809030" cy="319556"/>
+          </a:xfrm>
+        </p:grpSpPr>
+        <p:sp>
+          <p:nvSpPr>
+            <p:cNvPr id="9" name="Freeform: Shape 8">
+              <a:extLst>
+                <a:ext uri="{FF2B5EF4-FFF2-40B4-BE49-F238E27FC236}">
+                  <a16:creationId xmlns:a16="http://schemas.microsoft.com/office/drawing/2014/main" id="{6F941B35-E72D-2BC9-C30D-87A0FDEEC4F4}"/>
+                </a:ext>
+              </a:extLst>
+            </p:cNvPr>
+            <p:cNvSpPr/>
+            <p:nvPr/>
+          </p:nvSpPr>
+          <p:spPr>
+            <a:xfrm>
+              <a:off x="10757948" y="6254276"/>
+              <a:ext cx="809030" cy="319556"/>
+            </a:xfrm>
+            <a:custGeom>
+              <a:avLst/>
+              <a:gdLst>
+                <a:gd name="connsiteX0" fmla="*/ 0 w 809030"/>
+                <a:gd name="connsiteY0" fmla="*/ 127987 h 319556"/>
+                <a:gd name="connsiteX1" fmla="*/ 192245 w 809030"/>
+                <a:gd name="connsiteY1" fmla="*/ 127987 h 319556"/>
+                <a:gd name="connsiteX2" fmla="*/ 282424 w 809030"/>
+                <a:gd name="connsiteY2" fmla="*/ 63993 h 319556"/>
+                <a:gd name="connsiteX3" fmla="*/ 0 w 809030"/>
+                <a:gd name="connsiteY3" fmla="*/ 63993 h 319556"/>
+                <a:gd name="connsiteX4" fmla="*/ 0 w 809030"/>
+                <a:gd name="connsiteY4" fmla="*/ 0 h 319556"/>
+                <a:gd name="connsiteX5" fmla="*/ 295806 w 809030"/>
+                <a:gd name="connsiteY5" fmla="*/ 0 h 319556"/>
+                <a:gd name="connsiteX6" fmla="*/ 384973 w 809030"/>
+                <a:gd name="connsiteY6" fmla="*/ 63993 h 319556"/>
+                <a:gd name="connsiteX7" fmla="*/ 424034 w 809030"/>
+                <a:gd name="connsiteY7" fmla="*/ 63993 h 319556"/>
+                <a:gd name="connsiteX8" fmla="*/ 513466 w 809030"/>
+                <a:gd name="connsiteY8" fmla="*/ 0 h 319556"/>
+                <a:gd name="connsiteX9" fmla="*/ 796420 w 809030"/>
+                <a:gd name="connsiteY9" fmla="*/ 265 h 319556"/>
+                <a:gd name="connsiteX10" fmla="*/ 796420 w 809030"/>
+                <a:gd name="connsiteY10" fmla="*/ 63993 h 319556"/>
+                <a:gd name="connsiteX11" fmla="*/ 602921 w 809030"/>
+                <a:gd name="connsiteY11" fmla="*/ 63993 h 319556"/>
+                <a:gd name="connsiteX12" fmla="*/ 602921 w 809030"/>
+                <a:gd name="connsiteY12" fmla="*/ 127697 h 319556"/>
+                <a:gd name="connsiteX13" fmla="*/ 719599 w 809030"/>
+                <a:gd name="connsiteY13" fmla="*/ 127697 h 319556"/>
+                <a:gd name="connsiteX14" fmla="*/ 809031 w 809030"/>
+                <a:gd name="connsiteY14" fmla="*/ 192197 h 319556"/>
+                <a:gd name="connsiteX15" fmla="*/ 602921 w 809030"/>
+                <a:gd name="connsiteY15" fmla="*/ 192197 h 319556"/>
+                <a:gd name="connsiteX16" fmla="*/ 602921 w 809030"/>
+                <a:gd name="connsiteY16" fmla="*/ 255708 h 319556"/>
+                <a:gd name="connsiteX17" fmla="*/ 808766 w 809030"/>
+                <a:gd name="connsiteY17" fmla="*/ 255563 h 319556"/>
+                <a:gd name="connsiteX18" fmla="*/ 808766 w 809030"/>
+                <a:gd name="connsiteY18" fmla="*/ 255563 h 319556"/>
+                <a:gd name="connsiteX19" fmla="*/ 719575 w 809030"/>
+                <a:gd name="connsiteY19" fmla="*/ 319557 h 319556"/>
+                <a:gd name="connsiteX20" fmla="*/ 436379 w 809030"/>
+                <a:gd name="connsiteY20" fmla="*/ 319557 h 319556"/>
+                <a:gd name="connsiteX21" fmla="*/ 436379 w 809030"/>
+                <a:gd name="connsiteY21" fmla="*/ 255708 h 319556"/>
+                <a:gd name="connsiteX22" fmla="*/ 384924 w 809030"/>
+                <a:gd name="connsiteY22" fmla="*/ 255708 h 319556"/>
+                <a:gd name="connsiteX23" fmla="*/ 295830 w 809030"/>
+                <a:gd name="connsiteY23" fmla="*/ 319557 h 319556"/>
+                <a:gd name="connsiteX24" fmla="*/ 0 w 809030"/>
+                <a:gd name="connsiteY24" fmla="*/ 319557 h 319556"/>
+                <a:gd name="connsiteX25" fmla="*/ 0 w 809030"/>
+                <a:gd name="connsiteY25" fmla="*/ 255563 h 319556"/>
+                <a:gd name="connsiteX26" fmla="*/ 272394 w 809030"/>
+                <a:gd name="connsiteY26" fmla="*/ 255563 h 319556"/>
+                <a:gd name="connsiteX27" fmla="*/ 192221 w 809030"/>
+                <a:gd name="connsiteY27" fmla="*/ 192197 h 319556"/>
+                <a:gd name="connsiteX28" fmla="*/ 0 w 809030"/>
+                <a:gd name="connsiteY28" fmla="*/ 192197 h 319556"/>
+                <a:gd name="connsiteX29" fmla="*/ 0 w 809030"/>
+                <a:gd name="connsiteY29" fmla="*/ 127987 h 319556"/>
+                <a:gd name="connsiteX30" fmla="*/ 513466 w 809030"/>
+                <a:gd name="connsiteY30" fmla="*/ 192197 h 319556"/>
+                <a:gd name="connsiteX31" fmla="*/ 424058 w 809030"/>
+                <a:gd name="connsiteY31" fmla="*/ 127842 h 319556"/>
+                <a:gd name="connsiteX32" fmla="*/ 384948 w 809030"/>
+                <a:gd name="connsiteY32" fmla="*/ 127842 h 319556"/>
+                <a:gd name="connsiteX33" fmla="*/ 366213 w 809030"/>
+                <a:gd name="connsiteY33" fmla="*/ 160321 h 319556"/>
+                <a:gd name="connsiteX34" fmla="*/ 384973 w 809030"/>
+                <a:gd name="connsiteY34" fmla="*/ 192197 h 319556"/>
+                <a:gd name="connsiteX35" fmla="*/ 513466 w 809030"/>
+                <a:gd name="connsiteY35" fmla="*/ 192197 h 319556"/>
+              </a:gdLst>
+              <a:ahLst/>
+              <a:cxnLst>
+                <a:cxn ang="0">
+                  <a:pos x="connsiteX0" y="connsiteY0"/>
+                </a:cxn>
+                <a:cxn ang="0">
+                  <a:pos x="connsiteX1" y="connsiteY1"/>
+                </a:cxn>
+                <a:cxn ang="0">
+                  <a:pos x="connsiteX2" y="connsiteY2"/>
+                </a:cxn>
+                <a:cxn ang="0">
+                  <a:pos x="connsiteX3" y="connsiteY3"/>
+                </a:cxn>
+                <a:cxn ang="0">
+                  <a:pos x="connsiteX4" y="connsiteY4"/>
+                </a:cxn>
+                <a:cxn ang="0">
+                  <a:pos x="connsiteX5" y="connsiteY5"/>
+                </a:cxn>
+                <a:cxn ang="0">
+                  <a:pos x="connsiteX6" y="connsiteY6"/>
+                </a:cxn>
+                <a:cxn ang="0">
+                  <a:pos x="connsiteX7" y="connsiteY7"/>
+                </a:cxn>
+                <a:cxn ang="0">
+                  <a:pos x="connsiteX8" y="connsiteY8"/>
+                </a:cxn>
+                <a:cxn ang="0">
+                  <a:pos x="connsiteX9" y="connsiteY9"/>
+                </a:cxn>
+                <a:cxn ang="0">
+                  <a:pos x="connsiteX10" y="connsiteY10"/>
+                </a:cxn>
+                <a:cxn ang="0">
+                  <a:pos x="connsiteX11" y="connsiteY11"/>
+                </a:cxn>
+                <a:cxn ang="0">
+                  <a:pos x="connsiteX12" y="connsiteY12"/>
+                </a:cxn>
+                <a:cxn ang="0">
+                  <a:pos x="connsiteX13" y="connsiteY13"/>
+                </a:cxn>
+                <a:cxn ang="0">
+                  <a:pos x="connsiteX14" y="connsiteY14"/>
+                </a:cxn>
+                <a:cxn ang="0">
+                  <a:pos x="connsiteX15" y="connsiteY15"/>
+                </a:cxn>
+                <a:cxn ang="0">
+                  <a:pos x="connsiteX16" y="connsiteY16"/>
+                </a:cxn>
+                <a:cxn ang="0">
+                  <a:pos x="connsiteX17" y="connsiteY17"/>
+                </a:cxn>
+                <a:cxn ang="0">
+                  <a:pos x="connsiteX18" y="connsiteY18"/>
+                </a:cxn>
+                <a:cxn ang="0">
+                  <a:pos x="connsiteX19" y="connsiteY19"/>
+                </a:cxn>
+                <a:cxn ang="0">
+                  <a:pos x="connsiteX20" y="connsiteY20"/>
+                </a:cxn>
+                <a:cxn ang="0">
+                  <a:pos x="connsiteX21" y="connsiteY21"/>
+                </a:cxn>
+                <a:cxn ang="0">
+                  <a:pos x="connsiteX22" y="connsiteY22"/>
+                </a:cxn>
+                <a:cxn ang="0">
+                  <a:pos x="connsiteX23" y="connsiteY23"/>
+                </a:cxn>
+                <a:cxn ang="0">
+                  <a:pos x="connsiteX24" y="connsiteY24"/>
+                </a:cxn>
+                <a:cxn ang="0">
+                  <a:pos x="connsiteX25" y="connsiteY25"/>
+                </a:cxn>
+                <a:cxn ang="0">
+                  <a:pos x="connsiteX26" y="connsiteY26"/>
+                </a:cxn>
+                <a:cxn ang="0">
+                  <a:pos x="connsiteX27" y="connsiteY27"/>
+                </a:cxn>
+                <a:cxn ang="0">
+                  <a:pos x="connsiteX28" y="connsiteY28"/>
+                </a:cxn>
+                <a:cxn ang="0">
+                  <a:pos x="connsiteX29" y="connsiteY29"/>
+                </a:cxn>
+                <a:cxn ang="0">
+                  <a:pos x="connsiteX30" y="connsiteY30"/>
+                </a:cxn>
+                <a:cxn ang="0">
+                  <a:pos x="connsiteX31" y="connsiteY31"/>
+                </a:cxn>
+                <a:cxn ang="0">
+                  <a:pos x="connsiteX32" y="connsiteY32"/>
+                </a:cxn>
+                <a:cxn ang="0">
+                  <a:pos x="connsiteX33" y="connsiteY33"/>
+                </a:cxn>
+                <a:cxn ang="0">
+                  <a:pos x="connsiteX34" y="connsiteY34"/>
+                </a:cxn>
+                <a:cxn ang="0">
+                  <a:pos x="connsiteX35" y="connsiteY35"/>
+                </a:cxn>
+              </a:cxnLst>
+              <a:rect l="l" t="t" r="r" b="b"/>
+              <a:pathLst>
+                <a:path w="809030" h="319556">
+                  <a:moveTo>
+                    <a:pt x="0" y="127987"/>
+                  </a:moveTo>
+                  <a:lnTo>
+                    <a:pt x="192245" y="127987"/>
+                  </a:lnTo>
+                  <a:cubicBezTo>
+                    <a:pt x="193210" y="123405"/>
+                    <a:pt x="207074" y="63993"/>
+                    <a:pt x="282424" y="63993"/>
+                  </a:cubicBezTo>
+                  <a:lnTo>
+                    <a:pt x="0" y="63993"/>
+                  </a:lnTo>
+                  <a:lnTo>
+                    <a:pt x="0" y="0"/>
+                  </a:lnTo>
+                  <a:lnTo>
+                    <a:pt x="295806" y="0"/>
+                  </a:lnTo>
+                  <a:cubicBezTo>
+                    <a:pt x="374195" y="0"/>
+                    <a:pt x="384973" y="63993"/>
+                    <a:pt x="384973" y="63993"/>
+                  </a:cubicBezTo>
+                  <a:lnTo>
+                    <a:pt x="424034" y="63993"/>
+                  </a:lnTo>
+                  <a:cubicBezTo>
+                    <a:pt x="424034" y="63993"/>
+                    <a:pt x="435077" y="0"/>
+                    <a:pt x="513466" y="0"/>
+                  </a:cubicBezTo>
+                  <a:cubicBezTo>
+                    <a:pt x="591854" y="0"/>
+                    <a:pt x="796420" y="265"/>
+                    <a:pt x="796420" y="265"/>
+                  </a:cubicBezTo>
+                  <a:lnTo>
+                    <a:pt x="796420" y="63993"/>
+                  </a:lnTo>
+                  <a:lnTo>
+                    <a:pt x="602921" y="63993"/>
+                  </a:lnTo>
+                  <a:lnTo>
+                    <a:pt x="602921" y="127697"/>
+                  </a:lnTo>
+                  <a:lnTo>
+                    <a:pt x="719599" y="127697"/>
+                  </a:lnTo>
+                  <a:cubicBezTo>
+                    <a:pt x="797987" y="127697"/>
+                    <a:pt x="809031" y="192197"/>
+                    <a:pt x="809031" y="192197"/>
+                  </a:cubicBezTo>
+                  <a:lnTo>
+                    <a:pt x="602921" y="192197"/>
+                  </a:lnTo>
+                  <a:lnTo>
+                    <a:pt x="602921" y="255708"/>
+                  </a:lnTo>
+                  <a:lnTo>
+                    <a:pt x="808766" y="255563"/>
+                  </a:lnTo>
+                  <a:lnTo>
+                    <a:pt x="808766" y="255563"/>
+                  </a:lnTo>
+                  <a:cubicBezTo>
+                    <a:pt x="808766" y="255563"/>
+                    <a:pt x="797963" y="319557"/>
+                    <a:pt x="719575" y="319557"/>
+                  </a:cubicBezTo>
+                  <a:lnTo>
+                    <a:pt x="436379" y="319557"/>
+                  </a:lnTo>
+                  <a:lnTo>
+                    <a:pt x="436379" y="255708"/>
+                  </a:lnTo>
+                  <a:lnTo>
+                    <a:pt x="384924" y="255708"/>
+                  </a:lnTo>
+                  <a:cubicBezTo>
+                    <a:pt x="383912" y="260868"/>
+                    <a:pt x="370746" y="319557"/>
+                    <a:pt x="295830" y="319557"/>
+                  </a:cubicBezTo>
+                  <a:lnTo>
+                    <a:pt x="0" y="319557"/>
+                  </a:lnTo>
+                  <a:lnTo>
+                    <a:pt x="0" y="255563"/>
+                  </a:lnTo>
+                  <a:lnTo>
+                    <a:pt x="272394" y="255563"/>
+                  </a:lnTo>
+                  <a:cubicBezTo>
+                    <a:pt x="203023" y="250403"/>
+                    <a:pt x="192221" y="192197"/>
+                    <a:pt x="192221" y="192197"/>
+                  </a:cubicBezTo>
+                  <a:lnTo>
+                    <a:pt x="0" y="192197"/>
+                  </a:lnTo>
+                  <a:lnTo>
+                    <a:pt x="0" y="127987"/>
+                  </a:lnTo>
+                  <a:close/>
+                  <a:moveTo>
+                    <a:pt x="513466" y="192197"/>
+                  </a:moveTo>
+                  <a:cubicBezTo>
+                    <a:pt x="438477" y="192197"/>
+                    <a:pt x="424757" y="131169"/>
+                    <a:pt x="424058" y="127842"/>
+                  </a:cubicBezTo>
+                  <a:lnTo>
+                    <a:pt x="384948" y="127842"/>
+                  </a:lnTo>
+                  <a:cubicBezTo>
+                    <a:pt x="384707" y="129699"/>
+                    <a:pt x="382176" y="145805"/>
+                    <a:pt x="366213" y="160321"/>
+                  </a:cubicBezTo>
+                  <a:cubicBezTo>
+                    <a:pt x="384973" y="176259"/>
+                    <a:pt x="384973" y="192197"/>
+                    <a:pt x="384973" y="192197"/>
+                  </a:cubicBezTo>
+                  <a:lnTo>
+                    <a:pt x="513466" y="192197"/>
+                  </a:lnTo>
+                  <a:close/>
+                </a:path>
+              </a:pathLst>
+            </a:custGeom>
+            <a:solidFill>
+              <a:schemeClr val="tx2"/>
+            </a:solidFill>
+            <a:ln w="2410" cap="flat">
+              <a:noFill/>
+              <a:prstDash val="solid"/>
+              <a:miter/>
+            </a:ln>
+          </p:spPr>
+          <p:txBody>
+            <a:bodyPr rtlCol="0" anchor="ctr"/>
+            <a:lstStyle/>
+            <a:p>
+              <a:endParaRPr lang="en-US"/>
+            </a:p>
+          </p:txBody>
+        </p:sp>
+        <p:sp>
+          <p:nvSpPr>
+            <p:cNvPr id="10" name="Freeform: Shape 9">
+              <a:extLst>
+                <a:ext uri="{FF2B5EF4-FFF2-40B4-BE49-F238E27FC236}">
+                  <a16:creationId xmlns:a16="http://schemas.microsoft.com/office/drawing/2014/main" id="{7DA4E7FC-8680-E28A-D344-88EC7C27E764}"/>
+                </a:ext>
+              </a:extLst>
+            </p:cNvPr>
+            <p:cNvSpPr/>
+            <p:nvPr/>
+          </p:nvSpPr>
+          <p:spPr>
+            <a:xfrm>
+              <a:off x="10950193" y="6318269"/>
+              <a:ext cx="410675" cy="191714"/>
+            </a:xfrm>
+            <a:custGeom>
+              <a:avLst/>
+              <a:gdLst>
+                <a:gd name="connsiteX0" fmla="*/ 410676 w 410675"/>
+                <a:gd name="connsiteY0" fmla="*/ 0 h 191714"/>
+                <a:gd name="connsiteX1" fmla="*/ 90203 w 410675"/>
+                <a:gd name="connsiteY1" fmla="*/ 0 h 191714"/>
+                <a:gd name="connsiteX2" fmla="*/ 0 w 410675"/>
+                <a:gd name="connsiteY2" fmla="*/ 63993 h 191714"/>
+                <a:gd name="connsiteX3" fmla="*/ 410676 w 410675"/>
+                <a:gd name="connsiteY3" fmla="*/ 63752 h 191714"/>
+                <a:gd name="connsiteX4" fmla="*/ 410676 w 410675"/>
+                <a:gd name="connsiteY4" fmla="*/ 0 h 191714"/>
+                <a:gd name="connsiteX5" fmla="*/ 410676 w 410675"/>
+                <a:gd name="connsiteY5" fmla="*/ 191715 h 191714"/>
+                <a:gd name="connsiteX6" fmla="*/ 87647 w 410675"/>
+                <a:gd name="connsiteY6" fmla="*/ 191715 h 191714"/>
+                <a:gd name="connsiteX7" fmla="*/ 0 w 410675"/>
+                <a:gd name="connsiteY7" fmla="*/ 128204 h 191714"/>
+                <a:gd name="connsiteX8" fmla="*/ 410676 w 410675"/>
+                <a:gd name="connsiteY8" fmla="*/ 128204 h 191714"/>
+                <a:gd name="connsiteX9" fmla="*/ 410676 w 410675"/>
+                <a:gd name="connsiteY9" fmla="*/ 191715 h 191714"/>
+              </a:gdLst>
+              <a:ahLst/>
+              <a:cxnLst>
+                <a:cxn ang="0">
+                  <a:pos x="connsiteX0" y="connsiteY0"/>
+                </a:cxn>
+                <a:cxn ang="0">
+                  <a:pos x="connsiteX1" y="connsiteY1"/>
+                </a:cxn>
+                <a:cxn ang="0">
+                  <a:pos x="connsiteX2" y="connsiteY2"/>
+                </a:cxn>
+                <a:cxn ang="0">
+                  <a:pos x="connsiteX3" y="connsiteY3"/>
+                </a:cxn>
+                <a:cxn ang="0">
+                  <a:pos x="connsiteX4" y="connsiteY4"/>
+                </a:cxn>
+                <a:cxn ang="0">
+                  <a:pos x="connsiteX5" y="connsiteY5"/>
+                </a:cxn>
+                <a:cxn ang="0">
+                  <a:pos x="connsiteX6" y="connsiteY6"/>
+                </a:cxn>
+                <a:cxn ang="0">
+                  <a:pos x="connsiteX7" y="connsiteY7"/>
+                </a:cxn>
+                <a:cxn ang="0">
+                  <a:pos x="connsiteX8" y="connsiteY8"/>
+                </a:cxn>
+                <a:cxn ang="0">
+                  <a:pos x="connsiteX9" y="connsiteY9"/>
+                </a:cxn>
+              </a:cxnLst>
+              <a:rect l="l" t="t" r="r" b="b"/>
+              <a:pathLst>
+                <a:path w="410675" h="191714">
+                  <a:moveTo>
+                    <a:pt x="410676" y="0"/>
+                  </a:moveTo>
+                  <a:lnTo>
+                    <a:pt x="90203" y="0"/>
+                  </a:lnTo>
+                  <a:cubicBezTo>
+                    <a:pt x="11815" y="0"/>
+                    <a:pt x="0" y="63993"/>
+                    <a:pt x="0" y="63993"/>
+                  </a:cubicBezTo>
+                  <a:lnTo>
+                    <a:pt x="410676" y="63752"/>
+                  </a:lnTo>
+                  <a:lnTo>
+                    <a:pt x="410676" y="0"/>
+                  </a:lnTo>
+                  <a:close/>
+                  <a:moveTo>
+                    <a:pt x="410676" y="191715"/>
+                  </a:moveTo>
+                  <a:lnTo>
+                    <a:pt x="87647" y="191715"/>
+                  </a:lnTo>
+                  <a:cubicBezTo>
+                    <a:pt x="9789" y="191715"/>
+                    <a:pt x="121" y="125937"/>
+                    <a:pt x="0" y="128204"/>
+                  </a:cubicBezTo>
+                  <a:lnTo>
+                    <a:pt x="410676" y="128204"/>
+                  </a:lnTo>
+                  <a:lnTo>
+                    <a:pt x="410676" y="191715"/>
+                  </a:lnTo>
+                  <a:close/>
+                </a:path>
+              </a:pathLst>
+            </a:custGeom>
+            <a:solidFill>
+              <a:schemeClr val="tx2">
+                <a:lumMod val="60000"/>
+                <a:lumOff val="40000"/>
+              </a:schemeClr>
+            </a:solidFill>
+            <a:ln w="2410" cap="flat">
+              <a:noFill/>
+              <a:prstDash val="solid"/>
+              <a:miter/>
+            </a:ln>
+          </p:spPr>
+          <p:txBody>
+            <a:bodyPr rtlCol="0" anchor="ctr"/>
+            <a:lstStyle/>
+            <a:p>
+              <a:endParaRPr lang="en-US"/>
+            </a:p>
+          </p:txBody>
+        </p:sp>
+      </p:grpSp>
     </p:spTree>
     <p:extLst>
       <p:ext uri="{BB962C8B-B14F-4D97-AF65-F5344CB8AC3E}">
@@ -8069,4775 +8125,6 @@
 </p:sld>
 </file>
 
-<file path=ppt/slides/slide10.xml><?xml version="1.0" encoding="utf-8"?>
-<p:sld xmlns:a="http://schemas.openxmlformats.org/drawingml/2006/main" xmlns:r="http://schemas.openxmlformats.org/officeDocument/2006/relationships" xmlns:p="http://schemas.openxmlformats.org/presentationml/2006/main">
-  <p:cSld>
-    <p:spTree>
-      <p:nvGrpSpPr>
-        <p:cNvPr id="1" name="">
-          <a:extLst>
-            <a:ext uri="{FF2B5EF4-FFF2-40B4-BE49-F238E27FC236}">
-              <a16:creationId xmlns:a16="http://schemas.microsoft.com/office/drawing/2014/main" id="{AC18F744-9E7F-6887-C08D-A62CE1DFDE79}"/>
-            </a:ext>
-          </a:extLst>
-        </p:cNvPr>
-        <p:cNvGrpSpPr/>
-        <p:nvPr/>
-      </p:nvGrpSpPr>
-      <p:grpSpPr>
-        <a:xfrm>
-          <a:off x="0" y="0"/>
-          <a:ext cx="0" cy="0"/>
-          <a:chOff x="0" y="0"/>
-          <a:chExt cx="0" cy="0"/>
-        </a:xfrm>
-      </p:grpSpPr>
-      <p:sp>
-        <p:nvSpPr>
-          <p:cNvPr id="3" name="Rectangle 2">
-            <a:extLst>
-              <a:ext uri="{FF2B5EF4-FFF2-40B4-BE49-F238E27FC236}">
-                <a16:creationId xmlns:a16="http://schemas.microsoft.com/office/drawing/2014/main" id="{C9BA9998-42FB-86DB-8995-61A11A19DB0D}"/>
-              </a:ext>
-            </a:extLst>
-          </p:cNvPr>
-          <p:cNvSpPr/>
-          <p:nvPr/>
-        </p:nvSpPr>
-        <p:spPr>
-          <a:xfrm>
-            <a:off x="0" y="0"/>
-            <a:ext cx="12191695" cy="841248"/>
-          </a:xfrm>
-          <a:prstGeom prst="rect">
-            <a:avLst/>
-          </a:prstGeom>
-          <a:solidFill>
-            <a:srgbClr val="0F203E"/>
-          </a:solidFill>
-          <a:ln>
-            <a:noFill/>
-          </a:ln>
-          <a:effectLst/>
-        </p:spPr>
-        <p:style>
-          <a:lnRef idx="1">
-            <a:schemeClr val="accent1"/>
-          </a:lnRef>
-          <a:fillRef idx="3">
-            <a:schemeClr val="accent1"/>
-          </a:fillRef>
-          <a:effectRef idx="2">
-            <a:schemeClr val="accent1"/>
-          </a:effectRef>
-          <a:fontRef idx="minor">
-            <a:schemeClr val="lt1"/>
-          </a:fontRef>
-        </p:style>
-        <p:txBody>
-          <a:bodyPr rtlCol="0" anchor="ctr"/>
-          <a:lstStyle/>
-          <a:p>
-            <a:pPr algn="ctr"/>
-            <a:endParaRPr/>
-          </a:p>
-        </p:txBody>
-      </p:sp>
-      <p:sp>
-        <p:nvSpPr>
-          <p:cNvPr id="4" name="Rectangle 3">
-            <a:extLst>
-              <a:ext uri="{FF2B5EF4-FFF2-40B4-BE49-F238E27FC236}">
-                <a16:creationId xmlns:a16="http://schemas.microsoft.com/office/drawing/2014/main" id="{6ECACB28-D75F-A02B-A45D-FCD47A38307C}"/>
-              </a:ext>
-            </a:extLst>
-          </p:cNvPr>
-          <p:cNvSpPr/>
-          <p:nvPr/>
-        </p:nvSpPr>
-        <p:spPr>
-          <a:xfrm>
-            <a:off x="0" y="841248"/>
-            <a:ext cx="12191695" cy="73152"/>
-          </a:xfrm>
-          <a:prstGeom prst="rect">
-            <a:avLst/>
-          </a:prstGeom>
-          <a:solidFill>
-            <a:srgbClr val="007073"/>
-          </a:solidFill>
-          <a:ln>
-            <a:noFill/>
-          </a:ln>
-          <a:effectLst/>
-        </p:spPr>
-        <p:style>
-          <a:lnRef idx="1">
-            <a:schemeClr val="accent1"/>
-          </a:lnRef>
-          <a:fillRef idx="3">
-            <a:schemeClr val="accent1"/>
-          </a:fillRef>
-          <a:effectRef idx="2">
-            <a:schemeClr val="accent1"/>
-          </a:effectRef>
-          <a:fontRef idx="minor">
-            <a:schemeClr val="lt1"/>
-          </a:fontRef>
-        </p:style>
-        <p:txBody>
-          <a:bodyPr rtlCol="0" anchor="ctr"/>
-          <a:lstStyle/>
-          <a:p>
-            <a:pPr algn="ctr"/>
-            <a:endParaRPr/>
-          </a:p>
-        </p:txBody>
-      </p:sp>
-      <p:sp>
-        <p:nvSpPr>
-          <p:cNvPr id="5" name="TextBox 4">
-            <a:extLst>
-              <a:ext uri="{FF2B5EF4-FFF2-40B4-BE49-F238E27FC236}">
-                <a16:creationId xmlns:a16="http://schemas.microsoft.com/office/drawing/2014/main" id="{836BBBA0-B8C9-1EE6-A26E-9E98C8C62EF0}"/>
-              </a:ext>
-            </a:extLst>
-          </p:cNvPr>
-          <p:cNvSpPr txBox="1"/>
-          <p:nvPr/>
-        </p:nvSpPr>
-        <p:spPr>
-          <a:xfrm>
-            <a:off x="365760" y="208079"/>
-            <a:ext cx="11430000" cy="461665"/>
-          </a:xfrm>
-          <a:prstGeom prst="rect">
-            <a:avLst/>
-          </a:prstGeom>
-          <a:noFill/>
-        </p:spPr>
-        <p:txBody>
-          <a:bodyPr wrap="square" anchor="ctr">
-            <a:spAutoFit/>
-          </a:bodyPr>
-          <a:lstStyle/>
-          <a:p>
-            <a:pPr algn="l"/>
-            <a:r>
-              <a:rPr lang="en-GB" sz="2400" b="1" dirty="0">
-                <a:solidFill>
-                  <a:srgbClr val="FFFFFF"/>
-                </a:solidFill>
-                <a:latin typeface="Calibri"/>
-              </a:rPr>
-              <a:t>LOO VAJALIKUD TÄHTSKEEMI VAATED</a:t>
-            </a:r>
-            <a:r>
-              <a:rPr lang="et-EE" sz="2400" b="1" dirty="0">
-                <a:solidFill>
-                  <a:srgbClr val="FFFFFF"/>
-                </a:solidFill>
-                <a:latin typeface="Calibri"/>
-              </a:rPr>
-              <a:t> </a:t>
-            </a:r>
-            <a:r>
-              <a:rPr lang="et-EE" sz="2400" b="1" dirty="0">
-                <a:solidFill>
-                  <a:srgbClr val="FF0000"/>
-                </a:solidFill>
-                <a:latin typeface="Calibri"/>
-              </a:rPr>
-              <a:t>ISE</a:t>
-            </a:r>
-            <a:endParaRPr sz="2400" b="1" dirty="0">
-              <a:solidFill>
-                <a:srgbClr val="FF0000"/>
-              </a:solidFill>
-              <a:latin typeface="Calibri"/>
-            </a:endParaRPr>
-          </a:p>
-        </p:txBody>
-      </p:sp>
-      <p:sp>
-        <p:nvSpPr>
-          <p:cNvPr id="8" name="TextBox 7">
-            <a:extLst>
-              <a:ext uri="{FF2B5EF4-FFF2-40B4-BE49-F238E27FC236}">
-                <a16:creationId xmlns:a16="http://schemas.microsoft.com/office/drawing/2014/main" id="{D51B2512-0DF0-5579-3556-1980E2CBEA9E}"/>
-              </a:ext>
-            </a:extLst>
-          </p:cNvPr>
-          <p:cNvSpPr txBox="1"/>
-          <p:nvPr/>
-        </p:nvSpPr>
-        <p:spPr>
-          <a:xfrm>
-            <a:off x="9601200" y="6601968"/>
-            <a:ext cx="2194560" cy="256032"/>
-          </a:xfrm>
-          <a:prstGeom prst="rect">
-            <a:avLst/>
-          </a:prstGeom>
-          <a:noFill/>
-        </p:spPr>
-        <p:txBody>
-          <a:bodyPr wrap="square" anchor="ctr">
-            <a:spAutoFit/>
-          </a:bodyPr>
-          <a:lstStyle/>
-          <a:p>
-            <a:pPr algn="r"/>
-            <a:r>
-              <a:rPr sz="1100" b="0">
-                <a:solidFill>
-                  <a:srgbClr val="94A3B8"/>
-                </a:solidFill>
-                <a:latin typeface="Calibri"/>
-              </a:rPr>
-              <a:t>23</a:t>
-            </a:r>
-          </a:p>
-        </p:txBody>
-      </p:sp>
-      <p:sp>
-        <p:nvSpPr>
-          <p:cNvPr id="13" name="Rectangle 12">
-            <a:extLst>
-              <a:ext uri="{FF2B5EF4-FFF2-40B4-BE49-F238E27FC236}">
-                <a16:creationId xmlns:a16="http://schemas.microsoft.com/office/drawing/2014/main" id="{54050768-3284-FFEF-990C-ADED13841863}"/>
-              </a:ext>
-            </a:extLst>
-          </p:cNvPr>
-          <p:cNvSpPr/>
-          <p:nvPr/>
-        </p:nvSpPr>
-        <p:spPr>
-          <a:xfrm>
-            <a:off x="306126" y="1085904"/>
-            <a:ext cx="11236518" cy="502920"/>
-          </a:xfrm>
-          <a:prstGeom prst="rect">
-            <a:avLst/>
-          </a:prstGeom>
-          <a:solidFill>
-            <a:srgbClr val="047857"/>
-          </a:solidFill>
-          <a:ln>
-            <a:noFill/>
-          </a:ln>
-          <a:effectLst/>
-        </p:spPr>
-        <p:style>
-          <a:lnRef idx="1">
-            <a:schemeClr val="accent1"/>
-          </a:lnRef>
-          <a:fillRef idx="3">
-            <a:schemeClr val="accent1"/>
-          </a:fillRef>
-          <a:effectRef idx="2">
-            <a:schemeClr val="accent1"/>
-          </a:effectRef>
-          <a:fontRef idx="minor">
-            <a:schemeClr val="lt1"/>
-          </a:fontRef>
-        </p:style>
-        <p:txBody>
-          <a:bodyPr rtlCol="0" anchor="ctr"/>
-          <a:lstStyle/>
-          <a:p>
-            <a:pPr algn="ctr"/>
-            <a:endParaRPr/>
-          </a:p>
-        </p:txBody>
-      </p:sp>
-      <p:sp>
-        <p:nvSpPr>
-          <p:cNvPr id="14" name="TextBox 13">
-            <a:extLst>
-              <a:ext uri="{FF2B5EF4-FFF2-40B4-BE49-F238E27FC236}">
-                <a16:creationId xmlns:a16="http://schemas.microsoft.com/office/drawing/2014/main" id="{E437928E-D89D-B403-FD06-4015CDE3FFB4}"/>
-              </a:ext>
-            </a:extLst>
-          </p:cNvPr>
-          <p:cNvSpPr txBox="1"/>
-          <p:nvPr/>
-        </p:nvSpPr>
-        <p:spPr>
-          <a:xfrm>
-            <a:off x="306126" y="1137309"/>
-            <a:ext cx="11044362" cy="400110"/>
-          </a:xfrm>
-          <a:prstGeom prst="rect">
-            <a:avLst/>
-          </a:prstGeom>
-          <a:noFill/>
-        </p:spPr>
-        <p:txBody>
-          <a:bodyPr wrap="square" anchor="ctr">
-            <a:spAutoFit/>
-          </a:bodyPr>
-          <a:lstStyle/>
-          <a:p>
-            <a:pPr algn="ctr"/>
-            <a:r>
-              <a:rPr lang="et-EE" sz="2000" b="1" dirty="0">
-                <a:solidFill>
-                  <a:srgbClr val="FFFFFF"/>
-                </a:solidFill>
-                <a:latin typeface="Calibri"/>
-              </a:rPr>
-              <a:t>Milline võiks olla tabelite ja vajaliku info alusel tähtskeem: joonista</a:t>
-            </a:r>
-            <a:endParaRPr sz="2000" b="1" dirty="0">
-              <a:solidFill>
-                <a:srgbClr val="FFFFFF"/>
-              </a:solidFill>
-              <a:latin typeface="Calibri"/>
-            </a:endParaRPr>
-          </a:p>
-        </p:txBody>
-      </p:sp>
-      <p:sp>
-        <p:nvSpPr>
-          <p:cNvPr id="15" name="TextBox 14">
-            <a:extLst>
-              <a:ext uri="{FF2B5EF4-FFF2-40B4-BE49-F238E27FC236}">
-                <a16:creationId xmlns:a16="http://schemas.microsoft.com/office/drawing/2014/main" id="{A2AAB944-5168-3436-CDE4-D9AB69DF01BB}"/>
-              </a:ext>
-            </a:extLst>
-          </p:cNvPr>
-          <p:cNvSpPr txBox="1"/>
-          <p:nvPr/>
-        </p:nvSpPr>
-        <p:spPr>
-          <a:xfrm>
-            <a:off x="270344" y="1649007"/>
-            <a:ext cx="11080144" cy="3600986"/>
-          </a:xfrm>
-          <a:prstGeom prst="rect">
-            <a:avLst/>
-          </a:prstGeom>
-          <a:noFill/>
-        </p:spPr>
-        <p:txBody>
-          <a:bodyPr wrap="square">
-            <a:spAutoFit/>
-          </a:bodyPr>
-          <a:lstStyle/>
-          <a:p>
-            <a:pPr marL="342900" indent="-342900">
-              <a:spcAft>
-                <a:spcPts val="1200"/>
-              </a:spcAft>
-              <a:buFont typeface="+mj-lt"/>
-              <a:buAutoNum type="arabicPeriod"/>
-            </a:pPr>
-            <a:r>
-              <a:rPr lang="en-GB" dirty="0">
-                <a:solidFill>
-                  <a:srgbClr val="334155"/>
-                </a:solidFill>
-                <a:latin typeface="Calibri"/>
-              </a:rPr>
-              <a:t>Loo </a:t>
-            </a:r>
-            <a:r>
-              <a:rPr lang="en-GB" dirty="0" err="1">
-                <a:solidFill>
-                  <a:srgbClr val="334155"/>
-                </a:solidFill>
-                <a:latin typeface="Calibri"/>
-              </a:rPr>
-              <a:t>uus</a:t>
-            </a:r>
-            <a:r>
-              <a:rPr lang="en-GB" dirty="0">
-                <a:solidFill>
-                  <a:srgbClr val="334155"/>
-                </a:solidFill>
-                <a:latin typeface="Calibri"/>
-              </a:rPr>
-              <a:t> </a:t>
-            </a:r>
-            <a:r>
-              <a:rPr lang="en-GB" b="1" dirty="0">
-                <a:solidFill>
-                  <a:srgbClr val="334155"/>
-                </a:solidFill>
-                <a:latin typeface="Calibri"/>
-              </a:rPr>
-              <a:t>Schema ‘analytics’</a:t>
-            </a:r>
-          </a:p>
-          <a:p>
-            <a:pPr marL="342900" indent="-342900">
-              <a:spcAft>
-                <a:spcPts val="1200"/>
-              </a:spcAft>
-              <a:buFont typeface="+mj-lt"/>
-              <a:buAutoNum type="arabicPeriod"/>
-            </a:pPr>
-            <a:r>
-              <a:rPr lang="en-GB" dirty="0">
-                <a:solidFill>
-                  <a:srgbClr val="334155"/>
-                </a:solidFill>
-                <a:latin typeface="Calibri"/>
-              </a:rPr>
-              <a:t>Loo </a:t>
-            </a:r>
-            <a:r>
-              <a:rPr lang="en-GB" dirty="0" err="1">
-                <a:solidFill>
-                  <a:srgbClr val="334155"/>
-                </a:solidFill>
-                <a:latin typeface="Calibri"/>
-              </a:rPr>
-              <a:t>uus</a:t>
-            </a:r>
-            <a:r>
-              <a:rPr lang="en-GB" dirty="0">
-                <a:solidFill>
-                  <a:srgbClr val="334155"/>
-                </a:solidFill>
-                <a:latin typeface="Calibri"/>
-              </a:rPr>
-              <a:t> SQL script ‘</a:t>
-            </a:r>
-            <a:r>
-              <a:rPr lang="en-GB" b="1" dirty="0">
-                <a:solidFill>
-                  <a:srgbClr val="334155"/>
-                </a:solidFill>
-                <a:latin typeface="Calibri"/>
-              </a:rPr>
-              <a:t>CREATE VIEWS’</a:t>
-            </a:r>
-          </a:p>
-          <a:p>
-            <a:pPr marL="342900" indent="-342900">
-              <a:spcAft>
-                <a:spcPts val="1200"/>
-              </a:spcAft>
-              <a:buFont typeface="+mj-lt"/>
-              <a:buAutoNum type="arabicPeriod"/>
-            </a:pPr>
-            <a:r>
-              <a:rPr lang="en-GB" dirty="0">
-                <a:solidFill>
-                  <a:srgbClr val="334155"/>
-                </a:solidFill>
-                <a:latin typeface="Calibri"/>
-              </a:rPr>
-              <a:t>Loo </a:t>
-            </a:r>
-            <a:r>
-              <a:rPr lang="en-GB" dirty="0" err="1">
-                <a:solidFill>
-                  <a:srgbClr val="334155"/>
-                </a:solidFill>
-                <a:latin typeface="Calibri"/>
-              </a:rPr>
-              <a:t>VIEW’d</a:t>
-            </a:r>
-            <a:r>
-              <a:rPr lang="en-GB" dirty="0">
-                <a:solidFill>
-                  <a:srgbClr val="334155"/>
-                </a:solidFill>
-                <a:latin typeface="Calibri"/>
-              </a:rPr>
-              <a:t> ; </a:t>
-            </a:r>
-            <a:r>
-              <a:rPr lang="en-GB" dirty="0" err="1">
-                <a:solidFill>
-                  <a:srgbClr val="334155"/>
-                </a:solidFill>
-                <a:latin typeface="Calibri"/>
-              </a:rPr>
-              <a:t>kood</a:t>
-            </a:r>
-            <a:r>
-              <a:rPr lang="en-GB" dirty="0">
-                <a:solidFill>
-                  <a:srgbClr val="334155"/>
-                </a:solidFill>
-                <a:latin typeface="Calibri"/>
-              </a:rPr>
-              <a:t> on </a:t>
-            </a:r>
-            <a:r>
-              <a:rPr lang="en-GB" dirty="0" err="1">
-                <a:solidFill>
-                  <a:srgbClr val="334155"/>
-                </a:solidFill>
-                <a:latin typeface="Calibri"/>
-              </a:rPr>
-              <a:t>failis</a:t>
-            </a:r>
-            <a:r>
-              <a:rPr lang="en-GB" dirty="0">
-                <a:solidFill>
-                  <a:srgbClr val="334155"/>
-                </a:solidFill>
-                <a:latin typeface="Calibri"/>
-              </a:rPr>
-              <a:t> </a:t>
-            </a:r>
-            <a:br>
-              <a:rPr lang="en-GB" dirty="0">
-                <a:solidFill>
-                  <a:srgbClr val="334155"/>
-                </a:solidFill>
-                <a:latin typeface="Calibri"/>
-              </a:rPr>
-            </a:br>
-            <a:r>
-              <a:rPr lang="en-GB" b="1" dirty="0">
-                <a:solidFill>
-                  <a:srgbClr val="334155"/>
-                </a:solidFill>
-              </a:rPr>
-              <a:t>‘</a:t>
-            </a:r>
-            <a:r>
-              <a:rPr lang="en-GB" b="1" dirty="0" err="1">
-                <a:solidFill>
-                  <a:srgbClr val="334155"/>
-                </a:solidFill>
-              </a:rPr>
-              <a:t>create_tahtskeem_vaated.sql</a:t>
-            </a:r>
-            <a:r>
-              <a:rPr lang="en-GB" b="1" dirty="0">
-                <a:solidFill>
-                  <a:srgbClr val="334155"/>
-                </a:solidFill>
-              </a:rPr>
-              <a:t>’</a:t>
-            </a:r>
-            <a:endParaRPr lang="en-GB" dirty="0">
-              <a:solidFill>
-                <a:srgbClr val="334155"/>
-              </a:solidFill>
-              <a:latin typeface="Calibri"/>
-            </a:endParaRPr>
-          </a:p>
-          <a:p>
-            <a:pPr marL="800100" lvl="1" indent="-342900">
-              <a:spcAft>
-                <a:spcPts val="1200"/>
-              </a:spcAft>
-              <a:buFont typeface="+mj-lt"/>
-              <a:buAutoNum type="arabicPeriod"/>
-            </a:pPr>
-            <a:r>
-              <a:rPr lang="en-GB" sz="1600" dirty="0" err="1">
-                <a:solidFill>
-                  <a:srgbClr val="334155"/>
-                </a:solidFill>
-              </a:rPr>
-              <a:t>dim_klient</a:t>
-            </a:r>
-            <a:endParaRPr lang="en-GB" sz="1600" dirty="0">
-              <a:solidFill>
-                <a:srgbClr val="334155"/>
-              </a:solidFill>
-            </a:endParaRPr>
-          </a:p>
-          <a:p>
-            <a:pPr marL="800100" lvl="1" indent="-342900">
-              <a:spcAft>
-                <a:spcPts val="1200"/>
-              </a:spcAft>
-              <a:buFont typeface="+mj-lt"/>
-              <a:buAutoNum type="arabicPeriod"/>
-            </a:pPr>
-            <a:r>
-              <a:rPr lang="en-GB" sz="1600" dirty="0" err="1">
-                <a:solidFill>
-                  <a:srgbClr val="334155"/>
-                </a:solidFill>
-              </a:rPr>
-              <a:t>dim_toode</a:t>
-            </a:r>
-            <a:endParaRPr lang="en-GB" sz="1600" dirty="0">
-              <a:solidFill>
-                <a:srgbClr val="334155"/>
-              </a:solidFill>
-            </a:endParaRPr>
-          </a:p>
-          <a:p>
-            <a:pPr marL="800100" lvl="1" indent="-342900">
-              <a:spcAft>
-                <a:spcPts val="1200"/>
-              </a:spcAft>
-              <a:buFont typeface="+mj-lt"/>
-              <a:buAutoNum type="arabicPeriod"/>
-            </a:pPr>
-            <a:r>
-              <a:rPr lang="en-GB" sz="1600" dirty="0" err="1">
-                <a:solidFill>
-                  <a:srgbClr val="334155"/>
-                </a:solidFill>
-              </a:rPr>
-              <a:t>dim_aeg</a:t>
-            </a:r>
-            <a:endParaRPr lang="en-GB" sz="1600" dirty="0">
-              <a:solidFill>
-                <a:srgbClr val="334155"/>
-              </a:solidFill>
-            </a:endParaRPr>
-          </a:p>
-          <a:p>
-            <a:pPr marL="800100" lvl="1" indent="-342900">
-              <a:spcAft>
-                <a:spcPts val="1200"/>
-              </a:spcAft>
-              <a:buFont typeface="+mj-lt"/>
-              <a:buAutoNum type="arabicPeriod"/>
-            </a:pPr>
-            <a:r>
-              <a:rPr lang="en-GB" sz="1600" dirty="0" err="1">
-                <a:solidFill>
-                  <a:srgbClr val="334155"/>
-                </a:solidFill>
-              </a:rPr>
-              <a:t>fact_myyk</a:t>
-            </a:r>
-            <a:r>
-              <a:rPr lang="en-GB" sz="1600" dirty="0">
-                <a:solidFill>
-                  <a:srgbClr val="334155"/>
-                </a:solidFill>
-              </a:rPr>
-              <a:t>  - Palu </a:t>
-            </a:r>
-            <a:r>
-              <a:rPr lang="en-GB" sz="1600" dirty="0" err="1">
-                <a:solidFill>
-                  <a:srgbClr val="334155"/>
-                </a:solidFill>
-              </a:rPr>
-              <a:t>tehisarul</a:t>
-            </a:r>
-            <a:r>
-              <a:rPr lang="en-GB" sz="1600" dirty="0">
-                <a:solidFill>
-                  <a:srgbClr val="334155"/>
-                </a:solidFill>
-              </a:rPr>
-              <a:t> </a:t>
-            </a:r>
-            <a:r>
-              <a:rPr lang="en-GB" sz="1600" dirty="0" err="1">
-                <a:solidFill>
-                  <a:srgbClr val="334155"/>
-                </a:solidFill>
-              </a:rPr>
-              <a:t>seletada</a:t>
-            </a:r>
-            <a:r>
-              <a:rPr lang="en-GB" sz="1600" dirty="0">
-                <a:solidFill>
-                  <a:srgbClr val="334155"/>
-                </a:solidFill>
-              </a:rPr>
-              <a:t> </a:t>
-            </a:r>
-            <a:r>
-              <a:rPr lang="en-GB" sz="1600" dirty="0" err="1">
-                <a:solidFill>
-                  <a:srgbClr val="334155"/>
-                </a:solidFill>
-              </a:rPr>
-              <a:t>kood</a:t>
-            </a:r>
-            <a:r>
-              <a:rPr lang="en-GB" sz="1600" dirty="0">
-                <a:solidFill>
-                  <a:srgbClr val="334155"/>
-                </a:solidFill>
-              </a:rPr>
-              <a:t> / </a:t>
-            </a:r>
-            <a:r>
-              <a:rPr lang="en-GB" sz="1600" dirty="0" err="1">
-                <a:solidFill>
-                  <a:srgbClr val="334155"/>
-                </a:solidFill>
-              </a:rPr>
-              <a:t>kommenteeri</a:t>
-            </a:r>
-            <a:r>
-              <a:rPr lang="en-GB" sz="1600" dirty="0">
-                <a:solidFill>
-                  <a:srgbClr val="334155"/>
-                </a:solidFill>
-              </a:rPr>
-              <a:t> </a:t>
-            </a:r>
-            <a:r>
-              <a:rPr lang="en-GB" sz="1600" dirty="0" err="1">
-                <a:solidFill>
-                  <a:srgbClr val="334155"/>
-                </a:solidFill>
-              </a:rPr>
-              <a:t>kood</a:t>
-            </a:r>
-            <a:br>
-              <a:rPr lang="en-GB" sz="1600" dirty="0">
-                <a:solidFill>
-                  <a:srgbClr val="334155"/>
-                </a:solidFill>
-              </a:rPr>
-            </a:br>
-            <a:r>
-              <a:rPr lang="en-GB" sz="1600" b="1" dirty="0">
-                <a:solidFill>
-                  <a:srgbClr val="334155"/>
-                </a:solidFill>
-              </a:rPr>
-              <a:t>NB! </a:t>
-            </a:r>
-            <a:r>
-              <a:rPr lang="en-GB" sz="1600" b="1" dirty="0" err="1">
-                <a:solidFill>
-                  <a:srgbClr val="334155"/>
-                </a:solidFill>
-              </a:rPr>
-              <a:t>Kontrolli</a:t>
-            </a:r>
-            <a:r>
-              <a:rPr lang="en-GB" sz="1600" b="1" dirty="0">
-                <a:solidFill>
-                  <a:srgbClr val="334155"/>
-                </a:solidFill>
-              </a:rPr>
-              <a:t>, kas </a:t>
-            </a:r>
-            <a:r>
-              <a:rPr lang="en-GB" sz="1600" b="1" dirty="0" err="1">
-                <a:solidFill>
-                  <a:srgbClr val="334155"/>
-                </a:solidFill>
-              </a:rPr>
-              <a:t>saad</a:t>
-            </a:r>
-            <a:r>
-              <a:rPr lang="en-GB" sz="1600" b="1" dirty="0">
-                <a:solidFill>
-                  <a:srgbClr val="334155"/>
-                </a:solidFill>
-              </a:rPr>
-              <a:t> </a:t>
-            </a:r>
-            <a:r>
-              <a:rPr lang="en-GB" sz="1600" b="1" dirty="0" err="1">
-                <a:solidFill>
-                  <a:srgbClr val="334155"/>
-                </a:solidFill>
-              </a:rPr>
-              <a:t>samad</a:t>
-            </a:r>
-            <a:r>
-              <a:rPr lang="en-GB" sz="1600" b="1" dirty="0">
-                <a:solidFill>
-                  <a:srgbClr val="334155"/>
-                </a:solidFill>
-              </a:rPr>
-              <a:t> </a:t>
-            </a:r>
-            <a:r>
-              <a:rPr lang="en-GB" sz="1600" b="1" dirty="0" err="1">
-                <a:solidFill>
-                  <a:srgbClr val="334155"/>
-                </a:solidFill>
-              </a:rPr>
-              <a:t>müügisummad</a:t>
-            </a:r>
-            <a:r>
-              <a:rPr lang="en-GB" sz="1600" b="1" dirty="0">
-                <a:solidFill>
-                  <a:srgbClr val="334155"/>
-                </a:solidFill>
-              </a:rPr>
-              <a:t> </a:t>
-            </a:r>
-            <a:r>
-              <a:rPr lang="en-GB" sz="1600" b="1" dirty="0" err="1">
-                <a:solidFill>
-                  <a:srgbClr val="334155"/>
-                </a:solidFill>
-              </a:rPr>
-              <a:t>nagu</a:t>
-            </a:r>
-            <a:r>
-              <a:rPr lang="en-GB" sz="1600" b="1" dirty="0">
-                <a:solidFill>
-                  <a:srgbClr val="334155"/>
-                </a:solidFill>
-              </a:rPr>
-              <a:t> </a:t>
-            </a:r>
-            <a:r>
-              <a:rPr lang="en-GB" sz="1600" b="1" dirty="0" err="1">
-                <a:solidFill>
-                  <a:srgbClr val="334155"/>
-                </a:solidFill>
-              </a:rPr>
-              <a:t>eilses</a:t>
-            </a:r>
-            <a:r>
-              <a:rPr lang="en-GB" sz="1600" b="1" dirty="0">
-                <a:solidFill>
-                  <a:srgbClr val="334155"/>
-                </a:solidFill>
-              </a:rPr>
-              <a:t> VIEW’s  </a:t>
-            </a:r>
-            <a:br>
-              <a:rPr lang="en-GB" sz="1600" b="1" dirty="0">
-                <a:solidFill>
-                  <a:srgbClr val="334155"/>
-                </a:solidFill>
-              </a:rPr>
-            </a:br>
-            <a:r>
-              <a:rPr lang="en-GB" sz="1600" b="1" dirty="0" err="1">
-                <a:solidFill>
-                  <a:srgbClr val="334155"/>
-                </a:solidFill>
-              </a:rPr>
-              <a:t>klientide_myygisummad</a:t>
-            </a:r>
-            <a:endParaRPr lang="en-GB" sz="1600" b="1" dirty="0">
-              <a:solidFill>
-                <a:srgbClr val="334155"/>
-              </a:solidFill>
-            </a:endParaRPr>
-          </a:p>
-        </p:txBody>
-      </p:sp>
-      <p:pic>
-        <p:nvPicPr>
-          <p:cNvPr id="6" name="Picture 5">
-            <a:extLst>
-              <a:ext uri="{FF2B5EF4-FFF2-40B4-BE49-F238E27FC236}">
-                <a16:creationId xmlns:a16="http://schemas.microsoft.com/office/drawing/2014/main" id="{E0B72017-1A8D-449A-49E7-3D37863DBA52}"/>
-              </a:ext>
-            </a:extLst>
-          </p:cNvPr>
-          <p:cNvPicPr>
-            <a:picLocks noChangeAspect="1"/>
-          </p:cNvPicPr>
-          <p:nvPr/>
-        </p:nvPicPr>
-        <p:blipFill>
-          <a:blip r:embed="rId3"/>
-          <a:stretch>
-            <a:fillRect/>
-          </a:stretch>
-        </p:blipFill>
-        <p:spPr>
-          <a:xfrm>
-            <a:off x="7729226" y="2750359"/>
-            <a:ext cx="3177185" cy="3177185"/>
-          </a:xfrm>
-          <a:prstGeom prst="rect">
-            <a:avLst/>
-          </a:prstGeom>
-        </p:spPr>
-      </p:pic>
-      <p:pic>
-        <p:nvPicPr>
-          <p:cNvPr id="12" name="Picture 11">
-            <a:extLst>
-              <a:ext uri="{FF2B5EF4-FFF2-40B4-BE49-F238E27FC236}">
-                <a16:creationId xmlns:a16="http://schemas.microsoft.com/office/drawing/2014/main" id="{D428F5E9-2FDC-695A-72AC-D538E4B84E7C}"/>
-              </a:ext>
-            </a:extLst>
-          </p:cNvPr>
-          <p:cNvPicPr>
-            <a:picLocks noChangeAspect="1"/>
-          </p:cNvPicPr>
-          <p:nvPr/>
-        </p:nvPicPr>
-        <p:blipFill>
-          <a:blip r:embed="rId4"/>
-          <a:stretch>
-            <a:fillRect/>
-          </a:stretch>
-        </p:blipFill>
-        <p:spPr>
-          <a:xfrm>
-            <a:off x="3972989" y="1554536"/>
-            <a:ext cx="3312160" cy="1537789"/>
-          </a:xfrm>
-          <a:prstGeom prst="rect">
-            <a:avLst/>
-          </a:prstGeom>
-        </p:spPr>
-      </p:pic>
-      <p:pic>
-        <p:nvPicPr>
-          <p:cNvPr id="7" name="Picture 6">
-            <a:extLst>
-              <a:ext uri="{FF2B5EF4-FFF2-40B4-BE49-F238E27FC236}">
-                <a16:creationId xmlns:a16="http://schemas.microsoft.com/office/drawing/2014/main" id="{C082B8AB-1532-E2A6-3D08-C0E930BC3A14}"/>
-              </a:ext>
-            </a:extLst>
-          </p:cNvPr>
-          <p:cNvPicPr>
-            <a:picLocks noChangeAspect="1"/>
-          </p:cNvPicPr>
-          <p:nvPr/>
-        </p:nvPicPr>
-        <p:blipFill>
-          <a:blip r:embed="rId5"/>
-          <a:stretch>
-            <a:fillRect/>
-          </a:stretch>
-        </p:blipFill>
-        <p:spPr>
-          <a:xfrm>
-            <a:off x="4867930" y="4970707"/>
-            <a:ext cx="2789452" cy="2092089"/>
-          </a:xfrm>
-          <a:prstGeom prst="rect">
-            <a:avLst/>
-          </a:prstGeom>
-        </p:spPr>
-      </p:pic>
-    </p:spTree>
-    <p:extLst>
-      <p:ext uri="{BB962C8B-B14F-4D97-AF65-F5344CB8AC3E}">
-        <p14:creationId xmlns:p14="http://schemas.microsoft.com/office/powerpoint/2010/main" val="858985853"/>
-      </p:ext>
-    </p:extLst>
-  </p:cSld>
-  <p:clrMapOvr>
-    <a:masterClrMapping/>
-  </p:clrMapOvr>
-</p:sld>
-</file>
-
-<file path=ppt/slides/slide11.xml><?xml version="1.0" encoding="utf-8"?>
-<p:sld xmlns:a="http://schemas.openxmlformats.org/drawingml/2006/main" xmlns:r="http://schemas.openxmlformats.org/officeDocument/2006/relationships" xmlns:p="http://schemas.openxmlformats.org/presentationml/2006/main">
-  <p:cSld>
-    <p:spTree>
-      <p:nvGrpSpPr>
-        <p:cNvPr id="1" name="">
-          <a:extLst>
-            <a:ext uri="{FF2B5EF4-FFF2-40B4-BE49-F238E27FC236}">
-              <a16:creationId xmlns:a16="http://schemas.microsoft.com/office/drawing/2014/main" id="{3513E394-27E9-2F29-DC4D-9AFAA112F94C}"/>
-            </a:ext>
-          </a:extLst>
-        </p:cNvPr>
-        <p:cNvGrpSpPr/>
-        <p:nvPr/>
-      </p:nvGrpSpPr>
-      <p:grpSpPr>
-        <a:xfrm>
-          <a:off x="0" y="0"/>
-          <a:ext cx="0" cy="0"/>
-          <a:chOff x="0" y="0"/>
-          <a:chExt cx="0" cy="0"/>
-        </a:xfrm>
-      </p:grpSpPr>
-      <p:sp>
-        <p:nvSpPr>
-          <p:cNvPr id="3" name="Rectangle 2">
-            <a:extLst>
-              <a:ext uri="{FF2B5EF4-FFF2-40B4-BE49-F238E27FC236}">
-                <a16:creationId xmlns:a16="http://schemas.microsoft.com/office/drawing/2014/main" id="{4950EE6D-2790-4D89-1CBC-441B0F2E1A0B}"/>
-              </a:ext>
-            </a:extLst>
-          </p:cNvPr>
-          <p:cNvSpPr/>
-          <p:nvPr/>
-        </p:nvSpPr>
-        <p:spPr>
-          <a:xfrm>
-            <a:off x="0" y="0"/>
-            <a:ext cx="12191695" cy="841248"/>
-          </a:xfrm>
-          <a:prstGeom prst="rect">
-            <a:avLst/>
-          </a:prstGeom>
-          <a:solidFill>
-            <a:srgbClr val="0F203E"/>
-          </a:solidFill>
-          <a:ln>
-            <a:noFill/>
-          </a:ln>
-          <a:effectLst/>
-        </p:spPr>
-        <p:style>
-          <a:lnRef idx="1">
-            <a:schemeClr val="accent1"/>
-          </a:lnRef>
-          <a:fillRef idx="3">
-            <a:schemeClr val="accent1"/>
-          </a:fillRef>
-          <a:effectRef idx="2">
-            <a:schemeClr val="accent1"/>
-          </a:effectRef>
-          <a:fontRef idx="minor">
-            <a:schemeClr val="lt1"/>
-          </a:fontRef>
-        </p:style>
-        <p:txBody>
-          <a:bodyPr rtlCol="0" anchor="ctr"/>
-          <a:lstStyle/>
-          <a:p>
-            <a:pPr algn="ctr"/>
-            <a:endParaRPr/>
-          </a:p>
-        </p:txBody>
-      </p:sp>
-      <p:sp>
-        <p:nvSpPr>
-          <p:cNvPr id="4" name="Rectangle 3">
-            <a:extLst>
-              <a:ext uri="{FF2B5EF4-FFF2-40B4-BE49-F238E27FC236}">
-                <a16:creationId xmlns:a16="http://schemas.microsoft.com/office/drawing/2014/main" id="{F68C3834-3DE0-AAC6-8F52-6D9202E838E9}"/>
-              </a:ext>
-            </a:extLst>
-          </p:cNvPr>
-          <p:cNvSpPr/>
-          <p:nvPr/>
-        </p:nvSpPr>
-        <p:spPr>
-          <a:xfrm>
-            <a:off x="0" y="841248"/>
-            <a:ext cx="12191695" cy="73152"/>
-          </a:xfrm>
-          <a:prstGeom prst="rect">
-            <a:avLst/>
-          </a:prstGeom>
-          <a:solidFill>
-            <a:srgbClr val="007073"/>
-          </a:solidFill>
-          <a:ln>
-            <a:noFill/>
-          </a:ln>
-          <a:effectLst/>
-        </p:spPr>
-        <p:style>
-          <a:lnRef idx="1">
-            <a:schemeClr val="accent1"/>
-          </a:lnRef>
-          <a:fillRef idx="3">
-            <a:schemeClr val="accent1"/>
-          </a:fillRef>
-          <a:effectRef idx="2">
-            <a:schemeClr val="accent1"/>
-          </a:effectRef>
-          <a:fontRef idx="minor">
-            <a:schemeClr val="lt1"/>
-          </a:fontRef>
-        </p:style>
-        <p:txBody>
-          <a:bodyPr rtlCol="0" anchor="ctr"/>
-          <a:lstStyle/>
-          <a:p>
-            <a:pPr algn="ctr"/>
-            <a:endParaRPr/>
-          </a:p>
-        </p:txBody>
-      </p:sp>
-      <p:sp>
-        <p:nvSpPr>
-          <p:cNvPr id="5" name="TextBox 4">
-            <a:extLst>
-              <a:ext uri="{FF2B5EF4-FFF2-40B4-BE49-F238E27FC236}">
-                <a16:creationId xmlns:a16="http://schemas.microsoft.com/office/drawing/2014/main" id="{83312147-B786-4AFE-8EE7-4B9F156E3C30}"/>
-              </a:ext>
-            </a:extLst>
-          </p:cNvPr>
-          <p:cNvSpPr txBox="1"/>
-          <p:nvPr/>
-        </p:nvSpPr>
-        <p:spPr>
-          <a:xfrm>
-            <a:off x="365760" y="208079"/>
-            <a:ext cx="11430000" cy="461665"/>
-          </a:xfrm>
-          <a:prstGeom prst="rect">
-            <a:avLst/>
-          </a:prstGeom>
-          <a:noFill/>
-        </p:spPr>
-        <p:txBody>
-          <a:bodyPr wrap="square" anchor="ctr">
-            <a:spAutoFit/>
-          </a:bodyPr>
-          <a:lstStyle/>
-          <a:p>
-            <a:pPr algn="l"/>
-            <a:r>
-              <a:rPr lang="en-GB" sz="2400" b="1" dirty="0">
-                <a:solidFill>
-                  <a:srgbClr val="FFFFFF"/>
-                </a:solidFill>
-                <a:latin typeface="Calibri"/>
-              </a:rPr>
-              <a:t>KOMMENTEERI VAATED </a:t>
-            </a:r>
-            <a:r>
-              <a:rPr lang="et-EE" sz="2400" b="1" dirty="0">
-                <a:solidFill>
-                  <a:srgbClr val="FF0000"/>
-                </a:solidFill>
-                <a:latin typeface="Calibri"/>
-              </a:rPr>
-              <a:t>ISE</a:t>
-            </a:r>
-            <a:endParaRPr sz="2400" b="1" dirty="0">
-              <a:solidFill>
-                <a:srgbClr val="FF0000"/>
-              </a:solidFill>
-              <a:latin typeface="Calibri"/>
-            </a:endParaRPr>
-          </a:p>
-        </p:txBody>
-      </p:sp>
-      <p:sp>
-        <p:nvSpPr>
-          <p:cNvPr id="8" name="TextBox 7">
-            <a:extLst>
-              <a:ext uri="{FF2B5EF4-FFF2-40B4-BE49-F238E27FC236}">
-                <a16:creationId xmlns:a16="http://schemas.microsoft.com/office/drawing/2014/main" id="{2FEDE8FF-A1BB-7940-BF9A-F244BE3EA44E}"/>
-              </a:ext>
-            </a:extLst>
-          </p:cNvPr>
-          <p:cNvSpPr txBox="1"/>
-          <p:nvPr/>
-        </p:nvSpPr>
-        <p:spPr>
-          <a:xfrm>
-            <a:off x="9601200" y="6601968"/>
-            <a:ext cx="2194560" cy="256032"/>
-          </a:xfrm>
-          <a:prstGeom prst="rect">
-            <a:avLst/>
-          </a:prstGeom>
-          <a:noFill/>
-        </p:spPr>
-        <p:txBody>
-          <a:bodyPr wrap="square" anchor="ctr">
-            <a:spAutoFit/>
-          </a:bodyPr>
-          <a:lstStyle/>
-          <a:p>
-            <a:pPr algn="r"/>
-            <a:r>
-              <a:rPr sz="1100" b="0">
-                <a:solidFill>
-                  <a:srgbClr val="94A3B8"/>
-                </a:solidFill>
-                <a:latin typeface="Calibri"/>
-              </a:rPr>
-              <a:t>23</a:t>
-            </a:r>
-          </a:p>
-        </p:txBody>
-      </p:sp>
-      <p:sp>
-        <p:nvSpPr>
-          <p:cNvPr id="13" name="Rectangle 12">
-            <a:extLst>
-              <a:ext uri="{FF2B5EF4-FFF2-40B4-BE49-F238E27FC236}">
-                <a16:creationId xmlns:a16="http://schemas.microsoft.com/office/drawing/2014/main" id="{1B58D41D-F1AB-EB3D-B39B-B21EA6024392}"/>
-              </a:ext>
-            </a:extLst>
-          </p:cNvPr>
-          <p:cNvSpPr/>
-          <p:nvPr/>
-        </p:nvSpPr>
-        <p:spPr>
-          <a:xfrm>
-            <a:off x="306126" y="1085904"/>
-            <a:ext cx="11236518" cy="502920"/>
-          </a:xfrm>
-          <a:prstGeom prst="rect">
-            <a:avLst/>
-          </a:prstGeom>
-          <a:solidFill>
-            <a:srgbClr val="047857"/>
-          </a:solidFill>
-          <a:ln>
-            <a:noFill/>
-          </a:ln>
-          <a:effectLst/>
-        </p:spPr>
-        <p:style>
-          <a:lnRef idx="1">
-            <a:schemeClr val="accent1"/>
-          </a:lnRef>
-          <a:fillRef idx="3">
-            <a:schemeClr val="accent1"/>
-          </a:fillRef>
-          <a:effectRef idx="2">
-            <a:schemeClr val="accent1"/>
-          </a:effectRef>
-          <a:fontRef idx="minor">
-            <a:schemeClr val="lt1"/>
-          </a:fontRef>
-        </p:style>
-        <p:txBody>
-          <a:bodyPr rtlCol="0" anchor="ctr"/>
-          <a:lstStyle/>
-          <a:p>
-            <a:pPr algn="ctr"/>
-            <a:endParaRPr/>
-          </a:p>
-        </p:txBody>
-      </p:sp>
-      <p:sp>
-        <p:nvSpPr>
-          <p:cNvPr id="14" name="TextBox 13">
-            <a:extLst>
-              <a:ext uri="{FF2B5EF4-FFF2-40B4-BE49-F238E27FC236}">
-                <a16:creationId xmlns:a16="http://schemas.microsoft.com/office/drawing/2014/main" id="{579A4097-8FB1-4678-920E-06AF5E1400E5}"/>
-              </a:ext>
-            </a:extLst>
-          </p:cNvPr>
-          <p:cNvSpPr txBox="1"/>
-          <p:nvPr/>
-        </p:nvSpPr>
-        <p:spPr>
-          <a:xfrm>
-            <a:off x="306126" y="1137309"/>
-            <a:ext cx="11044362" cy="400110"/>
-          </a:xfrm>
-          <a:prstGeom prst="rect">
-            <a:avLst/>
-          </a:prstGeom>
-          <a:noFill/>
-        </p:spPr>
-        <p:txBody>
-          <a:bodyPr wrap="square" anchor="ctr">
-            <a:spAutoFit/>
-          </a:bodyPr>
-          <a:lstStyle/>
-          <a:p>
-            <a:pPr algn="ctr"/>
-            <a:r>
-              <a:rPr lang="en-GB" sz="2000" b="1" dirty="0" err="1">
-                <a:solidFill>
-                  <a:srgbClr val="FFFFFF"/>
-                </a:solidFill>
-                <a:latin typeface="Calibri"/>
-              </a:rPr>
-              <a:t>Objektide</a:t>
-            </a:r>
-            <a:r>
-              <a:rPr lang="en-GB" sz="2000" b="1" dirty="0">
-                <a:solidFill>
-                  <a:srgbClr val="FFFFFF"/>
-                </a:solidFill>
-                <a:latin typeface="Calibri"/>
-              </a:rPr>
-              <a:t> </a:t>
-            </a:r>
-            <a:r>
-              <a:rPr lang="en-GB" sz="2000" b="1" dirty="0" err="1">
-                <a:solidFill>
-                  <a:srgbClr val="FFFFFF"/>
-                </a:solidFill>
-                <a:latin typeface="Calibri"/>
-              </a:rPr>
-              <a:t>kirjeldused</a:t>
-            </a:r>
-            <a:endParaRPr sz="2000" b="1" dirty="0">
-              <a:solidFill>
-                <a:srgbClr val="FFFFFF"/>
-              </a:solidFill>
-              <a:latin typeface="Calibri"/>
-            </a:endParaRPr>
-          </a:p>
-        </p:txBody>
-      </p:sp>
-      <p:sp>
-        <p:nvSpPr>
-          <p:cNvPr id="15" name="TextBox 14">
-            <a:extLst>
-              <a:ext uri="{FF2B5EF4-FFF2-40B4-BE49-F238E27FC236}">
-                <a16:creationId xmlns:a16="http://schemas.microsoft.com/office/drawing/2014/main" id="{66E5216C-037D-DD0B-3C45-BAAB367D6628}"/>
-              </a:ext>
-            </a:extLst>
-          </p:cNvPr>
-          <p:cNvSpPr txBox="1"/>
-          <p:nvPr/>
-        </p:nvSpPr>
-        <p:spPr>
-          <a:xfrm>
-            <a:off x="384313" y="1694739"/>
-            <a:ext cx="11080144" cy="2092881"/>
-          </a:xfrm>
-          <a:prstGeom prst="rect">
-            <a:avLst/>
-          </a:prstGeom>
-          <a:noFill/>
-        </p:spPr>
-        <p:txBody>
-          <a:bodyPr wrap="square">
-            <a:spAutoFit/>
-          </a:bodyPr>
-          <a:lstStyle/>
-          <a:p>
-            <a:pPr marL="285750" indent="-285750">
-              <a:spcAft>
-                <a:spcPts val="400"/>
-              </a:spcAft>
-              <a:buFont typeface="Arial" panose="020B0604020202020204" pitchFamily="34" charset="0"/>
-              <a:buChar char="•"/>
-            </a:pPr>
-            <a:r>
-              <a:rPr lang="en-GB" sz="2400" dirty="0" err="1">
-                <a:solidFill>
-                  <a:srgbClr val="334155"/>
-                </a:solidFill>
-                <a:latin typeface="Calibri"/>
-              </a:rPr>
-              <a:t>Jätka</a:t>
-            </a:r>
-            <a:r>
-              <a:rPr lang="en-GB" sz="2400" dirty="0">
-                <a:solidFill>
-                  <a:srgbClr val="334155"/>
-                </a:solidFill>
-                <a:latin typeface="Calibri"/>
-              </a:rPr>
-              <a:t> </a:t>
-            </a:r>
-            <a:r>
-              <a:rPr lang="en-GB" sz="2400" dirty="0" err="1">
-                <a:solidFill>
-                  <a:srgbClr val="334155"/>
-                </a:solidFill>
-                <a:latin typeface="Calibri"/>
-              </a:rPr>
-              <a:t>samas</a:t>
-            </a:r>
-            <a:r>
-              <a:rPr lang="en-GB" sz="2400" dirty="0">
-                <a:solidFill>
-                  <a:srgbClr val="334155"/>
-                </a:solidFill>
-                <a:latin typeface="Calibri"/>
-              </a:rPr>
-              <a:t> CREATE VIEW </a:t>
-            </a:r>
-            <a:r>
-              <a:rPr lang="en-GB" sz="2400" dirty="0" err="1">
-                <a:solidFill>
-                  <a:srgbClr val="334155"/>
-                </a:solidFill>
-                <a:latin typeface="Calibri"/>
-              </a:rPr>
-              <a:t>sql</a:t>
-            </a:r>
-            <a:r>
-              <a:rPr lang="en-GB" sz="2400" dirty="0">
-                <a:solidFill>
-                  <a:srgbClr val="334155"/>
-                </a:solidFill>
-                <a:latin typeface="Calibri"/>
-              </a:rPr>
-              <a:t> </a:t>
-            </a:r>
-            <a:r>
-              <a:rPr lang="en-GB" sz="2400" dirty="0" err="1">
-                <a:solidFill>
-                  <a:srgbClr val="334155"/>
-                </a:solidFill>
-                <a:latin typeface="Calibri"/>
-              </a:rPr>
-              <a:t>scriptis</a:t>
-            </a:r>
-            <a:endParaRPr lang="en-GB" sz="2400" dirty="0">
-              <a:solidFill>
-                <a:srgbClr val="334155"/>
-              </a:solidFill>
-              <a:latin typeface="Calibri"/>
-            </a:endParaRPr>
-          </a:p>
-          <a:p>
-            <a:pPr marL="285750" indent="-285750">
-              <a:spcAft>
-                <a:spcPts val="400"/>
-              </a:spcAft>
-              <a:buFont typeface="Arial" panose="020B0604020202020204" pitchFamily="34" charset="0"/>
-              <a:buChar char="•"/>
-            </a:pPr>
-            <a:r>
-              <a:rPr lang="en-GB" sz="2400" dirty="0" err="1">
-                <a:solidFill>
-                  <a:srgbClr val="334155"/>
-                </a:solidFill>
-                <a:latin typeface="Calibri"/>
-              </a:rPr>
-              <a:t>Kommenteeri</a:t>
-            </a:r>
-            <a:r>
-              <a:rPr lang="en-GB" sz="2400" dirty="0">
-                <a:solidFill>
-                  <a:srgbClr val="334155"/>
-                </a:solidFill>
-                <a:latin typeface="Calibri"/>
-              </a:rPr>
-              <a:t> </a:t>
-            </a:r>
-            <a:r>
-              <a:rPr lang="en-GB" sz="2400" dirty="0" err="1">
-                <a:solidFill>
-                  <a:srgbClr val="334155"/>
-                </a:solidFill>
-                <a:latin typeface="Calibri"/>
-              </a:rPr>
-              <a:t>VIEW’des</a:t>
-            </a:r>
-            <a:r>
-              <a:rPr lang="en-GB" sz="2400" dirty="0">
-                <a:solidFill>
-                  <a:srgbClr val="334155"/>
-                </a:solidFill>
-                <a:latin typeface="Calibri"/>
-              </a:rPr>
-              <a:t> </a:t>
-            </a:r>
-            <a:r>
-              <a:rPr lang="en-GB" sz="2400" dirty="0" err="1">
-                <a:solidFill>
-                  <a:srgbClr val="334155"/>
-                </a:solidFill>
-                <a:latin typeface="Calibri"/>
-              </a:rPr>
-              <a:t>olulised</a:t>
-            </a:r>
-            <a:r>
-              <a:rPr lang="en-GB" sz="2400" dirty="0">
-                <a:solidFill>
-                  <a:srgbClr val="334155"/>
-                </a:solidFill>
-                <a:latin typeface="Calibri"/>
-              </a:rPr>
-              <a:t> </a:t>
-            </a:r>
-            <a:r>
-              <a:rPr lang="en-GB" sz="2400" dirty="0" err="1">
-                <a:solidFill>
-                  <a:srgbClr val="334155"/>
-                </a:solidFill>
-                <a:latin typeface="Calibri"/>
-              </a:rPr>
-              <a:t>kohad</a:t>
-            </a:r>
-            <a:r>
-              <a:rPr lang="en-GB" sz="2400" dirty="0">
-                <a:solidFill>
-                  <a:srgbClr val="334155"/>
-                </a:solidFill>
-                <a:latin typeface="Calibri"/>
-              </a:rPr>
-              <a:t>. </a:t>
-            </a:r>
-          </a:p>
-          <a:p>
-            <a:pPr marL="285750" indent="-285750">
-              <a:spcAft>
-                <a:spcPts val="400"/>
-              </a:spcAft>
-              <a:buFont typeface="Arial" panose="020B0604020202020204" pitchFamily="34" charset="0"/>
-              <a:buChar char="•"/>
-            </a:pPr>
-            <a:r>
-              <a:rPr lang="en-GB" sz="2400" dirty="0">
-                <a:solidFill>
-                  <a:srgbClr val="334155"/>
-                </a:solidFill>
-                <a:latin typeface="Calibri"/>
-              </a:rPr>
-              <a:t>SQL script </a:t>
-            </a:r>
-            <a:r>
-              <a:rPr lang="en-GB" sz="2400" dirty="0" err="1">
-                <a:solidFill>
-                  <a:srgbClr val="334155"/>
-                </a:solidFill>
-                <a:latin typeface="Calibri"/>
-              </a:rPr>
-              <a:t>asub</a:t>
-            </a:r>
-            <a:r>
-              <a:rPr lang="en-GB" sz="2400" dirty="0">
-                <a:solidFill>
-                  <a:srgbClr val="334155"/>
-                </a:solidFill>
-                <a:latin typeface="Calibri"/>
-              </a:rPr>
-              <a:t> ‘</a:t>
-            </a:r>
-            <a:r>
-              <a:rPr lang="en-GB" sz="2400" b="1" dirty="0" err="1">
-                <a:solidFill>
-                  <a:srgbClr val="334155"/>
-                </a:solidFill>
-                <a:latin typeface="Calibri"/>
-              </a:rPr>
-              <a:t>analytics_veergude_kommentaarid.sql</a:t>
-            </a:r>
-            <a:r>
-              <a:rPr lang="en-GB" sz="2400" b="1" dirty="0">
-                <a:solidFill>
-                  <a:srgbClr val="334155"/>
-                </a:solidFill>
-                <a:latin typeface="Calibri"/>
-              </a:rPr>
-              <a:t>’</a:t>
-            </a:r>
-          </a:p>
-          <a:p>
-            <a:pPr>
-              <a:spcAft>
-                <a:spcPts val="1200"/>
-              </a:spcAft>
-            </a:pPr>
-            <a:r>
-              <a:rPr lang="en-GB" sz="2400" dirty="0">
-                <a:solidFill>
-                  <a:srgbClr val="334155"/>
-                </a:solidFill>
-                <a:latin typeface="Calibri"/>
-              </a:rPr>
-              <a:t>Lisa </a:t>
-            </a:r>
-            <a:r>
-              <a:rPr lang="en-GB" sz="2400" dirty="0" err="1">
-                <a:solidFill>
-                  <a:srgbClr val="334155"/>
-                </a:solidFill>
-                <a:latin typeface="Calibri"/>
-              </a:rPr>
-              <a:t>veel</a:t>
-            </a:r>
-            <a:r>
-              <a:rPr lang="en-GB" sz="2400" dirty="0">
-                <a:solidFill>
-                  <a:srgbClr val="334155"/>
-                </a:solidFill>
-                <a:latin typeface="Calibri"/>
-              </a:rPr>
-              <a:t> </a:t>
-            </a:r>
-            <a:r>
-              <a:rPr lang="en-GB" sz="2400" dirty="0" err="1">
-                <a:solidFill>
-                  <a:srgbClr val="334155"/>
-                </a:solidFill>
-                <a:latin typeface="Calibri"/>
-              </a:rPr>
-              <a:t>kommenteerimist</a:t>
-            </a:r>
-            <a:r>
-              <a:rPr lang="en-GB" sz="2400" dirty="0">
-                <a:solidFill>
-                  <a:srgbClr val="334155"/>
-                </a:solidFill>
-                <a:latin typeface="Calibri"/>
-              </a:rPr>
-              <a:t> </a:t>
-            </a:r>
-            <a:r>
-              <a:rPr lang="en-GB" sz="2400" dirty="0" err="1">
-                <a:solidFill>
-                  <a:srgbClr val="334155"/>
-                </a:solidFill>
-                <a:latin typeface="Calibri"/>
-              </a:rPr>
-              <a:t>vajavat</a:t>
-            </a:r>
-            <a:r>
-              <a:rPr lang="en-GB" sz="2400" dirty="0">
-                <a:solidFill>
-                  <a:srgbClr val="334155"/>
-                </a:solidFill>
-                <a:latin typeface="Calibri"/>
-              </a:rPr>
-              <a:t> </a:t>
-            </a:r>
-            <a:r>
-              <a:rPr lang="en-GB" sz="2400" dirty="0" err="1">
-                <a:solidFill>
-                  <a:srgbClr val="334155"/>
-                </a:solidFill>
-                <a:latin typeface="Calibri"/>
-              </a:rPr>
-              <a:t>infot</a:t>
-            </a:r>
-            <a:r>
-              <a:rPr lang="en-GB" sz="2400" dirty="0">
-                <a:solidFill>
-                  <a:srgbClr val="334155"/>
-                </a:solidFill>
-                <a:latin typeface="Calibri"/>
-              </a:rPr>
-              <a:t>, </a:t>
-            </a:r>
-            <a:r>
-              <a:rPr lang="en-GB" sz="2400" dirty="0" err="1">
-                <a:solidFill>
-                  <a:srgbClr val="334155"/>
-                </a:solidFill>
-                <a:latin typeface="Calibri"/>
-              </a:rPr>
-              <a:t>mida</a:t>
-            </a:r>
-            <a:r>
-              <a:rPr lang="en-GB" sz="2400" dirty="0">
-                <a:solidFill>
-                  <a:srgbClr val="334155"/>
-                </a:solidFill>
-                <a:latin typeface="Calibri"/>
-              </a:rPr>
-              <a:t> </a:t>
-            </a:r>
-            <a:r>
-              <a:rPr lang="en-GB" sz="2400" dirty="0" err="1">
-                <a:solidFill>
-                  <a:srgbClr val="334155"/>
-                </a:solidFill>
-                <a:latin typeface="Calibri"/>
-              </a:rPr>
-              <a:t>võiks</a:t>
-            </a:r>
-            <a:r>
-              <a:rPr lang="en-GB" sz="2400" dirty="0">
-                <a:solidFill>
-                  <a:srgbClr val="334155"/>
-                </a:solidFill>
-                <a:latin typeface="Calibri"/>
-              </a:rPr>
-              <a:t> </a:t>
-            </a:r>
-            <a:r>
-              <a:rPr lang="en-GB" sz="2400" dirty="0" err="1">
-                <a:solidFill>
-                  <a:srgbClr val="334155"/>
-                </a:solidFill>
-                <a:latin typeface="Calibri"/>
-              </a:rPr>
-              <a:t>keegi</a:t>
-            </a:r>
-            <a:r>
-              <a:rPr lang="en-GB" sz="2400" dirty="0">
-                <a:solidFill>
-                  <a:srgbClr val="334155"/>
-                </a:solidFill>
-                <a:latin typeface="Calibri"/>
-              </a:rPr>
-              <a:t> </a:t>
-            </a:r>
-            <a:r>
-              <a:rPr lang="en-GB" sz="2400" dirty="0" err="1">
-                <a:solidFill>
-                  <a:srgbClr val="334155"/>
-                </a:solidFill>
-                <a:latin typeface="Calibri"/>
-              </a:rPr>
-              <a:t>vajada</a:t>
-            </a:r>
-            <a:r>
-              <a:rPr lang="en-GB" sz="2400" dirty="0">
-                <a:solidFill>
-                  <a:srgbClr val="334155"/>
-                </a:solidFill>
-                <a:latin typeface="Calibri"/>
-              </a:rPr>
-              <a:t> </a:t>
-            </a:r>
-            <a:r>
-              <a:rPr lang="en-GB" sz="2400" dirty="0" err="1">
-                <a:solidFill>
-                  <a:srgbClr val="334155"/>
-                </a:solidFill>
-                <a:latin typeface="Calibri"/>
-              </a:rPr>
-              <a:t>hiljem</a:t>
-            </a:r>
-            <a:r>
-              <a:rPr lang="en-GB" sz="2400" dirty="0">
-                <a:solidFill>
-                  <a:srgbClr val="334155"/>
-                </a:solidFill>
-                <a:latin typeface="Calibri"/>
-              </a:rPr>
-              <a:t> </a:t>
-            </a:r>
-            <a:r>
-              <a:rPr lang="en-GB" sz="2400" dirty="0" err="1">
-                <a:solidFill>
-                  <a:srgbClr val="334155"/>
-                </a:solidFill>
-                <a:latin typeface="Calibri"/>
-              </a:rPr>
-              <a:t>süsteemi</a:t>
-            </a:r>
-            <a:r>
-              <a:rPr lang="en-GB" sz="2400" dirty="0">
-                <a:solidFill>
-                  <a:srgbClr val="334155"/>
-                </a:solidFill>
-                <a:latin typeface="Calibri"/>
-              </a:rPr>
-              <a:t> </a:t>
-            </a:r>
-            <a:r>
-              <a:rPr lang="en-GB" sz="2400" dirty="0" err="1">
-                <a:solidFill>
-                  <a:srgbClr val="334155"/>
-                </a:solidFill>
-                <a:latin typeface="Calibri"/>
-              </a:rPr>
-              <a:t>üle</a:t>
-            </a:r>
-            <a:r>
-              <a:rPr lang="en-GB" sz="2400" dirty="0">
-                <a:solidFill>
-                  <a:srgbClr val="334155"/>
-                </a:solidFill>
-                <a:latin typeface="Calibri"/>
-              </a:rPr>
-              <a:t> </a:t>
-            </a:r>
-            <a:r>
-              <a:rPr lang="en-GB" sz="2400" dirty="0" err="1">
-                <a:solidFill>
-                  <a:srgbClr val="334155"/>
-                </a:solidFill>
-                <a:latin typeface="Calibri"/>
-              </a:rPr>
-              <a:t>võttes</a:t>
-            </a:r>
-            <a:r>
-              <a:rPr lang="en-GB" sz="2400" dirty="0">
-                <a:solidFill>
-                  <a:srgbClr val="334155"/>
-                </a:solidFill>
-                <a:latin typeface="Calibri"/>
-              </a:rPr>
-              <a:t>.</a:t>
-            </a:r>
-          </a:p>
-        </p:txBody>
-      </p:sp>
-      <p:sp>
-        <p:nvSpPr>
-          <p:cNvPr id="11" name="TextBox 10">
-            <a:extLst>
-              <a:ext uri="{FF2B5EF4-FFF2-40B4-BE49-F238E27FC236}">
-                <a16:creationId xmlns:a16="http://schemas.microsoft.com/office/drawing/2014/main" id="{27600813-6C00-9EB1-057D-AD56CB37180C}"/>
-              </a:ext>
-            </a:extLst>
-          </p:cNvPr>
-          <p:cNvSpPr txBox="1"/>
-          <p:nvPr/>
-        </p:nvSpPr>
-        <p:spPr>
-          <a:xfrm>
-            <a:off x="526508" y="4249975"/>
-            <a:ext cx="10629172" cy="984885"/>
-          </a:xfrm>
-          <a:prstGeom prst="rect">
-            <a:avLst/>
-          </a:prstGeom>
-          <a:noFill/>
-        </p:spPr>
-        <p:txBody>
-          <a:bodyPr wrap="square">
-            <a:spAutoFit/>
-          </a:bodyPr>
-          <a:lstStyle/>
-          <a:p>
-            <a:pPr marL="285750" indent="-285750">
-              <a:spcAft>
-                <a:spcPts val="1200"/>
-              </a:spcAft>
-              <a:buFont typeface="Arial" panose="020B0604020202020204" pitchFamily="34" charset="0"/>
-              <a:buChar char="•"/>
-            </a:pPr>
-            <a:r>
-              <a:rPr lang="en-GB" sz="2400" dirty="0">
-                <a:latin typeface="Calibri"/>
-              </a:rPr>
-              <a:t>Loo Vaade, </a:t>
-            </a:r>
-            <a:r>
-              <a:rPr lang="en-GB" sz="2400" dirty="0" err="1">
-                <a:latin typeface="Calibri"/>
-              </a:rPr>
-              <a:t>millega</a:t>
-            </a:r>
-            <a:r>
-              <a:rPr lang="en-GB" sz="2400" dirty="0">
-                <a:latin typeface="Calibri"/>
-              </a:rPr>
-              <a:t> </a:t>
-            </a:r>
-            <a:r>
-              <a:rPr lang="en-GB" sz="2400" dirty="0" err="1">
-                <a:latin typeface="Calibri"/>
-              </a:rPr>
-              <a:t>saab</a:t>
-            </a:r>
-            <a:r>
-              <a:rPr lang="en-GB" sz="2400" dirty="0">
-                <a:latin typeface="Calibri"/>
-              </a:rPr>
-              <a:t> </a:t>
-            </a:r>
-            <a:r>
-              <a:rPr lang="en-GB" sz="2400" dirty="0" err="1">
-                <a:latin typeface="Calibri"/>
-              </a:rPr>
-              <a:t>vaadata</a:t>
-            </a:r>
-            <a:r>
-              <a:rPr lang="en-GB" sz="2400" dirty="0">
-                <a:latin typeface="Calibri"/>
-              </a:rPr>
-              <a:t> </a:t>
-            </a:r>
-            <a:r>
-              <a:rPr lang="en-GB" sz="2400" dirty="0" err="1">
-                <a:latin typeface="Calibri"/>
-              </a:rPr>
-              <a:t>view’de</a:t>
-            </a:r>
-            <a:r>
-              <a:rPr lang="en-GB" sz="2400" dirty="0">
-                <a:latin typeface="Calibri"/>
-              </a:rPr>
-              <a:t> </a:t>
-            </a:r>
-            <a:r>
-              <a:rPr lang="en-GB" sz="2400" dirty="0" err="1">
-                <a:latin typeface="Calibri"/>
-              </a:rPr>
-              <a:t>ja</a:t>
-            </a:r>
-            <a:r>
-              <a:rPr lang="en-GB" sz="2400" dirty="0">
-                <a:latin typeface="Calibri"/>
-              </a:rPr>
-              <a:t> </a:t>
-            </a:r>
-            <a:r>
-              <a:rPr lang="en-GB" sz="2400" dirty="0" err="1">
-                <a:latin typeface="Calibri"/>
-              </a:rPr>
-              <a:t>veergude</a:t>
-            </a:r>
-            <a:r>
-              <a:rPr lang="en-GB" sz="2400" dirty="0">
-                <a:latin typeface="Calibri"/>
-              </a:rPr>
-              <a:t> </a:t>
-            </a:r>
-            <a:r>
-              <a:rPr lang="en-GB" sz="2400" dirty="0" err="1">
-                <a:latin typeface="Calibri"/>
-              </a:rPr>
-              <a:t>kommentaare</a:t>
-            </a:r>
-            <a:endParaRPr lang="en-GB" sz="2400" dirty="0">
-              <a:latin typeface="Calibri"/>
-            </a:endParaRPr>
-          </a:p>
-          <a:p>
-            <a:pPr marL="285750" indent="-285750">
-              <a:spcAft>
-                <a:spcPts val="1200"/>
-              </a:spcAft>
-              <a:buFont typeface="Arial" panose="020B0604020202020204" pitchFamily="34" charset="0"/>
-              <a:buChar char="•"/>
-            </a:pPr>
-            <a:r>
-              <a:rPr lang="en-GB" sz="2400" dirty="0">
-                <a:latin typeface="Calibri"/>
-              </a:rPr>
-              <a:t>SQL script </a:t>
-            </a:r>
-            <a:r>
-              <a:rPr lang="en-GB" sz="2400" dirty="0" err="1">
-                <a:latin typeface="Calibri"/>
-              </a:rPr>
-              <a:t>asub</a:t>
-            </a:r>
-            <a:r>
-              <a:rPr lang="en-GB" sz="2400" dirty="0">
-                <a:latin typeface="Calibri"/>
-              </a:rPr>
-              <a:t> </a:t>
-            </a:r>
-            <a:r>
-              <a:rPr lang="en-GB" sz="2400" dirty="0" err="1">
-                <a:latin typeface="Calibri"/>
-              </a:rPr>
-              <a:t>failis</a:t>
-            </a:r>
-            <a:r>
-              <a:rPr lang="en-GB" sz="2400" dirty="0">
-                <a:latin typeface="Calibri"/>
-              </a:rPr>
-              <a:t> </a:t>
-            </a:r>
-            <a:r>
-              <a:rPr lang="en-GB" sz="2400" b="1" dirty="0"/>
-              <a:t>‘View </a:t>
-            </a:r>
-            <a:r>
-              <a:rPr lang="en-GB" sz="2400" b="1" dirty="0" err="1"/>
-              <a:t>kommentaaride</a:t>
-            </a:r>
-            <a:r>
-              <a:rPr lang="en-GB" sz="2400" b="1" dirty="0"/>
-              <a:t> Vaade.txt’</a:t>
-            </a:r>
-            <a:endParaRPr lang="en-GB" sz="2400" b="1" dirty="0">
-              <a:latin typeface="Calibri"/>
-            </a:endParaRPr>
-          </a:p>
-        </p:txBody>
-      </p:sp>
-    </p:spTree>
-    <p:extLst>
-      <p:ext uri="{BB962C8B-B14F-4D97-AF65-F5344CB8AC3E}">
-        <p14:creationId xmlns:p14="http://schemas.microsoft.com/office/powerpoint/2010/main" val="3297061193"/>
-      </p:ext>
-    </p:extLst>
-  </p:cSld>
-  <p:clrMapOvr>
-    <a:masterClrMapping/>
-  </p:clrMapOvr>
-</p:sld>
-</file>
-
-<file path=ppt/slides/slide12.xml><?xml version="1.0" encoding="utf-8"?>
-<p:sld xmlns:a="http://schemas.openxmlformats.org/drawingml/2006/main" xmlns:r="http://schemas.openxmlformats.org/officeDocument/2006/relationships" xmlns:p="http://schemas.openxmlformats.org/presentationml/2006/main">
-  <p:cSld>
-    <p:spTree>
-      <p:nvGrpSpPr>
-        <p:cNvPr id="1" name="">
-          <a:extLst>
-            <a:ext uri="{FF2B5EF4-FFF2-40B4-BE49-F238E27FC236}">
-              <a16:creationId xmlns:a16="http://schemas.microsoft.com/office/drawing/2014/main" id="{CD6668FA-47CA-1B90-3B9A-2B700DE8C288}"/>
-            </a:ext>
-          </a:extLst>
-        </p:cNvPr>
-        <p:cNvGrpSpPr/>
-        <p:nvPr/>
-      </p:nvGrpSpPr>
-      <p:grpSpPr>
-        <a:xfrm>
-          <a:off x="0" y="0"/>
-          <a:ext cx="0" cy="0"/>
-          <a:chOff x="0" y="0"/>
-          <a:chExt cx="0" cy="0"/>
-        </a:xfrm>
-      </p:grpSpPr>
-      <p:sp>
-        <p:nvSpPr>
-          <p:cNvPr id="5" name="Rectangle 4">
-            <a:extLst>
-              <a:ext uri="{FF2B5EF4-FFF2-40B4-BE49-F238E27FC236}">
-                <a16:creationId xmlns:a16="http://schemas.microsoft.com/office/drawing/2014/main" id="{2B7CBAE7-CEF4-55FD-7E8A-55BC37569528}"/>
-              </a:ext>
-            </a:extLst>
-          </p:cNvPr>
-          <p:cNvSpPr/>
-          <p:nvPr/>
-        </p:nvSpPr>
-        <p:spPr>
-          <a:xfrm>
-            <a:off x="0" y="0"/>
-            <a:ext cx="12191695" cy="841248"/>
-          </a:xfrm>
-          <a:prstGeom prst="rect">
-            <a:avLst/>
-          </a:prstGeom>
-          <a:solidFill>
-            <a:srgbClr val="0F203E"/>
-          </a:solidFill>
-          <a:ln>
-            <a:noFill/>
-          </a:ln>
-          <a:effectLst/>
-        </p:spPr>
-        <p:style>
-          <a:lnRef idx="1">
-            <a:schemeClr val="accent1"/>
-          </a:lnRef>
-          <a:fillRef idx="3">
-            <a:schemeClr val="accent1"/>
-          </a:fillRef>
-          <a:effectRef idx="2">
-            <a:schemeClr val="accent1"/>
-          </a:effectRef>
-          <a:fontRef idx="minor">
-            <a:schemeClr val="lt1"/>
-          </a:fontRef>
-        </p:style>
-        <p:txBody>
-          <a:bodyPr rtlCol="0" anchor="ctr"/>
-          <a:lstStyle/>
-          <a:p>
-            <a:pPr algn="ctr"/>
-            <a:endParaRPr/>
-          </a:p>
-        </p:txBody>
-      </p:sp>
-      <p:sp>
-        <p:nvSpPr>
-          <p:cNvPr id="7" name="TextBox 6">
-            <a:extLst>
-              <a:ext uri="{FF2B5EF4-FFF2-40B4-BE49-F238E27FC236}">
-                <a16:creationId xmlns:a16="http://schemas.microsoft.com/office/drawing/2014/main" id="{898E625C-DA14-8EA4-E78E-7ABC723AD621}"/>
-              </a:ext>
-            </a:extLst>
-          </p:cNvPr>
-          <p:cNvSpPr txBox="1"/>
-          <p:nvPr/>
-        </p:nvSpPr>
-        <p:spPr>
-          <a:xfrm>
-            <a:off x="444627" y="219455"/>
-            <a:ext cx="11430000" cy="461665"/>
-          </a:xfrm>
-          <a:prstGeom prst="rect">
-            <a:avLst/>
-          </a:prstGeom>
-          <a:noFill/>
-        </p:spPr>
-        <p:txBody>
-          <a:bodyPr wrap="square" anchor="ctr">
-            <a:spAutoFit/>
-          </a:bodyPr>
-          <a:lstStyle/>
-          <a:p>
-            <a:pPr algn="l"/>
-            <a:r>
-              <a:rPr lang="en-GB" sz="2400" b="1" dirty="0" err="1">
-                <a:solidFill>
-                  <a:srgbClr val="FFFFFF"/>
-                </a:solidFill>
-                <a:latin typeface="Calibri"/>
-              </a:rPr>
-              <a:t>Tabelite</a:t>
-            </a:r>
-            <a:r>
-              <a:rPr lang="en-GB" sz="2400" b="1" dirty="0">
-                <a:solidFill>
-                  <a:srgbClr val="FFFFFF"/>
-                </a:solidFill>
-                <a:latin typeface="Calibri"/>
-              </a:rPr>
-              <a:t>/</a:t>
-            </a:r>
-            <a:r>
-              <a:rPr lang="en-GB" sz="2400" b="1" dirty="0" err="1">
-                <a:solidFill>
-                  <a:srgbClr val="FFFFFF"/>
-                </a:solidFill>
-                <a:latin typeface="Calibri"/>
-              </a:rPr>
-              <a:t>view’de</a:t>
-            </a:r>
-            <a:r>
-              <a:rPr lang="en-GB" sz="2400" b="1" dirty="0">
-                <a:solidFill>
-                  <a:srgbClr val="FFFFFF"/>
-                </a:solidFill>
-                <a:latin typeface="Calibri"/>
-              </a:rPr>
-              <a:t> </a:t>
-            </a:r>
-            <a:r>
-              <a:rPr lang="en-GB" sz="2400" b="1" dirty="0" err="1">
-                <a:solidFill>
-                  <a:srgbClr val="FFFFFF"/>
-                </a:solidFill>
-                <a:latin typeface="Calibri"/>
-              </a:rPr>
-              <a:t>ja</a:t>
-            </a:r>
-            <a:r>
-              <a:rPr lang="en-GB" sz="2400" b="1" dirty="0">
-                <a:solidFill>
-                  <a:srgbClr val="FFFFFF"/>
-                </a:solidFill>
-                <a:latin typeface="Calibri"/>
-              </a:rPr>
-              <a:t> </a:t>
-            </a:r>
-            <a:r>
-              <a:rPr lang="en-GB" sz="2400" b="1" dirty="0" err="1">
-                <a:solidFill>
-                  <a:srgbClr val="FFFFFF"/>
-                </a:solidFill>
-                <a:latin typeface="Calibri"/>
-              </a:rPr>
-              <a:t>veergude</a:t>
-            </a:r>
-            <a:r>
-              <a:rPr lang="en-GB" sz="2400" b="1" dirty="0">
-                <a:solidFill>
-                  <a:srgbClr val="FFFFFF"/>
-                </a:solidFill>
-                <a:latin typeface="Calibri"/>
-              </a:rPr>
-              <a:t> </a:t>
-            </a:r>
-            <a:r>
-              <a:rPr lang="en-GB" sz="2400" b="1" dirty="0" err="1">
-                <a:solidFill>
-                  <a:srgbClr val="FFFFFF"/>
-                </a:solidFill>
-                <a:latin typeface="Calibri"/>
-              </a:rPr>
-              <a:t>kommentaaride</a:t>
-            </a:r>
-            <a:r>
-              <a:rPr lang="en-GB" sz="2400" b="1" dirty="0">
-                <a:solidFill>
-                  <a:srgbClr val="FFFFFF"/>
-                </a:solidFill>
-                <a:latin typeface="Calibri"/>
-              </a:rPr>
-              <a:t> </a:t>
-            </a:r>
-            <a:r>
-              <a:rPr lang="en-GB" sz="2400" b="1" dirty="0" err="1">
-                <a:solidFill>
-                  <a:srgbClr val="FFFFFF"/>
-                </a:solidFill>
-                <a:latin typeface="Calibri"/>
-              </a:rPr>
-              <a:t>lugemine</a:t>
-            </a:r>
-            <a:endParaRPr sz="2400" b="1" dirty="0">
-              <a:solidFill>
-                <a:srgbClr val="FFFFFF"/>
-              </a:solidFill>
-              <a:latin typeface="Calibri"/>
-            </a:endParaRPr>
-          </a:p>
-        </p:txBody>
-      </p:sp>
-      <p:sp>
-        <p:nvSpPr>
-          <p:cNvPr id="11" name="TextBox 10">
-            <a:extLst>
-              <a:ext uri="{FF2B5EF4-FFF2-40B4-BE49-F238E27FC236}">
-                <a16:creationId xmlns:a16="http://schemas.microsoft.com/office/drawing/2014/main" id="{B30014D4-8801-C9EC-2798-40362E22A295}"/>
-              </a:ext>
-            </a:extLst>
-          </p:cNvPr>
-          <p:cNvSpPr txBox="1"/>
-          <p:nvPr/>
-        </p:nvSpPr>
-        <p:spPr>
-          <a:xfrm>
-            <a:off x="519973" y="1360211"/>
-            <a:ext cx="5377166" cy="4770537"/>
-          </a:xfrm>
-          <a:prstGeom prst="rect">
-            <a:avLst/>
-          </a:prstGeom>
-          <a:noFill/>
-        </p:spPr>
-        <p:txBody>
-          <a:bodyPr wrap="square">
-            <a:spAutoFit/>
-          </a:bodyPr>
-          <a:lstStyle/>
-          <a:p>
-            <a:r>
-              <a:rPr lang="en-GB" sz="1600" b="1" dirty="0"/>
-              <a:t>CREATE</a:t>
-            </a:r>
-            <a:r>
-              <a:rPr lang="en-GB" sz="1600" dirty="0"/>
-              <a:t> </a:t>
-            </a:r>
-            <a:r>
-              <a:rPr lang="en-GB" sz="1600" b="1" dirty="0"/>
-              <a:t>OR</a:t>
-            </a:r>
-            <a:r>
-              <a:rPr lang="en-GB" sz="1600" dirty="0"/>
-              <a:t> </a:t>
-            </a:r>
-            <a:r>
-              <a:rPr lang="en-GB" sz="1600" b="1" dirty="0"/>
-              <a:t>REPLACE</a:t>
-            </a:r>
-            <a:r>
-              <a:rPr lang="en-GB" sz="1600" dirty="0"/>
-              <a:t> </a:t>
-            </a:r>
-            <a:r>
-              <a:rPr lang="en-GB" sz="1600" b="1" dirty="0"/>
-              <a:t>VIEW</a:t>
-            </a:r>
-            <a:r>
-              <a:rPr lang="en-GB" sz="1600" dirty="0"/>
-              <a:t> </a:t>
-            </a:r>
-            <a:r>
-              <a:rPr lang="en-GB" sz="1600" dirty="0" err="1"/>
-              <a:t>v_view_descriptions</a:t>
-            </a:r>
-            <a:r>
-              <a:rPr lang="en-GB" sz="1600" dirty="0"/>
-              <a:t> </a:t>
-            </a:r>
-            <a:r>
-              <a:rPr lang="en-GB" sz="1600" b="1" dirty="0"/>
-              <a:t>AS</a:t>
-            </a:r>
-            <a:endParaRPr lang="en-GB" sz="1600" dirty="0"/>
-          </a:p>
-          <a:p>
-            <a:r>
-              <a:rPr lang="en-GB" sz="1600" b="1" dirty="0"/>
-              <a:t>SELECT</a:t>
-            </a:r>
-            <a:r>
-              <a:rPr lang="en-GB" sz="1600" dirty="0"/>
-              <a:t> </a:t>
-            </a:r>
-          </a:p>
-          <a:p>
-            <a:r>
-              <a:rPr lang="en-GB" sz="1600" dirty="0" err="1"/>
-              <a:t>n.nspname</a:t>
-            </a:r>
-            <a:r>
-              <a:rPr lang="en-GB" sz="1600" dirty="0"/>
-              <a:t> </a:t>
-            </a:r>
-            <a:r>
-              <a:rPr lang="en-GB" sz="1600" b="1" dirty="0"/>
-              <a:t>AS</a:t>
-            </a:r>
-            <a:r>
-              <a:rPr lang="en-GB" sz="1600" dirty="0"/>
-              <a:t> </a:t>
-            </a:r>
-            <a:r>
-              <a:rPr lang="en-GB" sz="1600" dirty="0" err="1"/>
-              <a:t>skeema_nimi</a:t>
-            </a:r>
-            <a:r>
-              <a:rPr lang="en-GB" sz="1600" dirty="0"/>
-              <a:t>,</a:t>
-            </a:r>
-          </a:p>
-          <a:p>
-            <a:r>
-              <a:rPr lang="en-GB" sz="1600" dirty="0" err="1"/>
-              <a:t>c.relname</a:t>
-            </a:r>
-            <a:r>
-              <a:rPr lang="en-GB" sz="1600" dirty="0"/>
-              <a:t> </a:t>
-            </a:r>
-            <a:r>
-              <a:rPr lang="en-GB" sz="1600" b="1" dirty="0"/>
-              <a:t>AS</a:t>
-            </a:r>
-            <a:r>
-              <a:rPr lang="en-GB" sz="1600" dirty="0"/>
-              <a:t> </a:t>
-            </a:r>
-            <a:r>
-              <a:rPr lang="en-GB" sz="1600" dirty="0" err="1"/>
-              <a:t>vaate_nimi</a:t>
-            </a:r>
-            <a:r>
-              <a:rPr lang="en-GB" sz="1600" dirty="0"/>
-              <a:t>,</a:t>
-            </a:r>
-          </a:p>
-          <a:p>
-            <a:r>
-              <a:rPr lang="en-GB" sz="1600" dirty="0" err="1"/>
-              <a:t>a.attname</a:t>
-            </a:r>
-            <a:r>
-              <a:rPr lang="en-GB" sz="1600" dirty="0"/>
-              <a:t> </a:t>
-            </a:r>
-            <a:r>
-              <a:rPr lang="en-GB" sz="1600" b="1" dirty="0"/>
-              <a:t>AS</a:t>
-            </a:r>
-            <a:r>
-              <a:rPr lang="en-GB" sz="1600" dirty="0"/>
-              <a:t> </a:t>
-            </a:r>
-            <a:r>
-              <a:rPr lang="en-GB" sz="1600" dirty="0" err="1"/>
-              <a:t>veeru_nimi</a:t>
-            </a:r>
-            <a:r>
-              <a:rPr lang="en-GB" sz="1600" dirty="0"/>
-              <a:t>,</a:t>
-            </a:r>
-          </a:p>
-          <a:p>
-            <a:r>
-              <a:rPr lang="en-GB" sz="1600" dirty="0" err="1"/>
-              <a:t>pg_catalog.</a:t>
-            </a:r>
-            <a:r>
-              <a:rPr lang="en-GB" sz="1600" b="1" dirty="0" err="1"/>
-              <a:t>col_description</a:t>
-            </a:r>
-            <a:r>
-              <a:rPr lang="en-GB" sz="1600" dirty="0"/>
-              <a:t>(</a:t>
-            </a:r>
-            <a:r>
-              <a:rPr lang="en-GB" sz="1600" dirty="0" err="1"/>
-              <a:t>c.</a:t>
-            </a:r>
-            <a:r>
-              <a:rPr lang="en-GB" sz="1600" b="1" dirty="0" err="1"/>
-              <a:t>oid</a:t>
-            </a:r>
-            <a:r>
-              <a:rPr lang="en-GB" sz="1600" dirty="0"/>
-              <a:t>, </a:t>
-            </a:r>
-            <a:r>
-              <a:rPr lang="en-GB" sz="1600" dirty="0" err="1"/>
-              <a:t>a.attnum</a:t>
-            </a:r>
-            <a:r>
-              <a:rPr lang="en-GB" sz="1600" dirty="0"/>
-              <a:t>) </a:t>
-            </a:r>
-            <a:r>
-              <a:rPr lang="en-GB" sz="1600" b="1" dirty="0"/>
-              <a:t>AS</a:t>
-            </a:r>
-            <a:r>
-              <a:rPr lang="en-GB" sz="1600" dirty="0"/>
-              <a:t> </a:t>
-            </a:r>
-            <a:r>
-              <a:rPr lang="en-GB" sz="1600" dirty="0" err="1"/>
-              <a:t>veeru_kommentaar</a:t>
-            </a:r>
-            <a:endParaRPr lang="en-GB" sz="1600" dirty="0"/>
-          </a:p>
-          <a:p>
-            <a:r>
-              <a:rPr lang="en-GB" sz="1600" b="1" dirty="0"/>
-              <a:t>FROM</a:t>
-            </a:r>
-            <a:r>
-              <a:rPr lang="en-GB" sz="1600" dirty="0"/>
-              <a:t> </a:t>
-            </a:r>
-            <a:r>
-              <a:rPr lang="en-GB" sz="1600" dirty="0" err="1"/>
-              <a:t>pg_catalog.pg_class</a:t>
-            </a:r>
-            <a:r>
-              <a:rPr lang="en-GB" sz="1600" dirty="0"/>
-              <a:t> c</a:t>
-            </a:r>
-          </a:p>
-          <a:p>
-            <a:r>
-              <a:rPr lang="en-GB" sz="1600" b="1" dirty="0"/>
-              <a:t>JOIN</a:t>
-            </a:r>
-            <a:r>
-              <a:rPr lang="en-GB" sz="1600" dirty="0"/>
-              <a:t> </a:t>
-            </a:r>
-            <a:r>
-              <a:rPr lang="en-GB" sz="1600" dirty="0" err="1"/>
-              <a:t>pg_catalog.pg_namespace</a:t>
-            </a:r>
-            <a:r>
-              <a:rPr lang="en-GB" sz="1600" dirty="0"/>
-              <a:t> n </a:t>
-            </a:r>
-            <a:r>
-              <a:rPr lang="en-GB" sz="1600" b="1" dirty="0"/>
-              <a:t>ON</a:t>
-            </a:r>
-            <a:r>
-              <a:rPr lang="en-GB" sz="1600" dirty="0"/>
-              <a:t> </a:t>
-            </a:r>
-            <a:r>
-              <a:rPr lang="en-GB" sz="1600" dirty="0" err="1"/>
-              <a:t>n.</a:t>
-            </a:r>
-            <a:r>
-              <a:rPr lang="en-GB" sz="1600" b="1" dirty="0" err="1"/>
-              <a:t>oid</a:t>
-            </a:r>
-            <a:r>
-              <a:rPr lang="en-GB" sz="1600" dirty="0"/>
-              <a:t> = </a:t>
-            </a:r>
-            <a:r>
-              <a:rPr lang="en-GB" sz="1600" dirty="0" err="1"/>
-              <a:t>c.relnamespace</a:t>
-            </a:r>
-            <a:endParaRPr lang="en-GB" sz="1600" dirty="0"/>
-          </a:p>
-          <a:p>
-            <a:r>
-              <a:rPr lang="en-GB" sz="1600" b="1" dirty="0"/>
-              <a:t>JOIN</a:t>
-            </a:r>
-            <a:r>
-              <a:rPr lang="en-GB" sz="1600" dirty="0"/>
-              <a:t> </a:t>
-            </a:r>
-            <a:r>
-              <a:rPr lang="en-GB" sz="1600" dirty="0" err="1"/>
-              <a:t>pg_catalog.pg_attribute</a:t>
-            </a:r>
-            <a:r>
-              <a:rPr lang="en-GB" sz="1600" dirty="0"/>
-              <a:t> a </a:t>
-            </a:r>
-            <a:r>
-              <a:rPr lang="en-GB" sz="1600" b="1" dirty="0"/>
-              <a:t>ON</a:t>
-            </a:r>
-            <a:r>
-              <a:rPr lang="en-GB" sz="1600" dirty="0"/>
-              <a:t> </a:t>
-            </a:r>
-            <a:r>
-              <a:rPr lang="en-GB" sz="1600" dirty="0" err="1"/>
-              <a:t>a.attrelid</a:t>
-            </a:r>
-            <a:r>
-              <a:rPr lang="en-GB" sz="1600" dirty="0"/>
-              <a:t> = </a:t>
-            </a:r>
-            <a:r>
-              <a:rPr lang="en-GB" sz="1600" dirty="0" err="1"/>
-              <a:t>c.</a:t>
-            </a:r>
-            <a:r>
-              <a:rPr lang="en-GB" sz="1600" b="1" dirty="0" err="1"/>
-              <a:t>oid</a:t>
-            </a:r>
-            <a:endParaRPr lang="en-GB" sz="1600" dirty="0"/>
-          </a:p>
-          <a:p>
-            <a:r>
-              <a:rPr lang="en-GB" sz="1600" b="1" dirty="0"/>
-              <a:t>WHERE</a:t>
-            </a:r>
-            <a:r>
-              <a:rPr lang="en-GB" sz="1600" dirty="0"/>
-              <a:t> </a:t>
-            </a:r>
-          </a:p>
-          <a:p>
-            <a:r>
-              <a:rPr lang="en-GB" sz="1600" dirty="0" err="1"/>
-              <a:t>n.nspname</a:t>
-            </a:r>
-            <a:r>
-              <a:rPr lang="en-GB" sz="1600" dirty="0"/>
-              <a:t> = 'analytics' -- Sinu </a:t>
-            </a:r>
-            <a:r>
-              <a:rPr lang="en-GB" sz="1600" dirty="0" err="1"/>
-              <a:t>valitud</a:t>
-            </a:r>
-            <a:r>
-              <a:rPr lang="en-GB" sz="1600" dirty="0"/>
-              <a:t> </a:t>
-            </a:r>
-            <a:r>
-              <a:rPr lang="en-GB" sz="1600" dirty="0" err="1"/>
-              <a:t>skeema</a:t>
-            </a:r>
-            <a:endParaRPr lang="en-GB" sz="1600" dirty="0"/>
-          </a:p>
-          <a:p>
-            <a:r>
-              <a:rPr lang="en-GB" sz="1600" b="1" dirty="0"/>
-              <a:t>AND</a:t>
-            </a:r>
-            <a:r>
-              <a:rPr lang="en-GB" sz="1600" dirty="0"/>
-              <a:t> </a:t>
-            </a:r>
-            <a:r>
-              <a:rPr lang="en-GB" sz="1600" dirty="0" err="1"/>
-              <a:t>c.relkind</a:t>
-            </a:r>
-            <a:r>
-              <a:rPr lang="en-GB" sz="1600" dirty="0"/>
-              <a:t> = 'v' -- </a:t>
-            </a:r>
-            <a:r>
-              <a:rPr lang="en-GB" sz="1600" dirty="0" err="1"/>
-              <a:t>Filtreerib</a:t>
-            </a:r>
-            <a:r>
-              <a:rPr lang="en-GB" sz="1600" dirty="0"/>
-              <a:t> </a:t>
-            </a:r>
-            <a:r>
-              <a:rPr lang="en-GB" sz="1600" dirty="0" err="1"/>
-              <a:t>ainult</a:t>
-            </a:r>
-            <a:r>
-              <a:rPr lang="en-GB" sz="1600" dirty="0"/>
-              <a:t> </a:t>
-            </a:r>
-            <a:r>
-              <a:rPr lang="en-GB" sz="1600" dirty="0" err="1"/>
-              <a:t>vaated</a:t>
-            </a:r>
-            <a:r>
-              <a:rPr lang="en-GB" sz="1600" dirty="0"/>
-              <a:t> (v = view)</a:t>
-            </a:r>
-          </a:p>
-          <a:p>
-            <a:r>
-              <a:rPr lang="en-GB" sz="1600" b="1" dirty="0"/>
-              <a:t>AND</a:t>
-            </a:r>
-            <a:r>
-              <a:rPr lang="en-GB" sz="1600" dirty="0"/>
-              <a:t> </a:t>
-            </a:r>
-            <a:r>
-              <a:rPr lang="en-GB" sz="1600" dirty="0" err="1"/>
-              <a:t>a.attnum</a:t>
-            </a:r>
-            <a:r>
-              <a:rPr lang="en-GB" sz="1600" dirty="0"/>
-              <a:t> &gt; 0 -- </a:t>
-            </a:r>
-            <a:r>
-              <a:rPr lang="en-GB" sz="1600" dirty="0" err="1"/>
-              <a:t>Välistab</a:t>
-            </a:r>
-            <a:r>
-              <a:rPr lang="en-GB" sz="1600" dirty="0"/>
-              <a:t> </a:t>
-            </a:r>
-            <a:r>
-              <a:rPr lang="en-GB" sz="1600" dirty="0" err="1"/>
-              <a:t>süsteemsed</a:t>
-            </a:r>
-            <a:r>
-              <a:rPr lang="en-GB" sz="1600" dirty="0"/>
-              <a:t> </a:t>
-            </a:r>
-            <a:r>
-              <a:rPr lang="en-GB" sz="1600" dirty="0" err="1"/>
-              <a:t>sisemised</a:t>
-            </a:r>
-            <a:r>
-              <a:rPr lang="en-GB" sz="1600" dirty="0"/>
-              <a:t> </a:t>
-            </a:r>
-            <a:r>
-              <a:rPr lang="en-GB" sz="1600" dirty="0" err="1"/>
-              <a:t>veerud</a:t>
-            </a:r>
-            <a:endParaRPr lang="en-GB" sz="1600" dirty="0"/>
-          </a:p>
-          <a:p>
-            <a:r>
-              <a:rPr lang="en-GB" sz="1600" b="1" dirty="0"/>
-              <a:t>AND</a:t>
-            </a:r>
-            <a:r>
-              <a:rPr lang="en-GB" sz="1600" dirty="0"/>
-              <a:t> </a:t>
-            </a:r>
-            <a:r>
-              <a:rPr lang="en-GB" sz="1600" b="1" dirty="0"/>
-              <a:t>NOT</a:t>
-            </a:r>
-            <a:r>
-              <a:rPr lang="en-GB" sz="1600" dirty="0"/>
-              <a:t> </a:t>
-            </a:r>
-            <a:r>
-              <a:rPr lang="en-GB" sz="1600" dirty="0" err="1"/>
-              <a:t>a.attisdropped</a:t>
-            </a:r>
-            <a:r>
-              <a:rPr lang="en-GB" sz="1600" dirty="0"/>
-              <a:t> -- </a:t>
-            </a:r>
-            <a:r>
-              <a:rPr lang="en-GB" sz="1600" dirty="0" err="1"/>
-              <a:t>Välistab</a:t>
-            </a:r>
-            <a:r>
-              <a:rPr lang="en-GB" sz="1600" dirty="0"/>
-              <a:t> </a:t>
-            </a:r>
-            <a:r>
-              <a:rPr lang="en-GB" sz="1600" dirty="0" err="1"/>
-              <a:t>andmebaasist</a:t>
-            </a:r>
-            <a:r>
-              <a:rPr lang="en-GB" sz="1600" dirty="0"/>
-              <a:t> </a:t>
-            </a:r>
-            <a:r>
-              <a:rPr lang="en-GB" sz="1600" dirty="0" err="1"/>
-              <a:t>kustutatud</a:t>
-            </a:r>
-            <a:r>
-              <a:rPr lang="en-GB" sz="1600" dirty="0"/>
-              <a:t> </a:t>
-            </a:r>
-            <a:r>
-              <a:rPr lang="en-GB" sz="1600" dirty="0" err="1"/>
-              <a:t>veerud</a:t>
-            </a:r>
-            <a:endParaRPr lang="en-GB" sz="1600" dirty="0"/>
-          </a:p>
-          <a:p>
-            <a:r>
-              <a:rPr lang="en-GB" sz="1600" b="1" dirty="0"/>
-              <a:t>ORDER</a:t>
-            </a:r>
-            <a:r>
-              <a:rPr lang="en-GB" sz="1600" dirty="0"/>
-              <a:t> </a:t>
-            </a:r>
-            <a:r>
-              <a:rPr lang="en-GB" sz="1600" b="1" dirty="0"/>
-              <a:t>BY</a:t>
-            </a:r>
-            <a:r>
-              <a:rPr lang="en-GB" sz="1600" dirty="0"/>
-              <a:t> </a:t>
-            </a:r>
-            <a:r>
-              <a:rPr lang="en-GB" sz="1600" dirty="0" err="1"/>
-              <a:t>vaate_nimi</a:t>
-            </a:r>
-            <a:r>
-              <a:rPr lang="en-GB" sz="1600" dirty="0"/>
-              <a:t>, </a:t>
-            </a:r>
-            <a:r>
-              <a:rPr lang="en-GB" sz="1600" dirty="0" err="1"/>
-              <a:t>a.attnum</a:t>
-            </a:r>
-            <a:r>
-              <a:rPr lang="en-GB" sz="1600" dirty="0"/>
-              <a:t>;</a:t>
-            </a:r>
-          </a:p>
-          <a:p>
-            <a:endParaRPr lang="en-GB" sz="1400" dirty="0"/>
-          </a:p>
-          <a:p>
-            <a:endParaRPr lang="en-GB" sz="900" dirty="0">
-              <a:solidFill>
-                <a:srgbClr val="000000"/>
-              </a:solidFill>
-              <a:effectLst/>
-              <a:latin typeface="Consolas" panose="020B0609020204030204" pitchFamily="49" charset="0"/>
-            </a:endParaRPr>
-          </a:p>
-        </p:txBody>
-      </p:sp>
-      <p:sp>
-        <p:nvSpPr>
-          <p:cNvPr id="4" name="TextBox 3">
-            <a:extLst>
-              <a:ext uri="{FF2B5EF4-FFF2-40B4-BE49-F238E27FC236}">
-                <a16:creationId xmlns:a16="http://schemas.microsoft.com/office/drawing/2014/main" id="{16AE1B20-CA0C-5324-7E29-01AAEC1CA75B}"/>
-              </a:ext>
-            </a:extLst>
-          </p:cNvPr>
-          <p:cNvSpPr txBox="1"/>
-          <p:nvPr/>
-        </p:nvSpPr>
-        <p:spPr>
-          <a:xfrm>
-            <a:off x="6221711" y="1113990"/>
-            <a:ext cx="5377166" cy="5232202"/>
-          </a:xfrm>
-          <a:prstGeom prst="rect">
-            <a:avLst/>
-          </a:prstGeom>
-          <a:noFill/>
-        </p:spPr>
-        <p:txBody>
-          <a:bodyPr wrap="square">
-            <a:spAutoFit/>
-          </a:bodyPr>
-          <a:lstStyle/>
-          <a:p>
-            <a:endParaRPr lang="en-GB" sz="1600" dirty="0"/>
-          </a:p>
-          <a:p>
-            <a:r>
-              <a:rPr lang="en-GB" sz="1600" b="1" dirty="0"/>
-              <a:t>CREATE</a:t>
-            </a:r>
-            <a:r>
-              <a:rPr lang="en-GB" sz="1600" dirty="0"/>
-              <a:t> </a:t>
-            </a:r>
-            <a:r>
-              <a:rPr lang="en-GB" sz="1600" b="1" dirty="0"/>
-              <a:t>OR</a:t>
-            </a:r>
-            <a:r>
-              <a:rPr lang="en-GB" sz="1600" dirty="0"/>
-              <a:t> </a:t>
-            </a:r>
-            <a:r>
-              <a:rPr lang="en-GB" sz="1600" b="1" dirty="0"/>
-              <a:t>REPLACE</a:t>
-            </a:r>
-            <a:r>
-              <a:rPr lang="en-GB" sz="1600" dirty="0"/>
-              <a:t> </a:t>
-            </a:r>
-            <a:r>
-              <a:rPr lang="en-GB" sz="1600" b="1" dirty="0"/>
-              <a:t>VIEW</a:t>
-            </a:r>
-            <a:r>
-              <a:rPr lang="en-GB" sz="1600" dirty="0"/>
-              <a:t> analytics. </a:t>
-            </a:r>
-            <a:r>
-              <a:rPr lang="en-GB" sz="1600" dirty="0" err="1"/>
-              <a:t>v_view_column_descriptions</a:t>
-            </a:r>
-            <a:r>
-              <a:rPr lang="en-GB" sz="1600" dirty="0"/>
-              <a:t> </a:t>
-            </a:r>
-            <a:r>
-              <a:rPr lang="en-GB" sz="1600" b="1" dirty="0"/>
-              <a:t>AS</a:t>
-            </a:r>
-          </a:p>
-          <a:p>
-            <a:r>
-              <a:rPr lang="en-GB" sz="1600" b="1" dirty="0"/>
-              <a:t>SELECT</a:t>
-            </a:r>
-            <a:r>
-              <a:rPr lang="en-GB" sz="1600" dirty="0"/>
-              <a:t> </a:t>
-            </a:r>
-          </a:p>
-          <a:p>
-            <a:r>
-              <a:rPr lang="en-GB" sz="1600" u="sng" dirty="0" err="1"/>
-              <a:t>n</a:t>
-            </a:r>
-            <a:r>
-              <a:rPr lang="en-GB" sz="1600" dirty="0" err="1"/>
-              <a:t>.nspname</a:t>
-            </a:r>
-            <a:r>
-              <a:rPr lang="en-GB" sz="1600" dirty="0"/>
-              <a:t> </a:t>
-            </a:r>
-            <a:r>
-              <a:rPr lang="en-GB" sz="1600" b="1" dirty="0"/>
-              <a:t>AS</a:t>
-            </a:r>
-            <a:r>
-              <a:rPr lang="en-GB" sz="1600" dirty="0"/>
-              <a:t> </a:t>
-            </a:r>
-            <a:r>
-              <a:rPr lang="en-GB" sz="1600" i="1" dirty="0" err="1"/>
-              <a:t>skeema_nimi</a:t>
-            </a:r>
-            <a:r>
-              <a:rPr lang="en-GB" sz="1600" dirty="0"/>
-              <a:t>,</a:t>
-            </a:r>
-          </a:p>
-          <a:p>
-            <a:r>
-              <a:rPr lang="en-GB" sz="1600" u="sng" dirty="0" err="1"/>
-              <a:t>c</a:t>
-            </a:r>
-            <a:r>
-              <a:rPr lang="en-GB" sz="1600" dirty="0" err="1"/>
-              <a:t>.relname</a:t>
-            </a:r>
-            <a:r>
-              <a:rPr lang="en-GB" sz="1600" dirty="0"/>
-              <a:t> </a:t>
-            </a:r>
-            <a:r>
-              <a:rPr lang="en-GB" sz="1600" b="1" dirty="0"/>
-              <a:t>AS</a:t>
-            </a:r>
-            <a:r>
-              <a:rPr lang="en-GB" sz="1600" dirty="0"/>
-              <a:t> </a:t>
-            </a:r>
-            <a:r>
-              <a:rPr lang="en-GB" sz="1600" i="1" dirty="0" err="1"/>
-              <a:t>vaate_nimi</a:t>
-            </a:r>
-            <a:r>
-              <a:rPr lang="en-GB" sz="1600" dirty="0"/>
-              <a:t>,</a:t>
-            </a:r>
-          </a:p>
-          <a:p>
-            <a:r>
-              <a:rPr lang="en-GB" sz="1600" u="sng" dirty="0" err="1"/>
-              <a:t>a</a:t>
-            </a:r>
-            <a:r>
-              <a:rPr lang="en-GB" sz="1600" dirty="0" err="1"/>
-              <a:t>.attname</a:t>
-            </a:r>
-            <a:r>
-              <a:rPr lang="en-GB" sz="1600" dirty="0"/>
-              <a:t> </a:t>
-            </a:r>
-            <a:r>
-              <a:rPr lang="en-GB" sz="1600" b="1" dirty="0"/>
-              <a:t>AS</a:t>
-            </a:r>
-            <a:r>
-              <a:rPr lang="en-GB" sz="1600" dirty="0"/>
-              <a:t> </a:t>
-            </a:r>
-            <a:r>
-              <a:rPr lang="en-GB" sz="1600" i="1" dirty="0" err="1"/>
-              <a:t>veeru_nimi</a:t>
-            </a:r>
-            <a:r>
-              <a:rPr lang="en-GB" sz="1600" dirty="0"/>
-              <a:t>,</a:t>
-            </a:r>
-          </a:p>
-          <a:p>
-            <a:r>
-              <a:rPr lang="en-GB" sz="1600" u="sng" dirty="0" err="1"/>
-              <a:t>pg_catalog</a:t>
-            </a:r>
-            <a:r>
-              <a:rPr lang="en-GB" sz="1600" dirty="0" err="1"/>
-              <a:t>.col_description</a:t>
-            </a:r>
-            <a:r>
-              <a:rPr lang="en-GB" sz="1600" dirty="0"/>
-              <a:t>(</a:t>
-            </a:r>
-            <a:r>
-              <a:rPr lang="en-GB" sz="1600" dirty="0" err="1"/>
-              <a:t>c.</a:t>
-            </a:r>
-            <a:r>
-              <a:rPr lang="en-GB" sz="1600" b="1" dirty="0" err="1"/>
-              <a:t>oid</a:t>
-            </a:r>
-            <a:r>
-              <a:rPr lang="en-GB" sz="1600" dirty="0"/>
-              <a:t>, </a:t>
-            </a:r>
-            <a:r>
-              <a:rPr lang="en-GB" sz="1600" u="sng" dirty="0" err="1"/>
-              <a:t>a</a:t>
-            </a:r>
-            <a:r>
-              <a:rPr lang="en-GB" sz="1600" dirty="0" err="1"/>
-              <a:t>.attnum</a:t>
-            </a:r>
-            <a:r>
-              <a:rPr lang="en-GB" sz="1600" dirty="0"/>
-              <a:t>) </a:t>
-            </a:r>
-            <a:r>
-              <a:rPr lang="en-GB" sz="1600" b="1" dirty="0"/>
-              <a:t>AS</a:t>
-            </a:r>
-            <a:r>
-              <a:rPr lang="en-GB" sz="1600" dirty="0"/>
-              <a:t> </a:t>
-            </a:r>
-            <a:r>
-              <a:rPr lang="en-GB" sz="1600" dirty="0" err="1"/>
-              <a:t>veeru_kommentaar</a:t>
-            </a:r>
-            <a:endParaRPr lang="en-GB" sz="1600" dirty="0"/>
-          </a:p>
-          <a:p>
-            <a:r>
-              <a:rPr lang="en-GB" sz="1600" b="1" dirty="0"/>
-              <a:t>FROM</a:t>
-            </a:r>
-            <a:r>
-              <a:rPr lang="en-GB" sz="1600" dirty="0"/>
-              <a:t> </a:t>
-            </a:r>
-            <a:r>
-              <a:rPr lang="en-GB" sz="1600" dirty="0" err="1"/>
-              <a:t>pg_catalog.pg_class</a:t>
-            </a:r>
-            <a:r>
-              <a:rPr lang="en-GB" sz="1600" dirty="0"/>
-              <a:t> c</a:t>
-            </a:r>
-          </a:p>
-          <a:p>
-            <a:r>
-              <a:rPr lang="en-GB" sz="1600" b="1" dirty="0"/>
-              <a:t>JOIN</a:t>
-            </a:r>
-            <a:r>
-              <a:rPr lang="en-GB" sz="1600" dirty="0"/>
-              <a:t> </a:t>
-            </a:r>
-            <a:r>
-              <a:rPr lang="en-GB" sz="1600" dirty="0" err="1"/>
-              <a:t>pg_catalog.pg_namespace</a:t>
-            </a:r>
-            <a:r>
-              <a:rPr lang="en-GB" sz="1600" dirty="0"/>
-              <a:t> n </a:t>
-            </a:r>
-            <a:r>
-              <a:rPr lang="en-GB" sz="1600" b="1" dirty="0"/>
-              <a:t>ON</a:t>
-            </a:r>
-            <a:r>
-              <a:rPr lang="en-GB" sz="1600" dirty="0"/>
-              <a:t> </a:t>
-            </a:r>
-            <a:r>
-              <a:rPr lang="en-GB" sz="1600" dirty="0" err="1"/>
-              <a:t>n.</a:t>
-            </a:r>
-            <a:r>
-              <a:rPr lang="en-GB" sz="1600" b="1" dirty="0" err="1"/>
-              <a:t>oid</a:t>
-            </a:r>
-            <a:r>
-              <a:rPr lang="en-GB" sz="1600" dirty="0"/>
-              <a:t> = </a:t>
-            </a:r>
-            <a:r>
-              <a:rPr lang="en-GB" sz="1600" dirty="0" err="1"/>
-              <a:t>c.relnamespace</a:t>
-            </a:r>
-            <a:endParaRPr lang="en-GB" sz="1600" dirty="0"/>
-          </a:p>
-          <a:p>
-            <a:r>
-              <a:rPr lang="en-GB" sz="1600" b="1" dirty="0"/>
-              <a:t>JOIN</a:t>
-            </a:r>
-            <a:r>
-              <a:rPr lang="en-GB" sz="1600" dirty="0"/>
-              <a:t> </a:t>
-            </a:r>
-            <a:r>
-              <a:rPr lang="en-GB" sz="1600" dirty="0" err="1"/>
-              <a:t>pg_catalog.pg_attribute</a:t>
-            </a:r>
-            <a:r>
-              <a:rPr lang="en-GB" sz="1600" dirty="0"/>
-              <a:t> a </a:t>
-            </a:r>
-            <a:r>
-              <a:rPr lang="en-GB" sz="1600" b="1" dirty="0"/>
-              <a:t>ON</a:t>
-            </a:r>
-            <a:r>
-              <a:rPr lang="en-GB" sz="1600" dirty="0"/>
-              <a:t> </a:t>
-            </a:r>
-            <a:r>
-              <a:rPr lang="en-GB" sz="1600" dirty="0" err="1"/>
-              <a:t>a.attrelid</a:t>
-            </a:r>
-            <a:r>
-              <a:rPr lang="en-GB" sz="1600" dirty="0"/>
-              <a:t> = </a:t>
-            </a:r>
-            <a:r>
-              <a:rPr lang="en-GB" sz="1600" dirty="0" err="1"/>
-              <a:t>c.</a:t>
-            </a:r>
-            <a:r>
-              <a:rPr lang="en-GB" sz="1600" b="1" dirty="0" err="1"/>
-              <a:t>oid</a:t>
-            </a:r>
-            <a:endParaRPr lang="en-GB" sz="1600" dirty="0"/>
-          </a:p>
-          <a:p>
-            <a:r>
-              <a:rPr lang="en-GB" sz="1600" b="1" dirty="0"/>
-              <a:t>WHERE</a:t>
-            </a:r>
-            <a:r>
-              <a:rPr lang="en-GB" sz="1600" dirty="0"/>
-              <a:t> </a:t>
-            </a:r>
-          </a:p>
-          <a:p>
-            <a:r>
-              <a:rPr lang="en-GB" sz="1600" dirty="0" err="1"/>
-              <a:t>n.nspname</a:t>
-            </a:r>
-            <a:r>
-              <a:rPr lang="en-GB" sz="1600" dirty="0"/>
-              <a:t> = 'public' -- ASENDATUD: 'analytics' </a:t>
-            </a:r>
-            <a:r>
-              <a:rPr lang="en-GB" sz="1600" dirty="0" err="1"/>
-              <a:t>asemel</a:t>
-            </a:r>
-            <a:r>
-              <a:rPr lang="en-GB" sz="1600" dirty="0"/>
-              <a:t> on </a:t>
-            </a:r>
-            <a:r>
-              <a:rPr lang="en-GB" sz="1600" dirty="0" err="1"/>
-              <a:t>nüüd</a:t>
-            </a:r>
-            <a:r>
-              <a:rPr lang="en-GB" sz="1600" dirty="0"/>
-              <a:t> 'public'</a:t>
-            </a:r>
-          </a:p>
-          <a:p>
-            <a:r>
-              <a:rPr lang="en-GB" sz="1600" b="1" dirty="0"/>
-              <a:t>AND</a:t>
-            </a:r>
-            <a:r>
-              <a:rPr lang="en-GB" sz="1600" dirty="0"/>
-              <a:t> </a:t>
-            </a:r>
-            <a:r>
-              <a:rPr lang="en-GB" sz="1600" dirty="0" err="1"/>
-              <a:t>c.relkind</a:t>
-            </a:r>
-            <a:r>
-              <a:rPr lang="en-GB" sz="1600" dirty="0"/>
-              <a:t> = 'v' -- </a:t>
-            </a:r>
-            <a:r>
-              <a:rPr lang="en-GB" sz="1600" dirty="0" err="1"/>
-              <a:t>Filtreerib</a:t>
-            </a:r>
-            <a:r>
-              <a:rPr lang="en-GB" sz="1600" dirty="0"/>
-              <a:t> </a:t>
-            </a:r>
-            <a:r>
-              <a:rPr lang="en-GB" sz="1600" dirty="0" err="1"/>
-              <a:t>ainult</a:t>
-            </a:r>
-            <a:r>
-              <a:rPr lang="en-GB" sz="1600" dirty="0"/>
-              <a:t> </a:t>
-            </a:r>
-            <a:r>
-              <a:rPr lang="en-GB" sz="1600" dirty="0" err="1"/>
-              <a:t>vaated</a:t>
-            </a:r>
-            <a:r>
-              <a:rPr lang="en-GB" sz="1600" dirty="0"/>
-              <a:t> (v = view)</a:t>
-            </a:r>
-          </a:p>
-          <a:p>
-            <a:r>
-              <a:rPr lang="en-GB" sz="1600" b="1" dirty="0"/>
-              <a:t>AND</a:t>
-            </a:r>
-            <a:r>
-              <a:rPr lang="en-GB" sz="1600" dirty="0"/>
-              <a:t> </a:t>
-            </a:r>
-            <a:r>
-              <a:rPr lang="en-GB" sz="1600" dirty="0" err="1"/>
-              <a:t>a.attnum</a:t>
-            </a:r>
-            <a:r>
-              <a:rPr lang="en-GB" sz="1600" dirty="0"/>
-              <a:t> &gt; 0 -- </a:t>
-            </a:r>
-            <a:r>
-              <a:rPr lang="en-GB" sz="1600" dirty="0" err="1"/>
-              <a:t>Välistab</a:t>
-            </a:r>
-            <a:r>
-              <a:rPr lang="en-GB" sz="1600" dirty="0"/>
-              <a:t> </a:t>
-            </a:r>
-            <a:r>
-              <a:rPr lang="en-GB" sz="1600" dirty="0" err="1"/>
-              <a:t>süsteemsed</a:t>
-            </a:r>
-            <a:r>
-              <a:rPr lang="en-GB" sz="1600" dirty="0"/>
-              <a:t> </a:t>
-            </a:r>
-            <a:r>
-              <a:rPr lang="en-GB" sz="1600" dirty="0" err="1"/>
-              <a:t>sisemised</a:t>
-            </a:r>
-            <a:r>
-              <a:rPr lang="en-GB" sz="1600" dirty="0"/>
-              <a:t> </a:t>
-            </a:r>
-            <a:r>
-              <a:rPr lang="en-GB" sz="1600" dirty="0" err="1"/>
-              <a:t>veerud</a:t>
-            </a:r>
-            <a:endParaRPr lang="en-GB" sz="1600" dirty="0"/>
-          </a:p>
-          <a:p>
-            <a:r>
-              <a:rPr lang="en-GB" sz="1600" b="1" dirty="0"/>
-              <a:t>AND</a:t>
-            </a:r>
-            <a:r>
-              <a:rPr lang="en-GB" sz="1600" dirty="0"/>
-              <a:t> </a:t>
-            </a:r>
-            <a:r>
-              <a:rPr lang="en-GB" sz="1600" b="1" dirty="0"/>
-              <a:t>NOT</a:t>
-            </a:r>
-            <a:r>
-              <a:rPr lang="en-GB" sz="1600" dirty="0"/>
-              <a:t> </a:t>
-            </a:r>
-            <a:r>
-              <a:rPr lang="en-GB" sz="1600" dirty="0" err="1"/>
-              <a:t>a.attisdropped</a:t>
-            </a:r>
-            <a:r>
-              <a:rPr lang="en-GB" sz="1600" dirty="0"/>
-              <a:t> -- </a:t>
-            </a:r>
-            <a:r>
-              <a:rPr lang="en-GB" sz="1600" dirty="0" err="1"/>
-              <a:t>Välistab</a:t>
-            </a:r>
-            <a:r>
-              <a:rPr lang="en-GB" sz="1600" dirty="0"/>
-              <a:t> </a:t>
-            </a:r>
-            <a:r>
-              <a:rPr lang="en-GB" sz="1600" dirty="0" err="1"/>
-              <a:t>andmebaasist</a:t>
-            </a:r>
-            <a:r>
-              <a:rPr lang="en-GB" sz="1600" dirty="0"/>
-              <a:t> </a:t>
-            </a:r>
-            <a:r>
-              <a:rPr lang="en-GB" sz="1600" dirty="0" err="1"/>
-              <a:t>kustutatud</a:t>
-            </a:r>
-            <a:r>
-              <a:rPr lang="en-GB" sz="1600" dirty="0"/>
-              <a:t> </a:t>
-            </a:r>
-            <a:r>
-              <a:rPr lang="en-GB" sz="1600" dirty="0" err="1"/>
-              <a:t>veerud</a:t>
-            </a:r>
-            <a:endParaRPr lang="en-GB" sz="1600" dirty="0"/>
-          </a:p>
-          <a:p>
-            <a:r>
-              <a:rPr lang="en-GB" sz="1600" b="1" dirty="0"/>
-              <a:t>ORDER</a:t>
-            </a:r>
-            <a:r>
-              <a:rPr lang="en-GB" sz="1600" dirty="0"/>
-              <a:t> </a:t>
-            </a:r>
-            <a:r>
-              <a:rPr lang="en-GB" sz="1600" b="1" dirty="0"/>
-              <a:t>BY</a:t>
-            </a:r>
-            <a:r>
-              <a:rPr lang="en-GB" sz="1600" dirty="0"/>
-              <a:t> </a:t>
-            </a:r>
-            <a:r>
-              <a:rPr lang="en-GB" sz="1600" dirty="0" err="1"/>
-              <a:t>vaate_nimi</a:t>
-            </a:r>
-            <a:r>
-              <a:rPr lang="en-GB" sz="1600" dirty="0"/>
-              <a:t>, </a:t>
-            </a:r>
-            <a:r>
-              <a:rPr lang="en-GB" sz="1600" dirty="0" err="1"/>
-              <a:t>a.attnum</a:t>
-            </a:r>
-            <a:r>
-              <a:rPr lang="en-GB" sz="1600" dirty="0"/>
-              <a:t>;</a:t>
-            </a:r>
-          </a:p>
-          <a:p>
-            <a:endParaRPr lang="en-GB" sz="1000" dirty="0">
-              <a:solidFill>
-                <a:srgbClr val="000000"/>
-              </a:solidFill>
-              <a:effectLst/>
-              <a:latin typeface="Consolas" panose="020B0609020204030204" pitchFamily="49" charset="0"/>
-            </a:endParaRPr>
-          </a:p>
-        </p:txBody>
-      </p:sp>
-    </p:spTree>
-    <p:extLst>
-      <p:ext uri="{BB962C8B-B14F-4D97-AF65-F5344CB8AC3E}">
-        <p14:creationId xmlns:p14="http://schemas.microsoft.com/office/powerpoint/2010/main" val="2913642651"/>
-      </p:ext>
-    </p:extLst>
-  </p:cSld>
-  <p:clrMapOvr>
-    <a:masterClrMapping/>
-  </p:clrMapOvr>
-</p:sld>
-</file>
-
-<file path=ppt/slides/slide13.xml><?xml version="1.0" encoding="utf-8"?>
-<p:sld xmlns:a="http://schemas.openxmlformats.org/drawingml/2006/main" xmlns:r="http://schemas.openxmlformats.org/officeDocument/2006/relationships" xmlns:p="http://schemas.openxmlformats.org/presentationml/2006/main" show="0">
-  <p:cSld>
-    <p:spTree>
-      <p:nvGrpSpPr>
-        <p:cNvPr id="1" name=""/>
-        <p:cNvGrpSpPr/>
-        <p:nvPr/>
-      </p:nvGrpSpPr>
-      <p:grpSpPr>
-        <a:xfrm>
-          <a:off x="0" y="0"/>
-          <a:ext cx="0" cy="0"/>
-          <a:chOff x="0" y="0"/>
-          <a:chExt cx="0" cy="0"/>
-        </a:xfrm>
-      </p:grpSpPr>
-      <p:sp>
-        <p:nvSpPr>
-          <p:cNvPr id="2" name="Rectangle 1"/>
-          <p:cNvSpPr/>
-          <p:nvPr/>
-        </p:nvSpPr>
-        <p:spPr>
-          <a:xfrm>
-            <a:off x="0" y="0"/>
-            <a:ext cx="12191695" cy="6858000"/>
-          </a:xfrm>
-          <a:prstGeom prst="rect">
-            <a:avLst/>
-          </a:prstGeom>
-          <a:solidFill>
-            <a:srgbClr val="F7F9FC"/>
-          </a:solidFill>
-          <a:ln>
-            <a:noFill/>
-          </a:ln>
-          <a:effectLst/>
-        </p:spPr>
-        <p:style>
-          <a:lnRef idx="1">
-            <a:schemeClr val="accent1"/>
-          </a:lnRef>
-          <a:fillRef idx="3">
-            <a:schemeClr val="accent1"/>
-          </a:fillRef>
-          <a:effectRef idx="2">
-            <a:schemeClr val="accent1"/>
-          </a:effectRef>
-          <a:fontRef idx="minor">
-            <a:schemeClr val="lt1"/>
-          </a:fontRef>
-        </p:style>
-        <p:txBody>
-          <a:bodyPr rtlCol="0" anchor="ctr"/>
-          <a:lstStyle/>
-          <a:p>
-            <a:pPr algn="ctr"/>
-            <a:endParaRPr/>
-          </a:p>
-        </p:txBody>
-      </p:sp>
-      <p:sp>
-        <p:nvSpPr>
-          <p:cNvPr id="3" name="Rectangle 2"/>
-          <p:cNvSpPr/>
-          <p:nvPr/>
-        </p:nvSpPr>
-        <p:spPr>
-          <a:xfrm>
-            <a:off x="0" y="0"/>
-            <a:ext cx="12191695" cy="841248"/>
-          </a:xfrm>
-          <a:prstGeom prst="rect">
-            <a:avLst/>
-          </a:prstGeom>
-          <a:solidFill>
-            <a:srgbClr val="0F203E"/>
-          </a:solidFill>
-          <a:ln>
-            <a:noFill/>
-          </a:ln>
-          <a:effectLst/>
-        </p:spPr>
-        <p:style>
-          <a:lnRef idx="1">
-            <a:schemeClr val="accent1"/>
-          </a:lnRef>
-          <a:fillRef idx="3">
-            <a:schemeClr val="accent1"/>
-          </a:fillRef>
-          <a:effectRef idx="2">
-            <a:schemeClr val="accent1"/>
-          </a:effectRef>
-          <a:fontRef idx="minor">
-            <a:schemeClr val="lt1"/>
-          </a:fontRef>
-        </p:style>
-        <p:txBody>
-          <a:bodyPr rtlCol="0" anchor="ctr"/>
-          <a:lstStyle/>
-          <a:p>
-            <a:pPr algn="ctr"/>
-            <a:endParaRPr/>
-          </a:p>
-        </p:txBody>
-      </p:sp>
-      <p:sp>
-        <p:nvSpPr>
-          <p:cNvPr id="4" name="Rectangle 3"/>
-          <p:cNvSpPr/>
-          <p:nvPr/>
-        </p:nvSpPr>
-        <p:spPr>
-          <a:xfrm>
-            <a:off x="0" y="841248"/>
-            <a:ext cx="12191695" cy="73152"/>
-          </a:xfrm>
-          <a:prstGeom prst="rect">
-            <a:avLst/>
-          </a:prstGeom>
-          <a:solidFill>
-            <a:srgbClr val="007073"/>
-          </a:solidFill>
-          <a:ln>
-            <a:noFill/>
-          </a:ln>
-          <a:effectLst/>
-        </p:spPr>
-        <p:style>
-          <a:lnRef idx="1">
-            <a:schemeClr val="accent1"/>
-          </a:lnRef>
-          <a:fillRef idx="3">
-            <a:schemeClr val="accent1"/>
-          </a:fillRef>
-          <a:effectRef idx="2">
-            <a:schemeClr val="accent1"/>
-          </a:effectRef>
-          <a:fontRef idx="minor">
-            <a:schemeClr val="lt1"/>
-          </a:fontRef>
-        </p:style>
-        <p:txBody>
-          <a:bodyPr rtlCol="0" anchor="ctr"/>
-          <a:lstStyle/>
-          <a:p>
-            <a:pPr algn="ctr"/>
-            <a:endParaRPr/>
-          </a:p>
-        </p:txBody>
-      </p:sp>
-      <p:sp>
-        <p:nvSpPr>
-          <p:cNvPr id="5" name="TextBox 4"/>
-          <p:cNvSpPr txBox="1"/>
-          <p:nvPr/>
-        </p:nvSpPr>
-        <p:spPr>
-          <a:xfrm>
-            <a:off x="365760" y="-7364"/>
-            <a:ext cx="11430000" cy="892552"/>
-          </a:xfrm>
-          <a:prstGeom prst="rect">
-            <a:avLst/>
-          </a:prstGeom>
-          <a:noFill/>
-        </p:spPr>
-        <p:txBody>
-          <a:bodyPr wrap="square" anchor="ctr">
-            <a:spAutoFit/>
-          </a:bodyPr>
-          <a:lstStyle/>
-          <a:p>
-            <a:pPr>
-              <a:spcAft>
-                <a:spcPts val="0"/>
-              </a:spcAft>
-            </a:pPr>
-            <a:r>
-              <a:rPr lang="en-GB" sz="2200" b="1" dirty="0">
-                <a:solidFill>
-                  <a:srgbClr val="FFFFFF"/>
-                </a:solidFill>
-                <a:latin typeface="Calibri"/>
-              </a:rPr>
-              <a:t>LÜ3  Tõstame tooted.kategooria ID peale  ·  ISE — tee läbi, saa aru, arutelu</a:t>
-            </a:r>
-            <a:br>
-              <a:rPr lang="en-GB" sz="2800" dirty="0">
-                <a:solidFill>
-                  <a:srgbClr val="FF0000"/>
-                </a:solidFill>
-              </a:rPr>
-            </a:br>
-            <a:endParaRPr sz="2800" b="1" dirty="0">
-              <a:solidFill>
-                <a:schemeClr val="bg1"/>
-              </a:solidFill>
-              <a:latin typeface="Calibri"/>
-            </a:endParaRPr>
-          </a:p>
-        </p:txBody>
-      </p:sp>
-      <p:sp>
-        <p:nvSpPr>
-          <p:cNvPr id="8" name="TextBox 7"/>
-          <p:cNvSpPr txBox="1"/>
-          <p:nvPr/>
-        </p:nvSpPr>
-        <p:spPr>
-          <a:xfrm>
-            <a:off x="9601200" y="6601968"/>
-            <a:ext cx="2194560" cy="256032"/>
-          </a:xfrm>
-          <a:prstGeom prst="rect">
-            <a:avLst/>
-          </a:prstGeom>
-          <a:noFill/>
-        </p:spPr>
-        <p:txBody>
-          <a:bodyPr wrap="square" anchor="ctr">
-            <a:spAutoFit/>
-          </a:bodyPr>
-          <a:lstStyle/>
-          <a:p>
-            <a:pPr algn="r">
-              <a:spcAft>
-                <a:spcPts val="400"/>
-              </a:spcAft>
-            </a:pPr>
-            <a:r>
-              <a:rPr sz="1100" b="0">
-                <a:solidFill>
-                  <a:srgbClr val="94A3B8"/>
-                </a:solidFill>
-                <a:latin typeface="Calibri"/>
-              </a:rPr>
-              <a:t>24</a:t>
-            </a:r>
-          </a:p>
-        </p:txBody>
-      </p:sp>
-      <p:sp>
-        <p:nvSpPr>
-          <p:cNvPr id="12" name="Rounded Rectangle 11"/>
-          <p:cNvSpPr/>
-          <p:nvPr/>
-        </p:nvSpPr>
-        <p:spPr>
-          <a:xfrm>
-            <a:off x="365760" y="1691640"/>
-            <a:ext cx="4718304" cy="4617720"/>
-          </a:xfrm>
-          <a:prstGeom prst="roundRect">
-            <a:avLst>
-              <a:gd name="adj" fmla="val 8000"/>
-            </a:avLst>
-          </a:prstGeom>
-          <a:solidFill>
-            <a:srgbClr val="FFFFFF"/>
-          </a:solidFill>
-          <a:ln>
-            <a:noFill/>
-          </a:ln>
-          <a:effectLst/>
-        </p:spPr>
-        <p:style>
-          <a:lnRef idx="1">
-            <a:schemeClr val="accent1"/>
-          </a:lnRef>
-          <a:fillRef idx="3">
-            <a:schemeClr val="accent1"/>
-          </a:fillRef>
-          <a:effectRef idx="2">
-            <a:schemeClr val="accent1"/>
-          </a:effectRef>
-          <a:fontRef idx="minor">
-            <a:schemeClr val="lt1"/>
-          </a:fontRef>
-        </p:style>
-        <p:txBody>
-          <a:bodyPr rtlCol="0" anchor="ctr"/>
-          <a:lstStyle/>
-          <a:p>
-            <a:pPr algn="ctr"/>
-            <a:endParaRPr/>
-          </a:p>
-        </p:txBody>
-      </p:sp>
-      <p:sp>
-        <p:nvSpPr>
-          <p:cNvPr id="6" name="Content Placeholder 2">
-            <a:extLst>
-              <a:ext uri="{FF2B5EF4-FFF2-40B4-BE49-F238E27FC236}">
-                <a16:creationId xmlns:a16="http://schemas.microsoft.com/office/drawing/2014/main" id="{33615A4C-4181-0CA3-C3D3-B9718AF938E6}"/>
-              </a:ext>
-            </a:extLst>
-          </p:cNvPr>
-          <p:cNvSpPr txBox="1">
-            <a:spLocks/>
-          </p:cNvSpPr>
-          <p:nvPr/>
-        </p:nvSpPr>
-        <p:spPr>
-          <a:xfrm>
-            <a:off x="457200" y="1600200"/>
-            <a:ext cx="5340096" cy="4525963"/>
-          </a:xfrm>
-          <a:prstGeom prst="rect">
-            <a:avLst/>
-          </a:prstGeom>
-        </p:spPr>
-        <p:txBody>
-          <a:bodyPr>
-            <a:normAutofit/>
-          </a:bodyPr>
-          <a:lstStyle>
-            <a:lvl1pPr marL="342900" indent="-342900" algn="l" defTabSz="457200" rtl="0" eaLnBrk="1" latinLnBrk="0" hangingPunct="1">
-              <a:spcBef>
-                <a:spcPct val="20000"/>
-              </a:spcBef>
-              <a:buFont typeface="Arial"/>
-              <a:buChar char="•"/>
-              <a:defRPr sz="3200" kern="1200">
-                <a:solidFill>
-                  <a:schemeClr val="tx1"/>
-                </a:solidFill>
-                <a:latin typeface="+mn-lt"/>
-                <a:ea typeface="+mn-ea"/>
-                <a:cs typeface="+mn-cs"/>
-              </a:defRPr>
-            </a:lvl1pPr>
-            <a:lvl2pPr marL="742950" indent="-285750" algn="l" defTabSz="457200" rtl="0" eaLnBrk="1" latinLnBrk="0" hangingPunct="1">
-              <a:spcBef>
-                <a:spcPct val="20000"/>
-              </a:spcBef>
-              <a:buFont typeface="Arial"/>
-              <a:buChar char="–"/>
-              <a:defRPr sz="2800" kern="1200">
-                <a:solidFill>
-                  <a:schemeClr val="tx1"/>
-                </a:solidFill>
-                <a:latin typeface="+mn-lt"/>
-                <a:ea typeface="+mn-ea"/>
-                <a:cs typeface="+mn-cs"/>
-              </a:defRPr>
-            </a:lvl2pPr>
-            <a:lvl3pPr marL="1143000" indent="-228600" algn="l" defTabSz="457200" rtl="0" eaLnBrk="1" latinLnBrk="0" hangingPunct="1">
-              <a:spcBef>
-                <a:spcPct val="20000"/>
-              </a:spcBef>
-              <a:buFont typeface="Arial"/>
-              <a:buChar char="•"/>
-              <a:defRPr sz="2400" kern="1200">
-                <a:solidFill>
-                  <a:schemeClr val="tx1"/>
-                </a:solidFill>
-                <a:latin typeface="+mn-lt"/>
-                <a:ea typeface="+mn-ea"/>
-                <a:cs typeface="+mn-cs"/>
-              </a:defRPr>
-            </a:lvl3pPr>
-            <a:lvl4pPr marL="1600200" indent="-228600" algn="l" defTabSz="457200" rtl="0" eaLnBrk="1" latinLnBrk="0" hangingPunct="1">
-              <a:spcBef>
-                <a:spcPct val="20000"/>
-              </a:spcBef>
-              <a:buFont typeface="Arial"/>
-              <a:buChar char="–"/>
-              <a:defRPr sz="2000" kern="1200">
-                <a:solidFill>
-                  <a:schemeClr val="tx1"/>
-                </a:solidFill>
-                <a:latin typeface="+mn-lt"/>
-                <a:ea typeface="+mn-ea"/>
-                <a:cs typeface="+mn-cs"/>
-              </a:defRPr>
-            </a:lvl4pPr>
-            <a:lvl5pPr marL="2057400" indent="-228600" algn="l" defTabSz="457200" rtl="0" eaLnBrk="1" latinLnBrk="0" hangingPunct="1">
-              <a:spcBef>
-                <a:spcPct val="20000"/>
-              </a:spcBef>
-              <a:buFont typeface="Arial"/>
-              <a:buChar char="»"/>
-              <a:defRPr sz="2000" kern="1200">
-                <a:solidFill>
-                  <a:schemeClr val="tx1"/>
-                </a:solidFill>
-                <a:latin typeface="+mn-lt"/>
-                <a:ea typeface="+mn-ea"/>
-                <a:cs typeface="+mn-cs"/>
-              </a:defRPr>
-            </a:lvl5pPr>
-            <a:lvl6pPr marL="2514600" indent="-228600" algn="l" defTabSz="457200" rtl="0" eaLnBrk="1" latinLnBrk="0" hangingPunct="1">
-              <a:spcBef>
-                <a:spcPct val="20000"/>
-              </a:spcBef>
-              <a:buFont typeface="Arial"/>
-              <a:buChar char="•"/>
-              <a:defRPr sz="2000" kern="1200">
-                <a:solidFill>
-                  <a:schemeClr val="tx1"/>
-                </a:solidFill>
-                <a:latin typeface="+mn-lt"/>
-                <a:ea typeface="+mn-ea"/>
-                <a:cs typeface="+mn-cs"/>
-              </a:defRPr>
-            </a:lvl6pPr>
-            <a:lvl7pPr marL="2971800" indent="-228600" algn="l" defTabSz="457200" rtl="0" eaLnBrk="1" latinLnBrk="0" hangingPunct="1">
-              <a:spcBef>
-                <a:spcPct val="20000"/>
-              </a:spcBef>
-              <a:buFont typeface="Arial"/>
-              <a:buChar char="•"/>
-              <a:defRPr sz="2000" kern="1200">
-                <a:solidFill>
-                  <a:schemeClr val="tx1"/>
-                </a:solidFill>
-                <a:latin typeface="+mn-lt"/>
-                <a:ea typeface="+mn-ea"/>
-                <a:cs typeface="+mn-cs"/>
-              </a:defRPr>
-            </a:lvl7pPr>
-            <a:lvl8pPr marL="3429000" indent="-228600" algn="l" defTabSz="457200" rtl="0" eaLnBrk="1" latinLnBrk="0" hangingPunct="1">
-              <a:spcBef>
-                <a:spcPct val="20000"/>
-              </a:spcBef>
-              <a:buFont typeface="Arial"/>
-              <a:buChar char="•"/>
-              <a:defRPr sz="2000" kern="1200">
-                <a:solidFill>
-                  <a:schemeClr val="tx1"/>
-                </a:solidFill>
-                <a:latin typeface="+mn-lt"/>
-                <a:ea typeface="+mn-ea"/>
-                <a:cs typeface="+mn-cs"/>
-              </a:defRPr>
-            </a:lvl8pPr>
-            <a:lvl9pPr marL="3886200" indent="-228600" algn="l" defTabSz="457200" rtl="0" eaLnBrk="1" latinLnBrk="0" hangingPunct="1">
-              <a:spcBef>
-                <a:spcPct val="20000"/>
-              </a:spcBef>
-              <a:buFont typeface="Arial"/>
-              <a:buChar char="•"/>
-              <a:defRPr sz="2000" kern="1200">
-                <a:solidFill>
-                  <a:schemeClr val="tx1"/>
-                </a:solidFill>
-                <a:latin typeface="+mn-lt"/>
-                <a:ea typeface="+mn-ea"/>
-                <a:cs typeface="+mn-cs"/>
-              </a:defRPr>
-            </a:lvl9pPr>
-          </a:lstStyle>
-          <a:p>
-            <a:pPr marL="0" indent="0">
-              <a:buFont typeface="Arial"/>
-              <a:buNone/>
-            </a:pPr>
-            <a:r>
-              <a:rPr lang="en-GB" sz="1600" b="1" dirty="0">
-                <a:solidFill>
-                  <a:srgbClr val="FF0000"/>
-                </a:solidFill>
-              </a:rPr>
-              <a:t>Loo </a:t>
-            </a:r>
-            <a:r>
-              <a:rPr lang="en-GB" sz="1600" b="1" dirty="0" err="1">
-                <a:solidFill>
-                  <a:srgbClr val="FF0000"/>
-                </a:solidFill>
-              </a:rPr>
-              <a:t>uus</a:t>
-            </a:r>
-            <a:r>
-              <a:rPr lang="en-GB" sz="1600" b="1" dirty="0">
-                <a:solidFill>
-                  <a:srgbClr val="FF0000"/>
-                </a:solidFill>
-              </a:rPr>
-              <a:t> </a:t>
-            </a:r>
-            <a:r>
-              <a:rPr lang="en-GB" sz="1600" b="1" dirty="0" err="1">
-                <a:solidFill>
-                  <a:srgbClr val="FF0000"/>
-                </a:solidFill>
-              </a:rPr>
-              <a:t>tabel</a:t>
-            </a:r>
-            <a:endParaRPr lang="en-GB" sz="1600" b="1" dirty="0">
-              <a:solidFill>
-                <a:srgbClr val="FF0000"/>
-              </a:solidFill>
-            </a:endParaRPr>
-          </a:p>
-          <a:p>
-            <a:pPr marL="0" indent="0">
-              <a:buFont typeface="Arial"/>
-              <a:buNone/>
-            </a:pPr>
-            <a:r>
-              <a:rPr lang="en-GB" sz="1600" b="1" dirty="0"/>
-              <a:t>CREATE</a:t>
-            </a:r>
-            <a:r>
-              <a:rPr lang="en-GB" sz="1600" dirty="0"/>
-              <a:t> </a:t>
-            </a:r>
-            <a:r>
-              <a:rPr lang="en-GB" sz="1600" b="1" dirty="0"/>
-              <a:t>TABLE</a:t>
-            </a:r>
-            <a:r>
-              <a:rPr lang="en-GB" sz="1600" dirty="0"/>
-              <a:t> </a:t>
-            </a:r>
-            <a:r>
-              <a:rPr lang="en-GB" sz="1600" dirty="0" err="1"/>
-              <a:t>kategooriad</a:t>
-            </a:r>
-            <a:r>
-              <a:rPr lang="en-GB" sz="1600" dirty="0"/>
-              <a:t> (</a:t>
-            </a:r>
-          </a:p>
-          <a:p>
-            <a:pPr marL="0" indent="0">
-              <a:buFont typeface="Arial"/>
-              <a:buNone/>
-            </a:pPr>
-            <a:r>
-              <a:rPr lang="en-GB" sz="1600" dirty="0" err="1"/>
-              <a:t>kategooria_id</a:t>
-            </a:r>
-            <a:r>
-              <a:rPr lang="en-GB" sz="1600" dirty="0"/>
-              <a:t> </a:t>
-            </a:r>
-            <a:r>
-              <a:rPr lang="en-GB" sz="1600" b="1" dirty="0"/>
-              <a:t>INTEGER</a:t>
-            </a:r>
-            <a:r>
-              <a:rPr lang="en-GB" sz="1600" dirty="0"/>
-              <a:t> </a:t>
-            </a:r>
-            <a:r>
-              <a:rPr lang="en-GB" sz="1600" b="1" dirty="0"/>
-              <a:t>NOT</a:t>
-            </a:r>
-            <a:r>
-              <a:rPr lang="en-GB" sz="1600" dirty="0"/>
-              <a:t> </a:t>
-            </a:r>
-            <a:r>
-              <a:rPr lang="en-GB" sz="1600" b="1" dirty="0"/>
-              <a:t>NULL</a:t>
-            </a:r>
-            <a:r>
-              <a:rPr lang="en-GB" sz="1600" dirty="0"/>
-              <a:t>,</a:t>
-            </a:r>
-          </a:p>
-          <a:p>
-            <a:pPr marL="0" indent="0">
-              <a:buFont typeface="Arial"/>
-              <a:buNone/>
-            </a:pPr>
-            <a:r>
-              <a:rPr lang="en-GB" sz="1600" dirty="0" err="1"/>
-              <a:t>nimetus</a:t>
-            </a:r>
-            <a:r>
-              <a:rPr lang="en-GB" sz="1600" dirty="0"/>
-              <a:t> </a:t>
-            </a:r>
-            <a:r>
-              <a:rPr lang="en-GB" sz="1600" b="1" dirty="0"/>
-              <a:t>VARCHAR</a:t>
-            </a:r>
-            <a:r>
-              <a:rPr lang="en-GB" sz="1600" dirty="0"/>
-              <a:t>(50) </a:t>
-            </a:r>
-            <a:r>
-              <a:rPr lang="en-GB" sz="1600" b="1" dirty="0"/>
-              <a:t>NOT</a:t>
-            </a:r>
-            <a:r>
-              <a:rPr lang="en-GB" sz="1600" dirty="0"/>
-              <a:t> </a:t>
-            </a:r>
-            <a:r>
-              <a:rPr lang="en-GB" sz="1600" b="1" dirty="0"/>
-              <a:t>NULL</a:t>
-            </a:r>
-            <a:r>
-              <a:rPr lang="en-GB" sz="1600" dirty="0"/>
-              <a:t>,</a:t>
-            </a:r>
-          </a:p>
-          <a:p>
-            <a:pPr marL="0" indent="0">
-              <a:buFont typeface="Arial"/>
-              <a:buNone/>
-            </a:pPr>
-            <a:r>
-              <a:rPr lang="en-GB" sz="1600" dirty="0" err="1"/>
-              <a:t>osakond</a:t>
-            </a:r>
-            <a:r>
-              <a:rPr lang="en-GB" sz="1600" dirty="0"/>
-              <a:t> </a:t>
-            </a:r>
-            <a:r>
-              <a:rPr lang="en-GB" sz="1600" b="1" dirty="0"/>
-              <a:t>VARCHAR</a:t>
-            </a:r>
-            <a:r>
-              <a:rPr lang="en-GB" sz="1600" dirty="0"/>
-              <a:t>(50) </a:t>
-            </a:r>
-            <a:r>
-              <a:rPr lang="en-GB" sz="1600" b="1" dirty="0"/>
-              <a:t>NOT</a:t>
-            </a:r>
-            <a:r>
-              <a:rPr lang="en-GB" sz="1600" dirty="0"/>
-              <a:t> </a:t>
-            </a:r>
-            <a:r>
-              <a:rPr lang="en-GB" sz="1600" b="1" dirty="0"/>
-              <a:t>NULL</a:t>
-            </a:r>
-            <a:r>
-              <a:rPr lang="en-GB" sz="1600" dirty="0"/>
-              <a:t>,</a:t>
-            </a:r>
-          </a:p>
-          <a:p>
-            <a:pPr marL="0" indent="0">
-              <a:buFont typeface="Arial"/>
-              <a:buNone/>
-            </a:pPr>
-            <a:r>
-              <a:rPr lang="en-GB" sz="1600" dirty="0" err="1"/>
-              <a:t>km_maar</a:t>
-            </a:r>
-            <a:r>
-              <a:rPr lang="en-GB" sz="1600" dirty="0"/>
-              <a:t> </a:t>
-            </a:r>
-            <a:r>
-              <a:rPr lang="en-GB" sz="1600" b="1" dirty="0"/>
-              <a:t>NUMERIC</a:t>
-            </a:r>
-            <a:r>
-              <a:rPr lang="en-GB" sz="1600" dirty="0"/>
-              <a:t>(5, 2) </a:t>
-            </a:r>
-            <a:r>
-              <a:rPr lang="en-GB" sz="1600" b="1" dirty="0"/>
-              <a:t>NOT</a:t>
-            </a:r>
-            <a:r>
-              <a:rPr lang="en-GB" sz="1600" dirty="0"/>
-              <a:t> </a:t>
-            </a:r>
-            <a:r>
-              <a:rPr lang="en-GB" sz="1600" b="1" dirty="0"/>
-              <a:t>NULL</a:t>
-            </a:r>
-            <a:r>
-              <a:rPr lang="en-GB" sz="1600" dirty="0"/>
-              <a:t>,</a:t>
-            </a:r>
-          </a:p>
-          <a:p>
-            <a:pPr marL="0" indent="0">
-              <a:buFont typeface="Arial"/>
-              <a:buNone/>
-            </a:pPr>
-            <a:r>
-              <a:rPr lang="en-GB" sz="1600" b="1" dirty="0"/>
-              <a:t>PRIMARY</a:t>
-            </a:r>
-            <a:r>
-              <a:rPr lang="en-GB" sz="1600" dirty="0"/>
-              <a:t> </a:t>
-            </a:r>
-            <a:r>
-              <a:rPr lang="en-GB" sz="1600" b="1" dirty="0"/>
-              <a:t>KEY</a:t>
-            </a:r>
-            <a:r>
-              <a:rPr lang="en-GB" sz="1600" dirty="0"/>
-              <a:t> (</a:t>
-            </a:r>
-            <a:r>
-              <a:rPr lang="en-GB" sz="1600" dirty="0" err="1"/>
-              <a:t>kategooria_id</a:t>
-            </a:r>
-            <a:r>
-              <a:rPr lang="en-GB" sz="1600" dirty="0"/>
-              <a:t>),</a:t>
-            </a:r>
-          </a:p>
-          <a:p>
-            <a:pPr marL="0" indent="0">
-              <a:buFont typeface="Arial"/>
-              <a:buNone/>
-            </a:pPr>
-            <a:r>
-              <a:rPr lang="en-GB" sz="1600" b="1" dirty="0"/>
-              <a:t>UNIQUE</a:t>
-            </a:r>
-            <a:r>
-              <a:rPr lang="en-GB" sz="1600" dirty="0"/>
-              <a:t> (</a:t>
-            </a:r>
-            <a:r>
-              <a:rPr lang="en-GB" sz="1600" dirty="0" err="1"/>
-              <a:t>nimetus</a:t>
-            </a:r>
-            <a:r>
-              <a:rPr lang="en-GB" sz="1600" dirty="0"/>
-              <a:t>)</a:t>
-            </a:r>
-          </a:p>
-          <a:p>
-            <a:pPr marL="0" indent="0">
-              <a:buFont typeface="Arial"/>
-              <a:buNone/>
-            </a:pPr>
-            <a:r>
-              <a:rPr lang="en-GB" sz="1600" dirty="0"/>
-              <a:t>);</a:t>
-            </a:r>
-          </a:p>
-          <a:p>
-            <a:pPr marL="0" indent="0">
-              <a:buFont typeface="Arial"/>
-              <a:buNone/>
-            </a:pPr>
-            <a:endParaRPr lang="en-GB" sz="1600" dirty="0"/>
-          </a:p>
-          <a:p>
-            <a:pPr marL="0" indent="0">
-              <a:buFont typeface="Arial"/>
-              <a:buNone/>
-            </a:pPr>
-            <a:r>
-              <a:rPr lang="en-GB" sz="1600" dirty="0" err="1">
-                <a:solidFill>
-                  <a:srgbClr val="FF0000"/>
-                </a:solidFill>
-              </a:rPr>
-              <a:t>Impordi</a:t>
-            </a:r>
-            <a:r>
-              <a:rPr lang="en-GB" sz="1600" dirty="0">
-                <a:solidFill>
-                  <a:srgbClr val="FF0000"/>
-                </a:solidFill>
-              </a:rPr>
-              <a:t> </a:t>
-            </a:r>
-            <a:r>
-              <a:rPr lang="en-GB" sz="1600" dirty="0" err="1">
-                <a:solidFill>
-                  <a:srgbClr val="FF0000"/>
-                </a:solidFill>
-              </a:rPr>
-              <a:t>andmed</a:t>
-            </a:r>
-            <a:r>
-              <a:rPr lang="en-GB" sz="1600" dirty="0">
-                <a:solidFill>
-                  <a:srgbClr val="FF0000"/>
-                </a:solidFill>
-              </a:rPr>
-              <a:t> </a:t>
-            </a:r>
-            <a:r>
-              <a:rPr lang="en-GB" sz="1600" dirty="0" err="1"/>
-              <a:t>failist</a:t>
-            </a:r>
-            <a:r>
-              <a:rPr lang="en-GB" sz="1600" dirty="0"/>
-              <a:t> kategooriad.csv</a:t>
-            </a:r>
-          </a:p>
-          <a:p>
-            <a:endParaRPr lang="en-GB" dirty="0"/>
-          </a:p>
-        </p:txBody>
-      </p:sp>
-      <p:sp>
-        <p:nvSpPr>
-          <p:cNvPr id="11" name="Content Placeholder 2">
-            <a:extLst>
-              <a:ext uri="{FF2B5EF4-FFF2-40B4-BE49-F238E27FC236}">
-                <a16:creationId xmlns:a16="http://schemas.microsoft.com/office/drawing/2014/main" id="{8A493DF8-1B11-0CED-66BE-1B732DBF72D0}"/>
-              </a:ext>
-            </a:extLst>
-          </p:cNvPr>
-          <p:cNvSpPr txBox="1">
-            <a:spLocks/>
-          </p:cNvSpPr>
-          <p:nvPr/>
-        </p:nvSpPr>
-        <p:spPr>
-          <a:xfrm>
-            <a:off x="4774540" y="1623218"/>
-            <a:ext cx="7726680" cy="4525963"/>
-          </a:xfrm>
-          <a:prstGeom prst="rect">
-            <a:avLst/>
-          </a:prstGeom>
-        </p:spPr>
-        <p:txBody>
-          <a:bodyPr vert="horz" lIns="91440" tIns="45720" rIns="91440" bIns="45720" rtlCol="0">
-            <a:normAutofit lnSpcReduction="10000"/>
-          </a:bodyPr>
-          <a:lstStyle>
-            <a:lvl1pPr marL="342900" indent="-342900" algn="l" defTabSz="457200" rtl="0" eaLnBrk="1" latinLnBrk="0" hangingPunct="1">
-              <a:spcBef>
-                <a:spcPct val="20000"/>
-              </a:spcBef>
-              <a:buFont typeface="Arial"/>
-              <a:buChar char="•"/>
-              <a:defRPr sz="3200" kern="1200">
-                <a:solidFill>
-                  <a:schemeClr val="tx1"/>
-                </a:solidFill>
-                <a:latin typeface="+mn-lt"/>
-                <a:ea typeface="+mn-ea"/>
-                <a:cs typeface="+mn-cs"/>
-              </a:defRPr>
-            </a:lvl1pPr>
-            <a:lvl2pPr marL="742950" indent="-285750" algn="l" defTabSz="457200" rtl="0" eaLnBrk="1" latinLnBrk="0" hangingPunct="1">
-              <a:spcBef>
-                <a:spcPct val="20000"/>
-              </a:spcBef>
-              <a:buFont typeface="Arial"/>
-              <a:buChar char="–"/>
-              <a:defRPr sz="2800" kern="1200">
-                <a:solidFill>
-                  <a:schemeClr val="tx1"/>
-                </a:solidFill>
-                <a:latin typeface="+mn-lt"/>
-                <a:ea typeface="+mn-ea"/>
-                <a:cs typeface="+mn-cs"/>
-              </a:defRPr>
-            </a:lvl2pPr>
-            <a:lvl3pPr marL="1143000" indent="-228600" algn="l" defTabSz="457200" rtl="0" eaLnBrk="1" latinLnBrk="0" hangingPunct="1">
-              <a:spcBef>
-                <a:spcPct val="20000"/>
-              </a:spcBef>
-              <a:buFont typeface="Arial"/>
-              <a:buChar char="•"/>
-              <a:defRPr sz="2400" kern="1200">
-                <a:solidFill>
-                  <a:schemeClr val="tx1"/>
-                </a:solidFill>
-                <a:latin typeface="+mn-lt"/>
-                <a:ea typeface="+mn-ea"/>
-                <a:cs typeface="+mn-cs"/>
-              </a:defRPr>
-            </a:lvl3pPr>
-            <a:lvl4pPr marL="1600200" indent="-228600" algn="l" defTabSz="457200" rtl="0" eaLnBrk="1" latinLnBrk="0" hangingPunct="1">
-              <a:spcBef>
-                <a:spcPct val="20000"/>
-              </a:spcBef>
-              <a:buFont typeface="Arial"/>
-              <a:buChar char="–"/>
-              <a:defRPr sz="2000" kern="1200">
-                <a:solidFill>
-                  <a:schemeClr val="tx1"/>
-                </a:solidFill>
-                <a:latin typeface="+mn-lt"/>
-                <a:ea typeface="+mn-ea"/>
-                <a:cs typeface="+mn-cs"/>
-              </a:defRPr>
-            </a:lvl4pPr>
-            <a:lvl5pPr marL="2057400" indent="-228600" algn="l" defTabSz="457200" rtl="0" eaLnBrk="1" latinLnBrk="0" hangingPunct="1">
-              <a:spcBef>
-                <a:spcPct val="20000"/>
-              </a:spcBef>
-              <a:buFont typeface="Arial"/>
-              <a:buChar char="»"/>
-              <a:defRPr sz="2000" kern="1200">
-                <a:solidFill>
-                  <a:schemeClr val="tx1"/>
-                </a:solidFill>
-                <a:latin typeface="+mn-lt"/>
-                <a:ea typeface="+mn-ea"/>
-                <a:cs typeface="+mn-cs"/>
-              </a:defRPr>
-            </a:lvl5pPr>
-            <a:lvl6pPr marL="2514600" indent="-228600" algn="l" defTabSz="457200" rtl="0" eaLnBrk="1" latinLnBrk="0" hangingPunct="1">
-              <a:spcBef>
-                <a:spcPct val="20000"/>
-              </a:spcBef>
-              <a:buFont typeface="Arial"/>
-              <a:buChar char="•"/>
-              <a:defRPr sz="2000" kern="1200">
-                <a:solidFill>
-                  <a:schemeClr val="tx1"/>
-                </a:solidFill>
-                <a:latin typeface="+mn-lt"/>
-                <a:ea typeface="+mn-ea"/>
-                <a:cs typeface="+mn-cs"/>
-              </a:defRPr>
-            </a:lvl6pPr>
-            <a:lvl7pPr marL="2971800" indent="-228600" algn="l" defTabSz="457200" rtl="0" eaLnBrk="1" latinLnBrk="0" hangingPunct="1">
-              <a:spcBef>
-                <a:spcPct val="20000"/>
-              </a:spcBef>
-              <a:buFont typeface="Arial"/>
-              <a:buChar char="•"/>
-              <a:defRPr sz="2000" kern="1200">
-                <a:solidFill>
-                  <a:schemeClr val="tx1"/>
-                </a:solidFill>
-                <a:latin typeface="+mn-lt"/>
-                <a:ea typeface="+mn-ea"/>
-                <a:cs typeface="+mn-cs"/>
-              </a:defRPr>
-            </a:lvl7pPr>
-            <a:lvl8pPr marL="3429000" indent="-228600" algn="l" defTabSz="457200" rtl="0" eaLnBrk="1" latinLnBrk="0" hangingPunct="1">
-              <a:spcBef>
-                <a:spcPct val="20000"/>
-              </a:spcBef>
-              <a:buFont typeface="Arial"/>
-              <a:buChar char="•"/>
-              <a:defRPr sz="2000" kern="1200">
-                <a:solidFill>
-                  <a:schemeClr val="tx1"/>
-                </a:solidFill>
-                <a:latin typeface="+mn-lt"/>
-                <a:ea typeface="+mn-ea"/>
-                <a:cs typeface="+mn-cs"/>
-              </a:defRPr>
-            </a:lvl8pPr>
-            <a:lvl9pPr marL="3886200" indent="-228600" algn="l" defTabSz="457200" rtl="0" eaLnBrk="1" latinLnBrk="0" hangingPunct="1">
-              <a:spcBef>
-                <a:spcPct val="20000"/>
-              </a:spcBef>
-              <a:buFont typeface="Arial"/>
-              <a:buChar char="•"/>
-              <a:defRPr sz="2000" kern="1200">
-                <a:solidFill>
-                  <a:schemeClr val="tx1"/>
-                </a:solidFill>
-                <a:latin typeface="+mn-lt"/>
-                <a:ea typeface="+mn-ea"/>
-                <a:cs typeface="+mn-cs"/>
-              </a:defRPr>
-            </a:lvl9pPr>
-          </a:lstStyle>
-          <a:p>
-            <a:pPr marL="0" indent="0">
-              <a:buNone/>
-            </a:pPr>
-            <a:r>
-              <a:rPr lang="en-GB" sz="1800" b="1" dirty="0">
-                <a:solidFill>
-                  <a:srgbClr val="FF0000"/>
-                </a:solidFill>
-              </a:rPr>
-              <a:t>Lisa </a:t>
-            </a:r>
-            <a:r>
-              <a:rPr lang="en-GB" sz="1800" b="1" dirty="0" err="1">
-                <a:solidFill>
-                  <a:srgbClr val="FF0000"/>
-                </a:solidFill>
-              </a:rPr>
-              <a:t>tabelisse</a:t>
-            </a:r>
-            <a:r>
-              <a:rPr lang="en-GB" sz="1800" b="1" dirty="0">
-                <a:solidFill>
-                  <a:srgbClr val="FF0000"/>
-                </a:solidFill>
-              </a:rPr>
-              <a:t> tooted </a:t>
-            </a:r>
-            <a:r>
-              <a:rPr lang="en-GB" sz="1800" b="1" dirty="0" err="1">
-                <a:solidFill>
-                  <a:srgbClr val="FF0000"/>
-                </a:solidFill>
-              </a:rPr>
-              <a:t>uus</a:t>
-            </a:r>
-            <a:r>
-              <a:rPr lang="en-GB" sz="1800" b="1" dirty="0">
-                <a:solidFill>
-                  <a:srgbClr val="FF0000"/>
-                </a:solidFill>
-              </a:rPr>
-              <a:t> </a:t>
-            </a:r>
-            <a:r>
-              <a:rPr lang="en-GB" sz="1800" b="1" dirty="0" err="1">
-                <a:solidFill>
-                  <a:srgbClr val="FF0000"/>
-                </a:solidFill>
-              </a:rPr>
-              <a:t>veerg</a:t>
-            </a:r>
-            <a:r>
-              <a:rPr lang="en-GB" sz="1800" b="1" dirty="0">
-                <a:solidFill>
-                  <a:srgbClr val="FF0000"/>
-                </a:solidFill>
-              </a:rPr>
-              <a:t> </a:t>
-            </a:r>
-            <a:r>
-              <a:rPr lang="en-GB" sz="1800" b="1" dirty="0" err="1">
-                <a:solidFill>
-                  <a:srgbClr val="FF0000"/>
-                </a:solidFill>
-              </a:rPr>
-              <a:t>kategooria_id</a:t>
-            </a:r>
-            <a:endParaRPr lang="en-GB" sz="1800" b="1" dirty="0">
-              <a:solidFill>
-                <a:srgbClr val="FF0000"/>
-              </a:solidFill>
-            </a:endParaRPr>
-          </a:p>
-          <a:p>
-            <a:pPr marL="0" indent="0">
-              <a:buNone/>
-            </a:pPr>
-            <a:r>
-              <a:rPr lang="en-GB" sz="1800" b="1" dirty="0"/>
-              <a:t>ALTER</a:t>
-            </a:r>
-            <a:r>
-              <a:rPr lang="en-GB" sz="1800" dirty="0"/>
-              <a:t> </a:t>
-            </a:r>
-            <a:r>
-              <a:rPr lang="en-GB" sz="1800" b="1" dirty="0"/>
-              <a:t>TABLE</a:t>
-            </a:r>
-            <a:r>
-              <a:rPr lang="en-GB" sz="1800" dirty="0"/>
-              <a:t> tooted</a:t>
-            </a:r>
-          </a:p>
-          <a:p>
-            <a:pPr marL="0" indent="0">
-              <a:buNone/>
-            </a:pPr>
-            <a:r>
-              <a:rPr lang="en-GB" sz="1800" b="1" dirty="0"/>
-              <a:t>ADD</a:t>
-            </a:r>
-            <a:r>
-              <a:rPr lang="en-GB" sz="1800" dirty="0"/>
-              <a:t> </a:t>
-            </a:r>
-            <a:r>
-              <a:rPr lang="en-GB" sz="1800" b="1" dirty="0"/>
-              <a:t>COLUMN</a:t>
-            </a:r>
-            <a:r>
-              <a:rPr lang="en-GB" sz="1800" dirty="0"/>
-              <a:t> </a:t>
-            </a:r>
-            <a:r>
-              <a:rPr lang="en-GB" sz="1800" dirty="0" err="1"/>
-              <a:t>kategooria_id</a:t>
-            </a:r>
-            <a:r>
-              <a:rPr lang="en-GB" sz="1800" dirty="0"/>
-              <a:t> </a:t>
-            </a:r>
-            <a:r>
-              <a:rPr lang="en-GB" sz="1800" b="1" dirty="0"/>
-              <a:t>INTEGER</a:t>
-            </a:r>
-            <a:r>
-              <a:rPr lang="en-GB" sz="1800" dirty="0"/>
-              <a:t>;</a:t>
-            </a:r>
-          </a:p>
-          <a:p>
-            <a:pPr marL="0" indent="0">
-              <a:buNone/>
-            </a:pPr>
-            <a:br>
-              <a:rPr lang="en-GB" sz="1800" dirty="0"/>
-            </a:br>
-            <a:r>
-              <a:rPr lang="en-GB" sz="1800" dirty="0" err="1">
-                <a:solidFill>
-                  <a:srgbClr val="FF0000"/>
-                </a:solidFill>
-              </a:rPr>
-              <a:t>Täida</a:t>
-            </a:r>
-            <a:r>
-              <a:rPr lang="en-GB" sz="1800" dirty="0">
-                <a:solidFill>
-                  <a:srgbClr val="FF0000"/>
-                </a:solidFill>
-              </a:rPr>
-              <a:t> see </a:t>
-            </a:r>
-            <a:r>
-              <a:rPr lang="en-GB" sz="1800" dirty="0" err="1">
-                <a:solidFill>
-                  <a:srgbClr val="FF0000"/>
-                </a:solidFill>
-              </a:rPr>
-              <a:t>veerg</a:t>
-            </a:r>
-            <a:r>
-              <a:rPr lang="en-GB" sz="1800" dirty="0">
-                <a:solidFill>
-                  <a:srgbClr val="FF0000"/>
-                </a:solidFill>
-              </a:rPr>
-              <a:t> </a:t>
-            </a:r>
-            <a:r>
-              <a:rPr lang="en-GB" sz="1800" dirty="0" err="1">
-                <a:solidFill>
-                  <a:srgbClr val="FF0000"/>
-                </a:solidFill>
-              </a:rPr>
-              <a:t>kategooria_id</a:t>
-            </a:r>
-            <a:r>
-              <a:rPr lang="en-GB" sz="1800" dirty="0">
-                <a:solidFill>
-                  <a:srgbClr val="FF0000"/>
-                </a:solidFill>
-              </a:rPr>
-              <a:t> </a:t>
-            </a:r>
-            <a:r>
-              <a:rPr lang="en-GB" sz="1800" dirty="0" err="1">
-                <a:solidFill>
-                  <a:srgbClr val="FF0000"/>
-                </a:solidFill>
-              </a:rPr>
-              <a:t>väärtusega</a:t>
-            </a:r>
-            <a:r>
-              <a:rPr lang="en-GB" sz="1800" dirty="0">
-                <a:solidFill>
-                  <a:srgbClr val="FF0000"/>
-                </a:solidFill>
-              </a:rPr>
-              <a:t> </a:t>
-            </a:r>
-            <a:r>
-              <a:rPr lang="en-GB" sz="1800" dirty="0" err="1">
-                <a:solidFill>
-                  <a:srgbClr val="FF0000"/>
-                </a:solidFill>
-              </a:rPr>
-              <a:t>otsingu</a:t>
-            </a:r>
-            <a:r>
-              <a:rPr lang="en-GB" sz="1800" dirty="0">
-                <a:solidFill>
-                  <a:srgbClr val="FF0000"/>
-                </a:solidFill>
-              </a:rPr>
-              <a:t> </a:t>
-            </a:r>
-            <a:r>
-              <a:rPr lang="en-GB" sz="1800" dirty="0" err="1">
-                <a:solidFill>
-                  <a:srgbClr val="FF0000"/>
-                </a:solidFill>
-              </a:rPr>
-              <a:t>alusel</a:t>
-            </a:r>
-            <a:endParaRPr lang="en-GB" sz="1800" dirty="0">
-              <a:solidFill>
-                <a:srgbClr val="FF0000"/>
-              </a:solidFill>
-            </a:endParaRPr>
-          </a:p>
-          <a:p>
-            <a:pPr marL="0" indent="0">
-              <a:buNone/>
-            </a:pPr>
-            <a:r>
-              <a:rPr lang="en-GB" sz="1800" b="1" dirty="0"/>
-              <a:t>UPDATE</a:t>
-            </a:r>
-            <a:r>
-              <a:rPr lang="en-GB" sz="1800" dirty="0"/>
-              <a:t> tooted </a:t>
-            </a:r>
-            <a:r>
-              <a:rPr lang="en-GB" sz="1800" i="1" dirty="0"/>
-              <a:t>t</a:t>
-            </a:r>
-            <a:endParaRPr lang="en-GB" sz="1800" dirty="0"/>
-          </a:p>
-          <a:p>
-            <a:pPr marL="0" indent="0">
-              <a:buNone/>
-            </a:pPr>
-            <a:r>
-              <a:rPr lang="en-GB" sz="1800" b="1" dirty="0"/>
-              <a:t>SET</a:t>
-            </a:r>
-            <a:r>
-              <a:rPr lang="en-GB" sz="1800" dirty="0"/>
-              <a:t> </a:t>
-            </a:r>
-            <a:r>
-              <a:rPr lang="en-GB" sz="1800" dirty="0" err="1"/>
-              <a:t>kategooria_id</a:t>
-            </a:r>
-            <a:r>
-              <a:rPr lang="en-GB" sz="1800" dirty="0"/>
-              <a:t> = </a:t>
-            </a:r>
-            <a:r>
-              <a:rPr lang="en-GB" sz="1800" i="1" dirty="0" err="1"/>
-              <a:t>k</a:t>
-            </a:r>
-            <a:r>
-              <a:rPr lang="en-GB" sz="1800" dirty="0" err="1"/>
-              <a:t>.kategooria_id</a:t>
-            </a:r>
-            <a:endParaRPr lang="en-GB" sz="1800" dirty="0"/>
-          </a:p>
-          <a:p>
-            <a:pPr marL="0" indent="0">
-              <a:buNone/>
-            </a:pPr>
-            <a:r>
-              <a:rPr lang="en-GB" sz="1800" b="1" dirty="0"/>
-              <a:t>FROM</a:t>
-            </a:r>
-            <a:r>
-              <a:rPr lang="en-GB" sz="1800" dirty="0"/>
-              <a:t> </a:t>
-            </a:r>
-            <a:r>
-              <a:rPr lang="en-GB" sz="1800" dirty="0" err="1"/>
-              <a:t>kategooriad</a:t>
-            </a:r>
-            <a:r>
-              <a:rPr lang="en-GB" sz="1800" dirty="0"/>
-              <a:t> </a:t>
-            </a:r>
-            <a:r>
-              <a:rPr lang="en-GB" sz="1800" i="1" dirty="0"/>
-              <a:t>k</a:t>
-            </a:r>
-            <a:endParaRPr lang="en-GB" sz="1800" dirty="0"/>
-          </a:p>
-          <a:p>
-            <a:pPr marL="0" indent="0">
-              <a:buNone/>
-            </a:pPr>
-            <a:r>
-              <a:rPr lang="en-GB" sz="1800" b="1" dirty="0"/>
-              <a:t>WHERE</a:t>
-            </a:r>
-            <a:r>
-              <a:rPr lang="en-GB" sz="1800" dirty="0"/>
-              <a:t> </a:t>
-            </a:r>
-            <a:r>
-              <a:rPr lang="en-GB" sz="1800" i="1" dirty="0" err="1"/>
-              <a:t>t</a:t>
-            </a:r>
-            <a:r>
-              <a:rPr lang="en-GB" sz="1800" dirty="0" err="1"/>
-              <a:t>.kategooria</a:t>
-            </a:r>
-            <a:r>
-              <a:rPr lang="en-GB" sz="1800" dirty="0"/>
-              <a:t> = </a:t>
-            </a:r>
-            <a:r>
-              <a:rPr lang="en-GB" sz="1800" i="1" dirty="0" err="1"/>
-              <a:t>k</a:t>
-            </a:r>
-            <a:r>
-              <a:rPr lang="en-GB" sz="1800" dirty="0" err="1"/>
-              <a:t>.nimetus</a:t>
-            </a:r>
-            <a:r>
-              <a:rPr lang="en-GB" sz="1800" dirty="0"/>
-              <a:t>;</a:t>
-            </a:r>
-          </a:p>
-          <a:p>
-            <a:pPr marL="0" indent="0">
-              <a:buNone/>
-            </a:pPr>
-            <a:br>
-              <a:rPr lang="en-GB" sz="1800" dirty="0"/>
-            </a:br>
-            <a:r>
-              <a:rPr lang="en-GB" sz="1800" dirty="0" err="1">
-                <a:solidFill>
-                  <a:srgbClr val="FF0000"/>
-                </a:solidFill>
-              </a:rPr>
-              <a:t>Kustuta</a:t>
-            </a:r>
-            <a:r>
-              <a:rPr lang="en-GB" sz="1800" dirty="0">
-                <a:solidFill>
-                  <a:srgbClr val="FF0000"/>
-                </a:solidFill>
-              </a:rPr>
-              <a:t> </a:t>
-            </a:r>
-            <a:r>
-              <a:rPr lang="en-GB" sz="1800" dirty="0" err="1">
-                <a:solidFill>
-                  <a:srgbClr val="FF0000"/>
-                </a:solidFill>
-              </a:rPr>
-              <a:t>vana</a:t>
-            </a:r>
-            <a:r>
-              <a:rPr lang="en-GB" sz="1800" dirty="0">
-                <a:solidFill>
-                  <a:srgbClr val="FF0000"/>
-                </a:solidFill>
-              </a:rPr>
-              <a:t> </a:t>
-            </a:r>
-            <a:r>
-              <a:rPr lang="en-GB" sz="1800" dirty="0" err="1">
-                <a:solidFill>
-                  <a:srgbClr val="FF0000"/>
-                </a:solidFill>
-              </a:rPr>
-              <a:t>mittevajalik</a:t>
-            </a:r>
-            <a:r>
-              <a:rPr lang="en-GB" sz="1800" dirty="0">
-                <a:solidFill>
-                  <a:srgbClr val="FF0000"/>
-                </a:solidFill>
-              </a:rPr>
-              <a:t> </a:t>
-            </a:r>
-            <a:r>
-              <a:rPr lang="en-GB" sz="1800" dirty="0" err="1">
-                <a:solidFill>
-                  <a:srgbClr val="FF0000"/>
-                </a:solidFill>
-              </a:rPr>
-              <a:t>veerg</a:t>
-            </a:r>
-            <a:endParaRPr lang="en-GB" sz="1800" dirty="0">
-              <a:solidFill>
-                <a:srgbClr val="FF0000"/>
-              </a:solidFill>
-            </a:endParaRPr>
-          </a:p>
-          <a:p>
-            <a:pPr marL="0" indent="0">
-              <a:buNone/>
-            </a:pPr>
-            <a:r>
-              <a:rPr lang="en-GB" sz="1800" b="1" dirty="0"/>
-              <a:t>ALTER</a:t>
-            </a:r>
-            <a:r>
-              <a:rPr lang="en-GB" sz="1800" dirty="0"/>
-              <a:t> </a:t>
-            </a:r>
-            <a:r>
-              <a:rPr lang="en-GB" sz="1800" b="1" dirty="0"/>
-              <a:t>TABLE</a:t>
-            </a:r>
-            <a:r>
-              <a:rPr lang="en-GB" sz="1800" dirty="0"/>
-              <a:t> tooted</a:t>
-            </a:r>
-          </a:p>
-          <a:p>
-            <a:pPr marL="0" indent="0">
-              <a:buNone/>
-            </a:pPr>
-            <a:r>
-              <a:rPr lang="en-GB" sz="1800" b="1" dirty="0"/>
-              <a:t>ALTER</a:t>
-            </a:r>
-            <a:r>
-              <a:rPr lang="en-GB" sz="1800" dirty="0"/>
-              <a:t> </a:t>
-            </a:r>
-            <a:r>
-              <a:rPr lang="en-GB" sz="1800" b="1" dirty="0"/>
-              <a:t>COLUMN</a:t>
-            </a:r>
-            <a:r>
-              <a:rPr lang="en-GB" sz="1800" dirty="0"/>
-              <a:t> </a:t>
-            </a:r>
-            <a:r>
-              <a:rPr lang="en-GB" sz="1800" dirty="0" err="1"/>
-              <a:t>kategooria_id</a:t>
-            </a:r>
-            <a:r>
-              <a:rPr lang="en-GB" sz="1800" dirty="0"/>
-              <a:t> </a:t>
-            </a:r>
-            <a:r>
-              <a:rPr lang="en-GB" sz="1800" b="1" dirty="0"/>
-              <a:t>SET</a:t>
-            </a:r>
-            <a:r>
-              <a:rPr lang="en-GB" sz="1800" dirty="0"/>
-              <a:t> </a:t>
-            </a:r>
-            <a:r>
-              <a:rPr lang="en-GB" sz="1800" b="1" dirty="0"/>
-              <a:t>NOT</a:t>
-            </a:r>
-            <a:r>
-              <a:rPr lang="en-GB" sz="1800" dirty="0"/>
-              <a:t> </a:t>
-            </a:r>
-            <a:r>
-              <a:rPr lang="en-GB" sz="1800" b="1" dirty="0"/>
-              <a:t>NULL</a:t>
-            </a:r>
-            <a:r>
-              <a:rPr lang="en-GB" sz="1800" dirty="0"/>
-              <a:t>,</a:t>
-            </a:r>
-          </a:p>
-          <a:p>
-            <a:pPr marL="0" indent="0">
-              <a:buNone/>
-            </a:pPr>
-            <a:r>
-              <a:rPr lang="en-GB" sz="1800" b="1" dirty="0"/>
-              <a:t>DROP</a:t>
-            </a:r>
-            <a:r>
-              <a:rPr lang="en-GB" sz="1800" dirty="0"/>
-              <a:t> </a:t>
-            </a:r>
-            <a:r>
-              <a:rPr lang="en-GB" sz="1800" b="1" dirty="0"/>
-              <a:t>COLUMN</a:t>
-            </a:r>
-            <a:r>
-              <a:rPr lang="en-GB" sz="1800" dirty="0"/>
-              <a:t> </a:t>
-            </a:r>
-            <a:r>
-              <a:rPr lang="en-GB" sz="1800" dirty="0" err="1"/>
-              <a:t>kategooria</a:t>
-            </a:r>
-            <a:r>
-              <a:rPr lang="en-GB" sz="1800" dirty="0"/>
-              <a:t>;</a:t>
-            </a:r>
-          </a:p>
-          <a:p>
-            <a:endParaRPr lang="en-GB" dirty="0"/>
-          </a:p>
-        </p:txBody>
-      </p:sp>
-    </p:spTree>
-  </p:cSld>
-  <p:clrMapOvr>
-    <a:masterClrMapping/>
-  </p:clrMapOvr>
-</p:sld>
-</file>
-
 <file path=ppt/slides/slide2.xml><?xml version="1.0" encoding="utf-8"?>
 <p:sld xmlns:a="http://schemas.openxmlformats.org/drawingml/2006/main" xmlns:r="http://schemas.openxmlformats.org/officeDocument/2006/relationships" xmlns:p="http://schemas.openxmlformats.org/presentationml/2006/main">
   <p:cSld>
@@ -20975,1399 +16262,6 @@
     <p:extLst>
       <p:ext uri="{BB962C8B-B14F-4D97-AF65-F5344CB8AC3E}">
         <p14:creationId xmlns:p14="http://schemas.microsoft.com/office/powerpoint/2010/main" val="3256210442"/>
-      </p:ext>
-    </p:extLst>
-  </p:cSld>
-  <p:clrMapOvr>
-    <a:masterClrMapping/>
-  </p:clrMapOvr>
-</p:sld>
-</file>
-
-<file path=ppt/slides/slide8.xml><?xml version="1.0" encoding="utf-8"?>
-<p:sld xmlns:a="http://schemas.openxmlformats.org/drawingml/2006/main" xmlns:r="http://schemas.openxmlformats.org/officeDocument/2006/relationships" xmlns:p="http://schemas.openxmlformats.org/presentationml/2006/main">
-  <p:cSld>
-    <p:spTree>
-      <p:nvGrpSpPr>
-        <p:cNvPr id="1" name=""/>
-        <p:cNvGrpSpPr/>
-        <p:nvPr/>
-      </p:nvGrpSpPr>
-      <p:grpSpPr>
-        <a:xfrm>
-          <a:off x="0" y="0"/>
-          <a:ext cx="0" cy="0"/>
-          <a:chOff x="0" y="0"/>
-          <a:chExt cx="0" cy="0"/>
-        </a:xfrm>
-      </p:grpSpPr>
-      <p:sp>
-        <p:nvSpPr>
-          <p:cNvPr id="2" name="Rectangle 1"/>
-          <p:cNvSpPr/>
-          <p:nvPr/>
-        </p:nvSpPr>
-        <p:spPr>
-          <a:xfrm>
-            <a:off x="0" y="0"/>
-            <a:ext cx="12191695" cy="6858000"/>
-          </a:xfrm>
-          <a:prstGeom prst="rect">
-            <a:avLst/>
-          </a:prstGeom>
-          <a:solidFill>
-            <a:srgbClr val="F7F9FC"/>
-          </a:solidFill>
-          <a:ln>
-            <a:noFill/>
-          </a:ln>
-        </p:spPr>
-        <p:style>
-          <a:lnRef idx="1">
-            <a:schemeClr val="accent1"/>
-          </a:lnRef>
-          <a:fillRef idx="3">
-            <a:schemeClr val="accent1"/>
-          </a:fillRef>
-          <a:effectRef idx="2">
-            <a:schemeClr val="accent1"/>
-          </a:effectRef>
-          <a:fontRef idx="minor">
-            <a:schemeClr val="lt1"/>
-          </a:fontRef>
-        </p:style>
-        <p:txBody>
-          <a:bodyPr rtlCol="0" anchor="ctr"/>
-          <a:lstStyle/>
-          <a:p>
-            <a:pPr algn="ctr"/>
-            <a:endParaRPr/>
-          </a:p>
-        </p:txBody>
-      </p:sp>
-      <p:sp>
-        <p:nvSpPr>
-          <p:cNvPr id="3" name="Rectangle 2"/>
-          <p:cNvSpPr/>
-          <p:nvPr/>
-        </p:nvSpPr>
-        <p:spPr>
-          <a:xfrm>
-            <a:off x="0" y="0"/>
-            <a:ext cx="12191695" cy="841248"/>
-          </a:xfrm>
-          <a:prstGeom prst="rect">
-            <a:avLst/>
-          </a:prstGeom>
-          <a:solidFill>
-            <a:srgbClr val="0F203E"/>
-          </a:solidFill>
-          <a:ln>
-            <a:noFill/>
-          </a:ln>
-        </p:spPr>
-        <p:style>
-          <a:lnRef idx="1">
-            <a:schemeClr val="accent1"/>
-          </a:lnRef>
-          <a:fillRef idx="3">
-            <a:schemeClr val="accent1"/>
-          </a:fillRef>
-          <a:effectRef idx="2">
-            <a:schemeClr val="accent1"/>
-          </a:effectRef>
-          <a:fontRef idx="minor">
-            <a:schemeClr val="lt1"/>
-          </a:fontRef>
-        </p:style>
-        <p:txBody>
-          <a:bodyPr rtlCol="0" anchor="ctr"/>
-          <a:lstStyle/>
-          <a:p>
-            <a:pPr algn="ctr"/>
-            <a:endParaRPr/>
-          </a:p>
-        </p:txBody>
-      </p:sp>
-      <p:sp>
-        <p:nvSpPr>
-          <p:cNvPr id="4" name="Rectangle 3"/>
-          <p:cNvSpPr/>
-          <p:nvPr/>
-        </p:nvSpPr>
-        <p:spPr>
-          <a:xfrm>
-            <a:off x="0" y="841248"/>
-            <a:ext cx="12191695" cy="73152"/>
-          </a:xfrm>
-          <a:prstGeom prst="rect">
-            <a:avLst/>
-          </a:prstGeom>
-          <a:solidFill>
-            <a:srgbClr val="007073"/>
-          </a:solidFill>
-          <a:ln>
-            <a:noFill/>
-          </a:ln>
-        </p:spPr>
-        <p:style>
-          <a:lnRef idx="1">
-            <a:schemeClr val="accent1"/>
-          </a:lnRef>
-          <a:fillRef idx="3">
-            <a:schemeClr val="accent1"/>
-          </a:fillRef>
-          <a:effectRef idx="2">
-            <a:schemeClr val="accent1"/>
-          </a:effectRef>
-          <a:fontRef idx="minor">
-            <a:schemeClr val="lt1"/>
-          </a:fontRef>
-        </p:style>
-        <p:txBody>
-          <a:bodyPr rtlCol="0" anchor="ctr"/>
-          <a:lstStyle/>
-          <a:p>
-            <a:pPr algn="ctr"/>
-            <a:endParaRPr/>
-          </a:p>
-        </p:txBody>
-      </p:sp>
-      <p:sp>
-        <p:nvSpPr>
-          <p:cNvPr id="5" name="TextBox 4"/>
-          <p:cNvSpPr txBox="1"/>
-          <p:nvPr/>
-        </p:nvSpPr>
-        <p:spPr>
-          <a:xfrm>
-            <a:off x="365760" y="208079"/>
-            <a:ext cx="11430000" cy="461665"/>
-          </a:xfrm>
-          <a:prstGeom prst="rect">
-            <a:avLst/>
-          </a:prstGeom>
-          <a:noFill/>
-        </p:spPr>
-        <p:txBody>
-          <a:bodyPr wrap="square" anchor="ctr">
-            <a:spAutoFit/>
-          </a:bodyPr>
-          <a:lstStyle/>
-          <a:p>
-            <a:pPr algn="l"/>
-            <a:r>
-              <a:rPr sz="2400" b="1" dirty="0" err="1">
-                <a:solidFill>
-                  <a:srgbClr val="FFFFFF"/>
-                </a:solidFill>
-                <a:latin typeface="Calibri"/>
-              </a:rPr>
-              <a:t>fact_tellimused</a:t>
-            </a:r>
-            <a:r>
-              <a:rPr sz="2400" b="1" dirty="0">
-                <a:solidFill>
-                  <a:srgbClr val="FFFFFF"/>
-                </a:solidFill>
-                <a:latin typeface="Calibri"/>
-              </a:rPr>
-              <a:t> — </a:t>
-            </a:r>
-            <a:r>
-              <a:rPr sz="2400" b="1" dirty="0" err="1">
-                <a:solidFill>
-                  <a:srgbClr val="FFFFFF"/>
-                </a:solidFill>
-                <a:latin typeface="Calibri"/>
-              </a:rPr>
-              <a:t>kood</a:t>
-            </a:r>
-            <a:r>
-              <a:rPr lang="en-GB" sz="2400" b="1" dirty="0">
-                <a:solidFill>
-                  <a:srgbClr val="FFFFFF"/>
-                </a:solidFill>
-                <a:latin typeface="Calibri"/>
-              </a:rPr>
-              <a:t> </a:t>
-            </a:r>
-            <a:r>
-              <a:rPr lang="en-GB" sz="2400" b="1" dirty="0">
-                <a:solidFill>
-                  <a:srgbClr val="FF0000"/>
-                </a:solidFill>
-                <a:latin typeface="Calibri"/>
-              </a:rPr>
-              <a:t>ISE</a:t>
-            </a:r>
-            <a:endParaRPr sz="2400" b="1" dirty="0">
-              <a:solidFill>
-                <a:srgbClr val="FF0000"/>
-              </a:solidFill>
-              <a:latin typeface="Calibri"/>
-            </a:endParaRPr>
-          </a:p>
-        </p:txBody>
-      </p:sp>
-      <p:sp>
-        <p:nvSpPr>
-          <p:cNvPr id="6" name="Rounded Rectangle 5"/>
-          <p:cNvSpPr/>
-          <p:nvPr/>
-        </p:nvSpPr>
-        <p:spPr>
-          <a:xfrm>
-            <a:off x="365760" y="1042415"/>
-            <a:ext cx="2468880" cy="292608"/>
-          </a:xfrm>
-          <a:prstGeom prst="roundRect">
-            <a:avLst>
-              <a:gd name="adj" fmla="val 8000"/>
-            </a:avLst>
-          </a:prstGeom>
-          <a:solidFill>
-            <a:srgbClr val="007073"/>
-          </a:solidFill>
-          <a:ln>
-            <a:noFill/>
-          </a:ln>
-        </p:spPr>
-        <p:style>
-          <a:lnRef idx="1">
-            <a:schemeClr val="accent1"/>
-          </a:lnRef>
-          <a:fillRef idx="3">
-            <a:schemeClr val="accent1"/>
-          </a:fillRef>
-          <a:effectRef idx="2">
-            <a:schemeClr val="accent1"/>
-          </a:effectRef>
-          <a:fontRef idx="minor">
-            <a:schemeClr val="lt1"/>
-          </a:fontRef>
-        </p:style>
-        <p:txBody>
-          <a:bodyPr rtlCol="0" anchor="ctr"/>
-          <a:lstStyle/>
-          <a:p>
-            <a:pPr algn="ctr"/>
-            <a:endParaRPr/>
-          </a:p>
-        </p:txBody>
-      </p:sp>
-      <p:sp>
-        <p:nvSpPr>
-          <p:cNvPr id="7" name="TextBox 6"/>
-          <p:cNvSpPr txBox="1"/>
-          <p:nvPr/>
-        </p:nvSpPr>
-        <p:spPr>
-          <a:xfrm>
-            <a:off x="365760" y="1042415"/>
-            <a:ext cx="2468880" cy="292608"/>
-          </a:xfrm>
-          <a:prstGeom prst="rect">
-            <a:avLst/>
-          </a:prstGeom>
-          <a:noFill/>
-        </p:spPr>
-        <p:txBody>
-          <a:bodyPr wrap="square" anchor="ctr">
-            <a:spAutoFit/>
-          </a:bodyPr>
-          <a:lstStyle/>
-          <a:p>
-            <a:pPr algn="ctr"/>
-            <a:r>
-              <a:rPr sz="1100" b="1">
-                <a:solidFill>
-                  <a:srgbClr val="FFFFFF"/>
-                </a:solidFill>
-                <a:latin typeface="Calibri"/>
-              </a:rPr>
-              <a:t>kopeeri tehisarule</a:t>
-            </a:r>
-          </a:p>
-        </p:txBody>
-      </p:sp>
-      <p:sp>
-        <p:nvSpPr>
-          <p:cNvPr id="8" name="TextBox 7"/>
-          <p:cNvSpPr txBox="1"/>
-          <p:nvPr/>
-        </p:nvSpPr>
-        <p:spPr>
-          <a:xfrm>
-            <a:off x="2971800" y="1042415"/>
-            <a:ext cx="8778240" cy="292608"/>
-          </a:xfrm>
-          <a:prstGeom prst="rect">
-            <a:avLst/>
-          </a:prstGeom>
-          <a:noFill/>
-        </p:spPr>
-        <p:txBody>
-          <a:bodyPr wrap="square">
-            <a:spAutoFit/>
-          </a:bodyPr>
-          <a:lstStyle/>
-          <a:p>
-            <a:pPr algn="l"/>
-            <a:r>
-              <a:rPr lang="en-GB" sz="1300" b="0" dirty="0">
-                <a:solidFill>
-                  <a:srgbClr val="64748B"/>
-                </a:solidFill>
-                <a:latin typeface="Calibri"/>
-              </a:rPr>
-              <a:t>Palu </a:t>
-            </a:r>
-            <a:r>
-              <a:rPr lang="en-GB" sz="1300" b="0" dirty="0" err="1">
-                <a:solidFill>
-                  <a:srgbClr val="64748B"/>
-                </a:solidFill>
-                <a:latin typeface="Calibri"/>
-              </a:rPr>
-              <a:t>tehisarul</a:t>
-            </a:r>
-            <a:r>
-              <a:rPr lang="en-GB" sz="1300" b="0" dirty="0">
-                <a:solidFill>
-                  <a:srgbClr val="64748B"/>
-                </a:solidFill>
-                <a:latin typeface="Calibri"/>
-              </a:rPr>
-              <a:t> see </a:t>
-            </a:r>
-            <a:r>
-              <a:rPr lang="en-GB" sz="1300" b="0" dirty="0" err="1">
-                <a:solidFill>
-                  <a:srgbClr val="64748B"/>
-                </a:solidFill>
-                <a:latin typeface="Calibri"/>
-              </a:rPr>
-              <a:t>kood</a:t>
-            </a:r>
-            <a:r>
-              <a:rPr lang="en-GB" sz="1300" b="0" dirty="0">
-                <a:solidFill>
-                  <a:srgbClr val="64748B"/>
-                </a:solidFill>
-                <a:latin typeface="Calibri"/>
-              </a:rPr>
-              <a:t> </a:t>
-            </a:r>
-            <a:r>
-              <a:rPr lang="en-GB" sz="1300" b="0" dirty="0" err="1">
-                <a:solidFill>
-                  <a:srgbClr val="64748B"/>
-                </a:solidFill>
-                <a:latin typeface="Calibri"/>
-              </a:rPr>
-              <a:t>seletada</a:t>
-            </a:r>
-            <a:r>
-              <a:rPr lang="en-GB" sz="1300" b="0" dirty="0">
-                <a:solidFill>
-                  <a:srgbClr val="64748B"/>
-                </a:solidFill>
-                <a:latin typeface="Calibri"/>
-              </a:rPr>
-              <a:t>, </a:t>
-            </a:r>
-            <a:r>
-              <a:rPr lang="en-GB" sz="1300" b="0" dirty="0" err="1">
-                <a:solidFill>
-                  <a:srgbClr val="64748B"/>
-                </a:solidFill>
-                <a:latin typeface="Calibri"/>
-              </a:rPr>
-              <a:t>analüüsi</a:t>
-            </a:r>
-            <a:r>
-              <a:rPr lang="en-GB" sz="1300" b="0" dirty="0">
-                <a:solidFill>
-                  <a:srgbClr val="64748B"/>
-                </a:solidFill>
-                <a:latin typeface="Calibri"/>
-              </a:rPr>
-              <a:t> </a:t>
-            </a:r>
-            <a:r>
-              <a:rPr lang="en-GB" sz="1300" b="0" dirty="0" err="1">
-                <a:solidFill>
-                  <a:srgbClr val="64748B"/>
-                </a:solidFill>
-                <a:latin typeface="Calibri"/>
-              </a:rPr>
-              <a:t>ja</a:t>
-            </a:r>
-            <a:r>
-              <a:rPr lang="en-GB" sz="1300" b="0" dirty="0">
-                <a:solidFill>
-                  <a:srgbClr val="64748B"/>
-                </a:solidFill>
-                <a:latin typeface="Calibri"/>
-              </a:rPr>
-              <a:t> </a:t>
-            </a:r>
-            <a:r>
-              <a:rPr lang="en-GB" sz="1300" b="0" dirty="0" err="1">
-                <a:solidFill>
-                  <a:srgbClr val="64748B"/>
-                </a:solidFill>
-                <a:latin typeface="Calibri"/>
-              </a:rPr>
-              <a:t>mõtesta</a:t>
-            </a:r>
-            <a:r>
-              <a:rPr lang="en-GB" sz="1300" b="0" dirty="0">
-                <a:solidFill>
-                  <a:srgbClr val="64748B"/>
-                </a:solidFill>
-                <a:latin typeface="Calibri"/>
-              </a:rPr>
-              <a:t>.</a:t>
-            </a:r>
-            <a:endParaRPr sz="1300" b="0" dirty="0">
-              <a:solidFill>
-                <a:srgbClr val="64748B"/>
-              </a:solidFill>
-              <a:latin typeface="Calibri"/>
-            </a:endParaRPr>
-          </a:p>
-        </p:txBody>
-      </p:sp>
-      <p:sp>
-        <p:nvSpPr>
-          <p:cNvPr id="9" name="Rounded Rectangle 8"/>
-          <p:cNvSpPr/>
-          <p:nvPr/>
-        </p:nvSpPr>
-        <p:spPr>
-          <a:xfrm>
-            <a:off x="365760" y="1417320"/>
-            <a:ext cx="11430000" cy="5029200"/>
-          </a:xfrm>
-          <a:prstGeom prst="roundRect">
-            <a:avLst>
-              <a:gd name="adj" fmla="val 8000"/>
-            </a:avLst>
-          </a:prstGeom>
-          <a:solidFill>
-            <a:srgbClr val="0F172A"/>
-          </a:solidFill>
-          <a:ln>
-            <a:noFill/>
-          </a:ln>
-        </p:spPr>
-        <p:style>
-          <a:lnRef idx="1">
-            <a:schemeClr val="accent1"/>
-          </a:lnRef>
-          <a:fillRef idx="3">
-            <a:schemeClr val="accent1"/>
-          </a:fillRef>
-          <a:effectRef idx="2">
-            <a:schemeClr val="accent1"/>
-          </a:effectRef>
-          <a:fontRef idx="minor">
-            <a:schemeClr val="lt1"/>
-          </a:fontRef>
-        </p:style>
-        <p:txBody>
-          <a:bodyPr rtlCol="0" anchor="ctr"/>
-          <a:lstStyle/>
-          <a:p>
-            <a:pPr algn="ctr"/>
-            <a:endParaRPr/>
-          </a:p>
-        </p:txBody>
-      </p:sp>
-      <p:sp>
-        <p:nvSpPr>
-          <p:cNvPr id="10" name="TextBox 9"/>
-          <p:cNvSpPr txBox="1"/>
-          <p:nvPr/>
-        </p:nvSpPr>
-        <p:spPr>
-          <a:xfrm>
-            <a:off x="530352" y="1527048"/>
-            <a:ext cx="11100816" cy="4828032"/>
-          </a:xfrm>
-          <a:prstGeom prst="rect">
-            <a:avLst/>
-          </a:prstGeom>
-          <a:noFill/>
-        </p:spPr>
-        <p:txBody>
-          <a:bodyPr wrap="square">
-            <a:spAutoFit/>
-          </a:bodyPr>
-          <a:lstStyle/>
-          <a:p>
-            <a:pPr>
-              <a:spcAft>
-                <a:spcPts val="200"/>
-              </a:spcAft>
-            </a:pPr>
-            <a:r>
-              <a:rPr sz="1200" b="0">
-                <a:solidFill>
-                  <a:srgbClr val="E2E8F0"/>
-                </a:solidFill>
-                <a:latin typeface="Consolas"/>
-              </a:rPr>
-              <a:t>CREATE VIEW fact_tellimused AS</a:t>
-            </a:r>
-          </a:p>
-          <a:p>
-            <a:pPr>
-              <a:spcAft>
-                <a:spcPts val="200"/>
-              </a:spcAft>
-            </a:pPr>
-            <a:r>
-              <a:rPr sz="1200" b="0">
-                <a:solidFill>
-                  <a:srgbClr val="E2E8F0"/>
-                </a:solidFill>
-                <a:latin typeface="Consolas"/>
-              </a:rPr>
-              <a:t>SELECT</a:t>
-            </a:r>
-          </a:p>
-          <a:p>
-            <a:pPr>
-              <a:spcAft>
-                <a:spcPts val="200"/>
-              </a:spcAft>
-            </a:pPr>
-            <a:r>
-              <a:rPr sz="1200" b="0">
-                <a:solidFill>
-                  <a:srgbClr val="E2E8F0"/>
-                </a:solidFill>
-                <a:latin typeface="Consolas"/>
-              </a:rPr>
-              <a:t>    t.tellimus_id, t.klient_id, t.kuupäev,</a:t>
-            </a:r>
-          </a:p>
-          <a:p>
-            <a:pPr>
-              <a:spcAft>
-                <a:spcPts val="200"/>
-              </a:spcAft>
-            </a:pPr>
-            <a:r>
-              <a:rPr sz="1200" b="0">
-                <a:solidFill>
-                  <a:srgbClr val="E2E8F0"/>
-                </a:solidFill>
-                <a:latin typeface="Consolas"/>
-              </a:rPr>
-              <a:t>    t.staatus, t.makseviis, t.tarneviis,</a:t>
-            </a:r>
-          </a:p>
-          <a:p>
-            <a:pPr>
-              <a:spcAft>
-                <a:spcPts val="200"/>
-              </a:spcAft>
-            </a:pPr>
-            <a:r>
-              <a:rPr sz="1200" b="0">
-                <a:solidFill>
-                  <a:srgbClr val="E2E8F0"/>
-                </a:solidFill>
-                <a:latin typeface="Consolas"/>
-              </a:rPr>
-              <a:t>    CASE WHEN t.staatus = 'Täidetud' THEN 'Täidetud' END AS taidetud,</a:t>
-            </a:r>
-          </a:p>
-          <a:p>
-            <a:pPr>
-              <a:spcAft>
-                <a:spcPts val="200"/>
-              </a:spcAft>
-            </a:pPr>
-            <a:r>
-              <a:rPr sz="1200" b="0">
-                <a:solidFill>
-                  <a:srgbClr val="E2E8F0"/>
-                </a:solidFill>
-                <a:latin typeface="Consolas"/>
-              </a:rPr>
-              <a:t>    (t.kuupäev - kl.liitumise_kuupäev) AS paevi_liitumisest,</a:t>
-            </a:r>
-          </a:p>
-          <a:p>
-            <a:pPr>
-              <a:spcAft>
-                <a:spcPts val="200"/>
-              </a:spcAft>
-            </a:pPr>
-            <a:r>
-              <a:rPr sz="1200" b="0">
-                <a:solidFill>
-                  <a:srgbClr val="E2E8F0"/>
-                </a:solidFill>
-                <a:latin typeface="Consolas"/>
-              </a:rPr>
-              <a:t>    COUNT(*) AS ridade_arv,</a:t>
-            </a:r>
-          </a:p>
-          <a:p>
-            <a:pPr>
-              <a:spcAft>
-                <a:spcPts val="200"/>
-              </a:spcAft>
-            </a:pPr>
-            <a:r>
-              <a:rPr sz="1200" b="0">
-                <a:solidFill>
-                  <a:srgbClr val="E2E8F0"/>
-                </a:solidFill>
-                <a:latin typeface="Consolas"/>
-              </a:rPr>
-              <a:t>    SUM(tr.kogus) AS tooteid_kokku,</a:t>
-            </a:r>
-          </a:p>
-          <a:p>
-            <a:pPr>
-              <a:spcAft>
-                <a:spcPts val="200"/>
-              </a:spcAft>
-            </a:pPr>
-            <a:r>
-              <a:rPr sz="1200" b="0">
-                <a:solidFill>
-                  <a:srgbClr val="E2E8F0"/>
-                </a:solidFill>
-                <a:latin typeface="Consolas"/>
-              </a:rPr>
-              <a:t>    ROUND(SUM(td.hind * tr.kogus * (1 - tr.allahindlus_pct / 100.0)), 2) AS tellimus_ilma_km,</a:t>
-            </a:r>
-          </a:p>
-          <a:p>
-            <a:pPr>
-              <a:spcAft>
-                <a:spcPts val="200"/>
-              </a:spcAft>
-            </a:pPr>
-            <a:r>
-              <a:rPr sz="1200" b="0">
-                <a:solidFill>
-                  <a:srgbClr val="E2E8F0"/>
-                </a:solidFill>
-                <a:latin typeface="Consolas"/>
-              </a:rPr>
-              <a:t>    ROUND(SUM(td.hind * tr.kogus * (1 - tr.allahindlus_pct / 100.0) * k.km_maar / 100.0), 2) AS tellimus_km,</a:t>
-            </a:r>
-          </a:p>
-          <a:p>
-            <a:pPr>
-              <a:spcAft>
-                <a:spcPts val="200"/>
-              </a:spcAft>
-            </a:pPr>
-            <a:r>
-              <a:rPr sz="1200" b="0">
-                <a:solidFill>
-                  <a:srgbClr val="E2E8F0"/>
-                </a:solidFill>
-                <a:latin typeface="Consolas"/>
-              </a:rPr>
-              <a:t>    ROUND(SUM(td.hind * tr.kogus * (1 - tr.allahindlus_pct / 100.0) * (1 + k.km_maar / 100.0)), 2) AS tellimus_koos_km,</a:t>
-            </a:r>
-          </a:p>
-          <a:p>
-            <a:pPr>
-              <a:spcAft>
-                <a:spcPts val="200"/>
-              </a:spcAft>
-            </a:pPr>
-            <a:r>
-              <a:rPr sz="1200" b="0">
-                <a:solidFill>
-                  <a:srgbClr val="E2E8F0"/>
-                </a:solidFill>
-                <a:latin typeface="Consolas"/>
-              </a:rPr>
-              <a:t>    ROUND(SUM(td.hind * tr.kogus * tr.allahindlus_pct / 100.0), 2) AS allahindluse_summa</a:t>
-            </a:r>
-          </a:p>
-          <a:p>
-            <a:pPr>
-              <a:spcAft>
-                <a:spcPts val="200"/>
-              </a:spcAft>
-            </a:pPr>
-            <a:r>
-              <a:rPr sz="1200" b="0">
-                <a:solidFill>
-                  <a:srgbClr val="E2E8F0"/>
-                </a:solidFill>
-                <a:latin typeface="Consolas"/>
-              </a:rPr>
-              <a:t>FROM tellimused t</a:t>
-            </a:r>
-          </a:p>
-          <a:p>
-            <a:pPr>
-              <a:spcAft>
-                <a:spcPts val="200"/>
-              </a:spcAft>
-            </a:pPr>
-            <a:r>
-              <a:rPr sz="1200" b="0">
-                <a:solidFill>
-                  <a:srgbClr val="E2E8F0"/>
-                </a:solidFill>
-                <a:latin typeface="Consolas"/>
-              </a:rPr>
-              <a:t>INNER JOIN kliendid kl ON t.klient_id = kl.klient_id</a:t>
-            </a:r>
-          </a:p>
-          <a:p>
-            <a:pPr>
-              <a:spcAft>
-                <a:spcPts val="200"/>
-              </a:spcAft>
-            </a:pPr>
-            <a:r>
-              <a:rPr sz="1200" b="0">
-                <a:solidFill>
-                  <a:srgbClr val="E2E8F0"/>
-                </a:solidFill>
-                <a:latin typeface="Consolas"/>
-              </a:rPr>
-              <a:t>INNER JOIN tellimuse_read tr ON t.tellimus_id = tr.tellimus_id</a:t>
-            </a:r>
-          </a:p>
-          <a:p>
-            <a:pPr>
-              <a:spcAft>
-                <a:spcPts val="200"/>
-              </a:spcAft>
-            </a:pPr>
-            <a:r>
-              <a:rPr sz="1200" b="0">
-                <a:solidFill>
-                  <a:srgbClr val="E2E8F0"/>
-                </a:solidFill>
-                <a:latin typeface="Consolas"/>
-              </a:rPr>
-              <a:t>INNER JOIN tooted td ON tr.toode_id = td.toode_id</a:t>
-            </a:r>
-          </a:p>
-          <a:p>
-            <a:pPr>
-              <a:spcAft>
-                <a:spcPts val="200"/>
-              </a:spcAft>
-            </a:pPr>
-            <a:r>
-              <a:rPr sz="1200" b="0">
-                <a:solidFill>
-                  <a:srgbClr val="E2E8F0"/>
-                </a:solidFill>
-                <a:latin typeface="Consolas"/>
-              </a:rPr>
-              <a:t>LEFT JOIN kategooriad k ON td.kategooria = k.nimetus</a:t>
-            </a:r>
-          </a:p>
-          <a:p>
-            <a:pPr>
-              <a:spcAft>
-                <a:spcPts val="200"/>
-              </a:spcAft>
-            </a:pPr>
-            <a:r>
-              <a:rPr sz="1200" b="0">
-                <a:solidFill>
-                  <a:srgbClr val="E2E8F0"/>
-                </a:solidFill>
-                <a:latin typeface="Consolas"/>
-              </a:rPr>
-              <a:t>GROUP BY t.tellimus_id, t.klient_id, t.kuupäev,</a:t>
-            </a:r>
-          </a:p>
-          <a:p>
-            <a:pPr>
-              <a:spcAft>
-                <a:spcPts val="200"/>
-              </a:spcAft>
-            </a:pPr>
-            <a:r>
-              <a:rPr sz="1200" b="0">
-                <a:solidFill>
-                  <a:srgbClr val="E2E8F0"/>
-                </a:solidFill>
-                <a:latin typeface="Consolas"/>
-              </a:rPr>
-              <a:t>         t.staatus, t.makseviis, t.tarneviis, kl.liitumise_kuupäev;</a:t>
-            </a:r>
-          </a:p>
-        </p:txBody>
-      </p:sp>
-    </p:spTree>
-  </p:cSld>
-  <p:clrMapOvr>
-    <a:masterClrMapping/>
-  </p:clrMapOvr>
-</p:sld>
-</file>
-
-<file path=ppt/slides/slide9.xml><?xml version="1.0" encoding="utf-8"?>
-<p:sld xmlns:a="http://schemas.openxmlformats.org/drawingml/2006/main" xmlns:r="http://schemas.openxmlformats.org/officeDocument/2006/relationships" xmlns:p="http://schemas.openxmlformats.org/presentationml/2006/main">
-  <p:cSld>
-    <p:spTree>
-      <p:nvGrpSpPr>
-        <p:cNvPr id="1" name="">
-          <a:extLst>
-            <a:ext uri="{FF2B5EF4-FFF2-40B4-BE49-F238E27FC236}">
-              <a16:creationId xmlns:a16="http://schemas.microsoft.com/office/drawing/2014/main" id="{CDEAE2DA-6A29-B9EB-B75B-EB98B5A48780}"/>
-            </a:ext>
-          </a:extLst>
-        </p:cNvPr>
-        <p:cNvGrpSpPr/>
-        <p:nvPr/>
-      </p:nvGrpSpPr>
-      <p:grpSpPr>
-        <a:xfrm>
-          <a:off x="0" y="0"/>
-          <a:ext cx="0" cy="0"/>
-          <a:chOff x="0" y="0"/>
-          <a:chExt cx="0" cy="0"/>
-        </a:xfrm>
-      </p:grpSpPr>
-      <p:sp>
-        <p:nvSpPr>
-          <p:cNvPr id="3" name="Rectangle 2">
-            <a:extLst>
-              <a:ext uri="{FF2B5EF4-FFF2-40B4-BE49-F238E27FC236}">
-                <a16:creationId xmlns:a16="http://schemas.microsoft.com/office/drawing/2014/main" id="{412DC34E-11D5-9F50-C580-FC411319D5E5}"/>
-              </a:ext>
-            </a:extLst>
-          </p:cNvPr>
-          <p:cNvSpPr/>
-          <p:nvPr/>
-        </p:nvSpPr>
-        <p:spPr>
-          <a:xfrm>
-            <a:off x="0" y="0"/>
-            <a:ext cx="12191695" cy="841248"/>
-          </a:xfrm>
-          <a:prstGeom prst="rect">
-            <a:avLst/>
-          </a:prstGeom>
-          <a:solidFill>
-            <a:srgbClr val="0F203E"/>
-          </a:solidFill>
-          <a:ln>
-            <a:noFill/>
-          </a:ln>
-          <a:effectLst/>
-        </p:spPr>
-        <p:style>
-          <a:lnRef idx="1">
-            <a:schemeClr val="accent1"/>
-          </a:lnRef>
-          <a:fillRef idx="3">
-            <a:schemeClr val="accent1"/>
-          </a:fillRef>
-          <a:effectRef idx="2">
-            <a:schemeClr val="accent1"/>
-          </a:effectRef>
-          <a:fontRef idx="minor">
-            <a:schemeClr val="lt1"/>
-          </a:fontRef>
-        </p:style>
-        <p:txBody>
-          <a:bodyPr rtlCol="0" anchor="ctr"/>
-          <a:lstStyle/>
-          <a:p>
-            <a:pPr algn="ctr"/>
-            <a:endParaRPr/>
-          </a:p>
-        </p:txBody>
-      </p:sp>
-      <p:sp>
-        <p:nvSpPr>
-          <p:cNvPr id="4" name="Rectangle 3">
-            <a:extLst>
-              <a:ext uri="{FF2B5EF4-FFF2-40B4-BE49-F238E27FC236}">
-                <a16:creationId xmlns:a16="http://schemas.microsoft.com/office/drawing/2014/main" id="{D30640FC-BBDD-A3F5-311E-426C6FC0373A}"/>
-              </a:ext>
-            </a:extLst>
-          </p:cNvPr>
-          <p:cNvSpPr/>
-          <p:nvPr/>
-        </p:nvSpPr>
-        <p:spPr>
-          <a:xfrm>
-            <a:off x="0" y="841248"/>
-            <a:ext cx="12191695" cy="73152"/>
-          </a:xfrm>
-          <a:prstGeom prst="rect">
-            <a:avLst/>
-          </a:prstGeom>
-          <a:solidFill>
-            <a:srgbClr val="007073"/>
-          </a:solidFill>
-          <a:ln>
-            <a:noFill/>
-          </a:ln>
-          <a:effectLst/>
-        </p:spPr>
-        <p:style>
-          <a:lnRef idx="1">
-            <a:schemeClr val="accent1"/>
-          </a:lnRef>
-          <a:fillRef idx="3">
-            <a:schemeClr val="accent1"/>
-          </a:fillRef>
-          <a:effectRef idx="2">
-            <a:schemeClr val="accent1"/>
-          </a:effectRef>
-          <a:fontRef idx="minor">
-            <a:schemeClr val="lt1"/>
-          </a:fontRef>
-        </p:style>
-        <p:txBody>
-          <a:bodyPr rtlCol="0" anchor="ctr"/>
-          <a:lstStyle/>
-          <a:p>
-            <a:pPr algn="ctr"/>
-            <a:endParaRPr/>
-          </a:p>
-        </p:txBody>
-      </p:sp>
-      <p:sp>
-        <p:nvSpPr>
-          <p:cNvPr id="5" name="TextBox 4">
-            <a:extLst>
-              <a:ext uri="{FF2B5EF4-FFF2-40B4-BE49-F238E27FC236}">
-                <a16:creationId xmlns:a16="http://schemas.microsoft.com/office/drawing/2014/main" id="{B3248E7B-A36D-8A1F-7629-E5FCA7F105BB}"/>
-              </a:ext>
-            </a:extLst>
-          </p:cNvPr>
-          <p:cNvSpPr txBox="1"/>
-          <p:nvPr/>
-        </p:nvSpPr>
-        <p:spPr>
-          <a:xfrm>
-            <a:off x="365760" y="208079"/>
-            <a:ext cx="11430000" cy="461665"/>
-          </a:xfrm>
-          <a:prstGeom prst="rect">
-            <a:avLst/>
-          </a:prstGeom>
-          <a:noFill/>
-        </p:spPr>
-        <p:txBody>
-          <a:bodyPr wrap="square" anchor="ctr">
-            <a:spAutoFit/>
-          </a:bodyPr>
-          <a:lstStyle/>
-          <a:p>
-            <a:pPr algn="l"/>
-            <a:r>
-              <a:rPr lang="en-GB" sz="2400" b="1" dirty="0">
-                <a:solidFill>
-                  <a:srgbClr val="FFFFFF"/>
-                </a:solidFill>
-                <a:latin typeface="Calibri"/>
-              </a:rPr>
-              <a:t>LOO VAJALIKUD TÄHTSKEEMI VAATED</a:t>
-            </a:r>
-            <a:r>
-              <a:rPr lang="et-EE" sz="2400" b="1" dirty="0">
-                <a:solidFill>
-                  <a:srgbClr val="FFFFFF"/>
-                </a:solidFill>
-                <a:latin typeface="Calibri"/>
-              </a:rPr>
-              <a:t> </a:t>
-            </a:r>
-            <a:r>
-              <a:rPr lang="en-GB" sz="2400" b="1" dirty="0">
-                <a:solidFill>
-                  <a:srgbClr val="92D050"/>
-                </a:solidFill>
-                <a:latin typeface="Calibri"/>
-              </a:rPr>
-              <a:t>NÄITAN</a:t>
-            </a:r>
-            <a:endParaRPr sz="2400" b="1" dirty="0">
-              <a:solidFill>
-                <a:srgbClr val="92D050"/>
-              </a:solidFill>
-              <a:latin typeface="Calibri"/>
-            </a:endParaRPr>
-          </a:p>
-        </p:txBody>
-      </p:sp>
-      <p:sp>
-        <p:nvSpPr>
-          <p:cNvPr id="8" name="TextBox 7">
-            <a:extLst>
-              <a:ext uri="{FF2B5EF4-FFF2-40B4-BE49-F238E27FC236}">
-                <a16:creationId xmlns:a16="http://schemas.microsoft.com/office/drawing/2014/main" id="{D060FF81-0435-BC2D-66B5-A49787887F12}"/>
-              </a:ext>
-            </a:extLst>
-          </p:cNvPr>
-          <p:cNvSpPr txBox="1"/>
-          <p:nvPr/>
-        </p:nvSpPr>
-        <p:spPr>
-          <a:xfrm>
-            <a:off x="9601200" y="6601968"/>
-            <a:ext cx="2194560" cy="256032"/>
-          </a:xfrm>
-          <a:prstGeom prst="rect">
-            <a:avLst/>
-          </a:prstGeom>
-          <a:noFill/>
-        </p:spPr>
-        <p:txBody>
-          <a:bodyPr wrap="square" anchor="ctr">
-            <a:spAutoFit/>
-          </a:bodyPr>
-          <a:lstStyle/>
-          <a:p>
-            <a:pPr algn="r"/>
-            <a:r>
-              <a:rPr sz="1100" b="0">
-                <a:solidFill>
-                  <a:srgbClr val="94A3B8"/>
-                </a:solidFill>
-                <a:latin typeface="Calibri"/>
-              </a:rPr>
-              <a:t>23</a:t>
-            </a:r>
-          </a:p>
-        </p:txBody>
-      </p:sp>
-      <p:sp>
-        <p:nvSpPr>
-          <p:cNvPr id="13" name="Rectangle 12">
-            <a:extLst>
-              <a:ext uri="{FF2B5EF4-FFF2-40B4-BE49-F238E27FC236}">
-                <a16:creationId xmlns:a16="http://schemas.microsoft.com/office/drawing/2014/main" id="{E530FAD5-F214-4AAC-1F05-668962147D8B}"/>
-              </a:ext>
-            </a:extLst>
-          </p:cNvPr>
-          <p:cNvSpPr/>
-          <p:nvPr/>
-        </p:nvSpPr>
-        <p:spPr>
-          <a:xfrm>
-            <a:off x="306126" y="1085904"/>
-            <a:ext cx="11236518" cy="502920"/>
-          </a:xfrm>
-          <a:prstGeom prst="rect">
-            <a:avLst/>
-          </a:prstGeom>
-          <a:solidFill>
-            <a:srgbClr val="047857"/>
-          </a:solidFill>
-          <a:ln>
-            <a:noFill/>
-          </a:ln>
-          <a:effectLst/>
-        </p:spPr>
-        <p:style>
-          <a:lnRef idx="1">
-            <a:schemeClr val="accent1"/>
-          </a:lnRef>
-          <a:fillRef idx="3">
-            <a:schemeClr val="accent1"/>
-          </a:fillRef>
-          <a:effectRef idx="2">
-            <a:schemeClr val="accent1"/>
-          </a:effectRef>
-          <a:fontRef idx="minor">
-            <a:schemeClr val="lt1"/>
-          </a:fontRef>
-        </p:style>
-        <p:txBody>
-          <a:bodyPr rtlCol="0" anchor="ctr"/>
-          <a:lstStyle/>
-          <a:p>
-            <a:pPr algn="ctr"/>
-            <a:endParaRPr/>
-          </a:p>
-        </p:txBody>
-      </p:sp>
-      <p:sp>
-        <p:nvSpPr>
-          <p:cNvPr id="14" name="TextBox 13">
-            <a:extLst>
-              <a:ext uri="{FF2B5EF4-FFF2-40B4-BE49-F238E27FC236}">
-                <a16:creationId xmlns:a16="http://schemas.microsoft.com/office/drawing/2014/main" id="{D269990C-673E-7DEF-94FD-1CBB7B22303C}"/>
-              </a:ext>
-            </a:extLst>
-          </p:cNvPr>
-          <p:cNvSpPr txBox="1"/>
-          <p:nvPr/>
-        </p:nvSpPr>
-        <p:spPr>
-          <a:xfrm>
-            <a:off x="306126" y="1137309"/>
-            <a:ext cx="11044362" cy="400110"/>
-          </a:xfrm>
-          <a:prstGeom prst="rect">
-            <a:avLst/>
-          </a:prstGeom>
-          <a:noFill/>
-        </p:spPr>
-        <p:txBody>
-          <a:bodyPr wrap="square" anchor="ctr">
-            <a:spAutoFit/>
-          </a:bodyPr>
-          <a:lstStyle/>
-          <a:p>
-            <a:pPr algn="ctr"/>
-            <a:r>
-              <a:rPr lang="et-EE" sz="2000" b="1" dirty="0">
-                <a:solidFill>
-                  <a:srgbClr val="FFFFFF"/>
-                </a:solidFill>
-                <a:latin typeface="Calibri"/>
-              </a:rPr>
-              <a:t>Milline võiks olla tabelite ja vajaliku info alusel tähtskeem: joonista</a:t>
-            </a:r>
-            <a:endParaRPr sz="2000" b="1" dirty="0">
-              <a:solidFill>
-                <a:srgbClr val="FFFFFF"/>
-              </a:solidFill>
-              <a:latin typeface="Calibri"/>
-            </a:endParaRPr>
-          </a:p>
-        </p:txBody>
-      </p:sp>
-      <p:sp>
-        <p:nvSpPr>
-          <p:cNvPr id="15" name="TextBox 14">
-            <a:extLst>
-              <a:ext uri="{FF2B5EF4-FFF2-40B4-BE49-F238E27FC236}">
-                <a16:creationId xmlns:a16="http://schemas.microsoft.com/office/drawing/2014/main" id="{10AE1595-FF59-1FA7-BADA-C7E3D470F09D}"/>
-              </a:ext>
-            </a:extLst>
-          </p:cNvPr>
-          <p:cNvSpPr txBox="1"/>
-          <p:nvPr/>
-        </p:nvSpPr>
-        <p:spPr>
-          <a:xfrm>
-            <a:off x="270344" y="1649007"/>
-            <a:ext cx="11080144" cy="1508105"/>
-          </a:xfrm>
-          <a:prstGeom prst="rect">
-            <a:avLst/>
-          </a:prstGeom>
-          <a:noFill/>
-        </p:spPr>
-        <p:txBody>
-          <a:bodyPr wrap="square">
-            <a:spAutoFit/>
-          </a:bodyPr>
-          <a:lstStyle/>
-          <a:p>
-            <a:pPr marL="342900" indent="-342900">
-              <a:spcAft>
-                <a:spcPts val="1200"/>
-              </a:spcAft>
-              <a:buFont typeface="+mj-lt"/>
-              <a:buAutoNum type="arabicPeriod"/>
-            </a:pPr>
-            <a:r>
-              <a:rPr lang="en-GB" dirty="0" err="1">
-                <a:solidFill>
-                  <a:srgbClr val="334155"/>
-                </a:solidFill>
-                <a:latin typeface="Calibri"/>
-              </a:rPr>
-              <a:t>Ainult</a:t>
-            </a:r>
-            <a:r>
-              <a:rPr lang="en-GB" dirty="0">
-                <a:solidFill>
-                  <a:srgbClr val="334155"/>
-                </a:solidFill>
-                <a:latin typeface="Calibri"/>
-              </a:rPr>
-              <a:t> </a:t>
-            </a:r>
-            <a:r>
-              <a:rPr lang="en-GB" dirty="0" err="1">
-                <a:solidFill>
-                  <a:srgbClr val="334155"/>
-                </a:solidFill>
-                <a:latin typeface="Calibri"/>
-              </a:rPr>
-              <a:t>analüütikaks</a:t>
-            </a:r>
-            <a:r>
-              <a:rPr lang="en-GB" dirty="0">
-                <a:solidFill>
-                  <a:srgbClr val="334155"/>
-                </a:solidFill>
-                <a:latin typeface="Calibri"/>
-              </a:rPr>
-              <a:t> </a:t>
-            </a:r>
-            <a:r>
-              <a:rPr lang="en-GB" dirty="0" err="1">
-                <a:solidFill>
-                  <a:srgbClr val="334155"/>
-                </a:solidFill>
-                <a:latin typeface="Calibri"/>
-              </a:rPr>
-              <a:t>tabelite</a:t>
-            </a:r>
-            <a:r>
-              <a:rPr lang="en-GB" dirty="0">
-                <a:solidFill>
-                  <a:srgbClr val="334155"/>
-                </a:solidFill>
-                <a:latin typeface="Calibri"/>
-              </a:rPr>
-              <a:t> </a:t>
-            </a:r>
-            <a:r>
-              <a:rPr lang="en-GB" dirty="0" err="1">
-                <a:solidFill>
-                  <a:srgbClr val="334155"/>
-                </a:solidFill>
-                <a:latin typeface="Calibri"/>
-              </a:rPr>
-              <a:t>ja</a:t>
-            </a:r>
-            <a:r>
-              <a:rPr lang="en-GB" dirty="0">
-                <a:solidFill>
-                  <a:srgbClr val="334155"/>
-                </a:solidFill>
-                <a:latin typeface="Calibri"/>
-              </a:rPr>
-              <a:t> </a:t>
-            </a:r>
-            <a:r>
-              <a:rPr lang="en-GB" dirty="0" err="1">
-                <a:solidFill>
-                  <a:srgbClr val="334155"/>
-                </a:solidFill>
-                <a:latin typeface="Calibri"/>
-              </a:rPr>
-              <a:t>vaadete</a:t>
-            </a:r>
-            <a:r>
-              <a:rPr lang="en-GB" dirty="0">
-                <a:solidFill>
-                  <a:srgbClr val="334155"/>
-                </a:solidFill>
-                <a:latin typeface="Calibri"/>
-              </a:rPr>
-              <a:t> </a:t>
-            </a:r>
-            <a:r>
-              <a:rPr lang="en-GB" dirty="0" err="1">
-                <a:solidFill>
-                  <a:srgbClr val="334155"/>
-                </a:solidFill>
-                <a:latin typeface="Calibri"/>
-              </a:rPr>
-              <a:t>koondamine</a:t>
-            </a:r>
-            <a:br>
-              <a:rPr lang="en-GB" dirty="0">
-                <a:solidFill>
-                  <a:srgbClr val="334155"/>
-                </a:solidFill>
-                <a:latin typeface="Calibri"/>
-              </a:rPr>
-            </a:br>
-            <a:r>
-              <a:rPr lang="en-GB" b="1" dirty="0">
-                <a:solidFill>
-                  <a:srgbClr val="334155"/>
-                </a:solidFill>
-                <a:latin typeface="Calibri"/>
-              </a:rPr>
-              <a:t>‘analytics’</a:t>
-            </a:r>
-          </a:p>
-          <a:p>
-            <a:pPr marL="342900" indent="-342900">
-              <a:spcAft>
-                <a:spcPts val="1200"/>
-              </a:spcAft>
-              <a:buFont typeface="+mj-lt"/>
-              <a:buAutoNum type="arabicPeriod"/>
-            </a:pPr>
-            <a:r>
-              <a:rPr lang="en-GB" dirty="0">
-                <a:solidFill>
-                  <a:srgbClr val="334155"/>
-                </a:solidFill>
-                <a:latin typeface="Calibri"/>
-              </a:rPr>
-              <a:t>‘</a:t>
-            </a:r>
-            <a:r>
-              <a:rPr lang="en-GB" b="1" dirty="0">
-                <a:solidFill>
-                  <a:srgbClr val="334155"/>
-                </a:solidFill>
-                <a:latin typeface="Calibri"/>
-              </a:rPr>
-              <a:t>CREATE VIEWS’</a:t>
-            </a:r>
-          </a:p>
-          <a:p>
-            <a:pPr marL="342900" indent="-342900">
-              <a:spcAft>
-                <a:spcPts val="1200"/>
-              </a:spcAft>
-              <a:buFont typeface="+mj-lt"/>
-              <a:buAutoNum type="arabicPeriod"/>
-            </a:pPr>
-            <a:r>
-              <a:rPr lang="en-GB" dirty="0">
-                <a:solidFill>
-                  <a:srgbClr val="334155"/>
-                </a:solidFill>
-                <a:latin typeface="Calibri"/>
-              </a:rPr>
-              <a:t>VIEW </a:t>
-            </a:r>
-            <a:r>
-              <a:rPr lang="en-GB" dirty="0" err="1">
-                <a:solidFill>
-                  <a:srgbClr val="334155"/>
-                </a:solidFill>
-                <a:latin typeface="Calibri"/>
-              </a:rPr>
-              <a:t>loomine</a:t>
-            </a:r>
-            <a:endParaRPr lang="en-GB" dirty="0">
-              <a:solidFill>
-                <a:srgbClr val="334155"/>
-              </a:solidFill>
-              <a:latin typeface="Calibri"/>
-            </a:endParaRPr>
-          </a:p>
-        </p:txBody>
-      </p:sp>
-    </p:spTree>
-    <p:extLst>
-      <p:ext uri="{BB962C8B-B14F-4D97-AF65-F5344CB8AC3E}">
-        <p14:creationId xmlns:p14="http://schemas.microsoft.com/office/powerpoint/2010/main" val="923222670"/>
       </p:ext>
     </p:extLst>
   </p:cSld>
